--- a/output/wordlabs-friend-3day.pptx
+++ b/output/wordlabs-friend-3day.pptx
@@ -4240,7 +4240,7 @@
                 <a:ea typeface="Calibri" pitchFamily="34" charset="-122"/>
                 <a:cs typeface="Calibri" pitchFamily="34" charset="-120"/>
               </a:rPr>
-              <a:t>"person who is liked"</a:t>
+              <a:t>"person one likes and trusts"</a:t>
             </a:r>
             <a:endParaRPr lang="en-US" sz="2200" dirty="0"/>
           </a:p>
@@ -5288,7 +5288,7 @@
                 <a:ea typeface="Calibri" pitchFamily="34" charset="-122"/>
                 <a:cs typeface="Calibri" pitchFamily="34" charset="-120"/>
               </a:rPr>
-              <a:t>Word Labs  •  wordlabs.app  •  Root: 'friend' = person who is liked</a:t>
+              <a:t>Word Labs  •  wordlabs.app  •  Root: 'friend' = person one likes and trusts</a:t>
             </a:r>
             <a:endParaRPr lang="en-US" sz="800" dirty="0"/>
           </a:p>
@@ -5928,7 +5928,7 @@
                 <a:ea typeface="Calibri" pitchFamily="34" charset="-122"/>
                 <a:cs typeface="Calibri" pitchFamily="34" charset="-120"/>
               </a:rPr>
-              <a:t>Word Labs  •  wordlabs.app  •  Root: 'friend' = person who is liked</a:t>
+              <a:t>Word Labs  •  wordlabs.app  •  Root: 'friend' = person one likes and trusts</a:t>
             </a:r>
             <a:endParaRPr lang="en-US" sz="800" dirty="0"/>
           </a:p>
@@ -6071,7 +6071,7 @@
                 <a:ea typeface="Calibri" pitchFamily="34" charset="-122"/>
                 <a:cs typeface="Calibri" pitchFamily="34" charset="-120"/>
               </a:rPr>
-              <a:t> the new student, and their </a:t>
+              <a:t> the new girl, and their </a:t>
             </a:r>
             <a:pPr algn="l" indent="0" marL="0">
               <a:buNone/>
@@ -6716,7 +6716,7 @@
                 <a:ea typeface="Calibri" pitchFamily="34" charset="-122"/>
                 <a:cs typeface="Calibri" pitchFamily="34" charset="-120"/>
               </a:rPr>
-              <a:t>Word Labs  •  wordlabs.app  •  Root: 'friend' = person who is liked</a:t>
+              <a:t>Word Labs  •  wordlabs.app  •  Root: 'friend' = person one likes and trusts</a:t>
             </a:r>
             <a:endParaRPr lang="en-US" sz="800" dirty="0"/>
           </a:p>
@@ -7543,7 +7543,7 @@
                 <a:ea typeface="Calibri" pitchFamily="34" charset="-122"/>
                 <a:cs typeface="Calibri" pitchFamily="34" charset="-120"/>
               </a:rPr>
-              <a:t>Word Labs  •  wordlabs.app  •  Root: 'friend' = person who is liked</a:t>
+              <a:t>Word Labs  •  wordlabs.app  •  Root: 'friend' = person one likes and trusts</a:t>
             </a:r>
             <a:endParaRPr lang="en-US" sz="800" dirty="0"/>
           </a:p>
@@ -7972,7 +7972,7 @@
                 <a:ea typeface="Calibri" pitchFamily="34" charset="-122"/>
                 <a:cs typeface="Calibri" pitchFamily="34" charset="-120"/>
               </a:rPr>
-              <a:t>person who is liked</a:t>
+              <a:t>person one likes and trusts</a:t>
             </a:r>
             <a:endParaRPr lang="en-US" sz="850" dirty="0"/>
           </a:p>
@@ -8528,7 +8528,7 @@
                 <a:ea typeface="Calibri" pitchFamily="34" charset="-122"/>
                 <a:cs typeface="Calibri" pitchFamily="34" charset="-120"/>
               </a:rPr>
-              <a:t>Word Labs  •  wordlabs.app  •  Root: 'friend' = person who is liked</a:t>
+              <a:t>Word Labs  •  wordlabs.app  •  Root: 'friend' = person one likes and trusts</a:t>
             </a:r>
             <a:endParaRPr lang="en-US" sz="800" dirty="0"/>
           </a:p>
@@ -8957,7 +8957,7 @@
                 <a:ea typeface="Calibri" pitchFamily="34" charset="-122"/>
                 <a:cs typeface="Calibri" pitchFamily="34" charset="-120"/>
               </a:rPr>
-              <a:t>person who is liked</a:t>
+              <a:t>person one likes and trusts</a:t>
             </a:r>
             <a:endParaRPr lang="en-US" sz="850" dirty="0"/>
           </a:p>
@@ -9645,7 +9645,7 @@
                 <a:ea typeface="Calibri" pitchFamily="34" charset="-122"/>
                 <a:cs typeface="Calibri" pitchFamily="34" charset="-120"/>
               </a:rPr>
-              <a:t>Word Labs  •  wordlabs.app  •  Root: 'friend' = person who is liked</a:t>
+              <a:t>Word Labs  •  wordlabs.app  •  Root: 'friend' = person one likes and trusts</a:t>
             </a:r>
             <a:endParaRPr lang="en-US" sz="800" dirty="0"/>
           </a:p>
@@ -10074,7 +10074,7 @@
                 <a:ea typeface="Calibri" pitchFamily="34" charset="-122"/>
                 <a:cs typeface="Calibri" pitchFamily="34" charset="-120"/>
               </a:rPr>
-              <a:t>person who is liked</a:t>
+              <a:t>person one likes and trusts</a:t>
             </a:r>
             <a:endParaRPr lang="en-US" sz="850" dirty="0"/>
           </a:p>
@@ -10419,11 +10419,11 @@
         <p:spPr>
           <a:xfrm>
             <a:off x="1874520" y="4096512"/>
-            <a:ext cx="6903720" cy="804672"/>
+            <a:ext cx="6903720" cy="658368"/>
           </a:xfrm>
           <a:prstGeom prst="rect">
             <a:avLst>
-              <a:gd name="adj" fmla="val 6818"/>
+              <a:gd name="adj" fmla="val 8333"/>
             </a:avLst>
           </a:prstGeom>
           <a:solidFill>
@@ -10446,11 +10446,11 @@
         <p:spPr>
           <a:xfrm>
             <a:off x="2254649" y="4169664"/>
-            <a:ext cx="685800" cy="384048"/>
+            <a:ext cx="685800" cy="475488"/>
           </a:xfrm>
           <a:prstGeom prst="rect">
             <a:avLst>
-              <a:gd name="adj" fmla="val 9524"/>
+              <a:gd name="adj" fmla="val 7692"/>
             </a:avLst>
           </a:prstGeom>
           <a:solidFill>
@@ -10473,7 +10473,7 @@
         <p:spPr>
           <a:xfrm>
             <a:off x="2254649" y="4169664"/>
-            <a:ext cx="685800" cy="384048"/>
+            <a:ext cx="685800" cy="475488"/>
           </a:xfrm>
           <a:prstGeom prst="rect">
             <a:avLst/>
@@ -10512,11 +10512,11 @@
         <p:spPr>
           <a:xfrm>
             <a:off x="3293146" y="4169664"/>
-            <a:ext cx="685800" cy="384048"/>
+            <a:ext cx="685800" cy="475488"/>
           </a:xfrm>
           <a:prstGeom prst="rect">
             <a:avLst>
-              <a:gd name="adj" fmla="val 9524"/>
+              <a:gd name="adj" fmla="val 7692"/>
             </a:avLst>
           </a:prstGeom>
           <a:solidFill>
@@ -10539,7 +10539,7 @@
         <p:spPr>
           <a:xfrm>
             <a:off x="3293146" y="4169664"/>
-            <a:ext cx="685800" cy="384048"/>
+            <a:ext cx="685800" cy="475488"/>
           </a:xfrm>
           <a:prstGeom prst="rect">
             <a:avLst/>
@@ -10578,11 +10578,11 @@
         <p:spPr>
           <a:xfrm>
             <a:off x="4331643" y="4169664"/>
-            <a:ext cx="685800" cy="384048"/>
+            <a:ext cx="685800" cy="475488"/>
           </a:xfrm>
           <a:prstGeom prst="rect">
             <a:avLst>
-              <a:gd name="adj" fmla="val 9524"/>
+              <a:gd name="adj" fmla="val 7692"/>
             </a:avLst>
           </a:prstGeom>
           <a:solidFill>
@@ -10605,7 +10605,7 @@
         <p:spPr>
           <a:xfrm>
             <a:off x="4331643" y="4169664"/>
-            <a:ext cx="685800" cy="384048"/>
+            <a:ext cx="685800" cy="475488"/>
           </a:xfrm>
           <a:prstGeom prst="rect">
             <a:avLst/>
@@ -10644,11 +10644,11 @@
         <p:spPr>
           <a:xfrm>
             <a:off x="5370141" y="4169664"/>
-            <a:ext cx="685800" cy="384048"/>
+            <a:ext cx="685800" cy="475488"/>
           </a:xfrm>
           <a:prstGeom prst="rect">
             <a:avLst>
-              <a:gd name="adj" fmla="val 9524"/>
+              <a:gd name="adj" fmla="val 7692"/>
             </a:avLst>
           </a:prstGeom>
           <a:solidFill>
@@ -10671,7 +10671,7 @@
         <p:spPr>
           <a:xfrm>
             <a:off x="5370141" y="4169664"/>
-            <a:ext cx="685800" cy="384048"/>
+            <a:ext cx="685800" cy="475488"/>
           </a:xfrm>
           <a:prstGeom prst="rect">
             <a:avLst/>
@@ -10703,57 +10703,18 @@
       </p:sp>
       <p:sp>
         <p:nvSpPr>
-          <p:cNvPr id="41" name="Text 39"/>
-          <p:cNvSpPr/>
-          <p:nvPr/>
-        </p:nvSpPr>
-        <p:spPr>
-          <a:xfrm>
-            <a:off x="5370141" y="4572000"/>
-            <a:ext cx="685800" cy="219456"/>
-          </a:xfrm>
-          <a:prstGeom prst="rect">
-            <a:avLst/>
-          </a:prstGeom>
-          <a:noFill/>
-          <a:ln/>
-        </p:spPr>
-        <p:txBody>
-          <a:bodyPr wrap="square" lIns="0" tIns="0" rIns="0" bIns="0" rtlCol="0" anchor="t"/>
-          <a:lstStyle/>
-          <a:p>
-            <a:pPr algn="ctr" indent="0" marL="0">
-              <a:buNone/>
-            </a:pPr>
-            <a:r>
-              <a:rPr lang="en-US" sz="750" i="1" dirty="0">
-                <a:solidFill>
-                  <a:srgbClr val="94A3B8"/>
-                </a:solidFill>
-                <a:latin typeface="Calibri" pitchFamily="34" charset="0"/>
-                <a:ea typeface="Calibri" pitchFamily="34" charset="-122"/>
-                <a:cs typeface="Calibri" pitchFamily="34" charset="-120"/>
-              </a:rPr>
-              <a:t>/e/</a:t>
-            </a:r>
-            <a:endParaRPr lang="en-US" sz="750" dirty="0"/>
-          </a:p>
-        </p:txBody>
-      </p:sp>
-      <p:sp>
-        <p:nvSpPr>
-          <p:cNvPr id="42" name="Shape 40"/>
+          <p:cNvPr id="41" name="Shape 39"/>
           <p:cNvSpPr/>
           <p:nvPr/>
         </p:nvSpPr>
         <p:spPr>
           <a:xfrm>
             <a:off x="6408638" y="4169664"/>
-            <a:ext cx="685800" cy="384048"/>
+            <a:ext cx="685800" cy="475488"/>
           </a:xfrm>
           <a:prstGeom prst="rect">
             <a:avLst>
-              <a:gd name="adj" fmla="val 9524"/>
+              <a:gd name="adj" fmla="val 7692"/>
             </a:avLst>
           </a:prstGeom>
           <a:solidFill>
@@ -10769,14 +10730,14 @@
       </p:sp>
       <p:sp>
         <p:nvSpPr>
-          <p:cNvPr id="43" name="Text 41"/>
+          <p:cNvPr id="42" name="Text 40"/>
           <p:cNvSpPr/>
           <p:nvPr/>
         </p:nvSpPr>
         <p:spPr>
           <a:xfrm>
             <a:off x="6408638" y="4169664"/>
-            <a:ext cx="685800" cy="384048"/>
+            <a:ext cx="685800" cy="475488"/>
           </a:xfrm>
           <a:prstGeom prst="rect">
             <a:avLst/>
@@ -10808,18 +10769,18 @@
       </p:sp>
       <p:sp>
         <p:nvSpPr>
-          <p:cNvPr id="44" name="Shape 42"/>
+          <p:cNvPr id="43" name="Shape 41"/>
           <p:cNvSpPr/>
           <p:nvPr/>
         </p:nvSpPr>
         <p:spPr>
           <a:xfrm>
             <a:off x="7447135" y="4169664"/>
-            <a:ext cx="685800" cy="384048"/>
+            <a:ext cx="685800" cy="475488"/>
           </a:xfrm>
           <a:prstGeom prst="rect">
             <a:avLst>
-              <a:gd name="adj" fmla="val 9524"/>
+              <a:gd name="adj" fmla="val 7692"/>
             </a:avLst>
           </a:prstGeom>
           <a:solidFill>
@@ -10835,14 +10796,14 @@
       </p:sp>
       <p:sp>
         <p:nvSpPr>
-          <p:cNvPr id="45" name="Text 43"/>
+          <p:cNvPr id="44" name="Text 42"/>
           <p:cNvSpPr/>
           <p:nvPr/>
         </p:nvSpPr>
         <p:spPr>
           <a:xfrm>
             <a:off x="7447135" y="4169664"/>
-            <a:ext cx="685800" cy="384048"/>
+            <a:ext cx="685800" cy="475488"/>
           </a:xfrm>
           <a:prstGeom prst="rect">
             <a:avLst/>
@@ -11158,7 +11119,7 @@
                 <a:ea typeface="Calibri" pitchFamily="34" charset="-122"/>
                 <a:cs typeface="Calibri" pitchFamily="34" charset="-120"/>
               </a:rPr>
-              <a:t>Word Labs  •  wordlabs.app  •  Root: 'friend' = person who is liked</a:t>
+              <a:t>Word Labs  •  wordlabs.app  •  Root: 'friend' = person one likes and trusts</a:t>
             </a:r>
             <a:endParaRPr lang="en-US" sz="800" dirty="0"/>
           </a:p>
@@ -11985,7 +11946,7 @@
                 <a:ea typeface="Calibri" pitchFamily="34" charset="-122"/>
                 <a:cs typeface="Calibri" pitchFamily="34" charset="-120"/>
               </a:rPr>
-              <a:t>Word Labs  •  wordlabs.app  •  Root: 'friend' = person who is liked</a:t>
+              <a:t>Word Labs  •  wordlabs.app  •  Root: 'friend' = person one likes and trusts</a:t>
             </a:r>
             <a:endParaRPr lang="en-US" sz="800" dirty="0"/>
           </a:p>
@@ -12302,7 +12263,7 @@
                 <a:ea typeface="Calibri" pitchFamily="34" charset="-122"/>
                 <a:cs typeface="Calibri" pitchFamily="34" charset="-120"/>
               </a:rPr>
-              <a:t>person who is liked</a:t>
+              <a:t>person one likes and trusts</a:t>
             </a:r>
             <a:endParaRPr lang="en-US" sz="850" dirty="0"/>
           </a:p>
@@ -12970,7 +12931,7 @@
                 <a:ea typeface="Calibri" pitchFamily="34" charset="-122"/>
                 <a:cs typeface="Calibri" pitchFamily="34" charset="-120"/>
               </a:rPr>
-              <a:t>Word Labs  •  wordlabs.app  •  Root: 'friend' = person who is liked</a:t>
+              <a:t>Word Labs  •  wordlabs.app  •  Root: 'friend' = person one likes and trusts</a:t>
             </a:r>
             <a:endParaRPr lang="en-US" sz="800" dirty="0"/>
           </a:p>
@@ -13287,7 +13248,7 @@
                 <a:ea typeface="Calibri" pitchFamily="34" charset="-122"/>
                 <a:cs typeface="Calibri" pitchFamily="34" charset="-120"/>
               </a:rPr>
-              <a:t>person who is liked</a:t>
+              <a:t>person one likes and trusts</a:t>
             </a:r>
             <a:endParaRPr lang="en-US" sz="850" dirty="0"/>
           </a:p>
@@ -13996,7 +13957,7 @@
                 <a:ea typeface="Calibri" pitchFamily="34" charset="-122"/>
                 <a:cs typeface="Calibri" pitchFamily="34" charset="-120"/>
               </a:rPr>
-              <a:t>Root 'friend' — person who is liked</a:t>
+              <a:t>Root 'friend' — person one likes and trusts</a:t>
             </a:r>
             <a:endParaRPr lang="en-US" sz="1600" dirty="0"/>
           </a:p>
@@ -14352,7 +14313,7 @@
                 <a:ea typeface="Calibri" pitchFamily="34" charset="-122"/>
                 <a:cs typeface="Calibri" pitchFamily="34" charset="-120"/>
               </a:rPr>
-              <a:t>Word Labs  •  wordlabs.app  •  Root: 'friend' = person who is liked</a:t>
+              <a:t>Word Labs  •  wordlabs.app  •  Root: 'friend' = person one likes and trusts</a:t>
             </a:r>
             <a:endParaRPr lang="en-US" sz="800" dirty="0"/>
           </a:p>
@@ -14669,7 +14630,7 @@
                 <a:ea typeface="Calibri" pitchFamily="34" charset="-122"/>
                 <a:cs typeface="Calibri" pitchFamily="34" charset="-120"/>
               </a:rPr>
-              <a:t>person who is liked</a:t>
+              <a:t>person one likes and trusts</a:t>
             </a:r>
             <a:endParaRPr lang="en-US" sz="850" dirty="0"/>
           </a:p>
@@ -15126,11 +15087,11 @@
         <p:spPr>
           <a:xfrm>
             <a:off x="1874520" y="4096512"/>
-            <a:ext cx="6903720" cy="804672"/>
+            <a:ext cx="6903720" cy="658368"/>
           </a:xfrm>
           <a:prstGeom prst="rect">
             <a:avLst>
-              <a:gd name="adj" fmla="val 6818"/>
+              <a:gd name="adj" fmla="val 8333"/>
             </a:avLst>
           </a:prstGeom>
           <a:solidFill>
@@ -15153,11 +15114,11 @@
         <p:spPr>
           <a:xfrm>
             <a:off x="2124837" y="4169664"/>
-            <a:ext cx="685800" cy="384048"/>
+            <a:ext cx="685800" cy="475488"/>
           </a:xfrm>
           <a:prstGeom prst="rect">
             <a:avLst>
-              <a:gd name="adj" fmla="val 9524"/>
+              <a:gd name="adj" fmla="val 7692"/>
             </a:avLst>
           </a:prstGeom>
           <a:solidFill>
@@ -15180,7 +15141,7 @@
         <p:spPr>
           <a:xfrm>
             <a:off x="2124837" y="4169664"/>
-            <a:ext cx="685800" cy="384048"/>
+            <a:ext cx="685800" cy="475488"/>
           </a:xfrm>
           <a:prstGeom prst="rect">
             <a:avLst/>
@@ -15219,11 +15180,11 @@
         <p:spPr>
           <a:xfrm>
             <a:off x="3033522" y="4169664"/>
-            <a:ext cx="685800" cy="384048"/>
+            <a:ext cx="685800" cy="475488"/>
           </a:xfrm>
           <a:prstGeom prst="rect">
             <a:avLst>
-              <a:gd name="adj" fmla="val 9524"/>
+              <a:gd name="adj" fmla="val 7692"/>
             </a:avLst>
           </a:prstGeom>
           <a:solidFill>
@@ -15246,7 +15207,7 @@
         <p:spPr>
           <a:xfrm>
             <a:off x="3033522" y="4169664"/>
-            <a:ext cx="685800" cy="384048"/>
+            <a:ext cx="685800" cy="475488"/>
           </a:xfrm>
           <a:prstGeom prst="rect">
             <a:avLst/>
@@ -15278,57 +15239,18 @@
       </p:sp>
       <p:sp>
         <p:nvSpPr>
-          <p:cNvPr id="37" name="Text 35"/>
-          <p:cNvSpPr/>
-          <p:nvPr/>
-        </p:nvSpPr>
-        <p:spPr>
-          <a:xfrm>
-            <a:off x="3033522" y="4572000"/>
-            <a:ext cx="685800" cy="219456"/>
-          </a:xfrm>
-          <a:prstGeom prst="rect">
-            <a:avLst/>
-          </a:prstGeom>
-          <a:noFill/>
-          <a:ln/>
-        </p:spPr>
-        <p:txBody>
-          <a:bodyPr wrap="square" lIns="0" tIns="0" rIns="0" bIns="0" rtlCol="0" anchor="t"/>
-          <a:lstStyle/>
-          <a:p>
-            <a:pPr algn="ctr" indent="0" marL="0">
-              <a:buNone/>
-            </a:pPr>
-            <a:r>
-              <a:rPr lang="en-US" sz="750" i="1" dirty="0">
-                <a:solidFill>
-                  <a:srgbClr val="94A3B8"/>
-                </a:solidFill>
-                <a:latin typeface="Calibri" pitchFamily="34" charset="0"/>
-                <a:ea typeface="Calibri" pitchFamily="34" charset="-122"/>
-                <a:cs typeface="Calibri" pitchFamily="34" charset="-120"/>
-              </a:rPr>
-              <a:t>/e/</a:t>
-            </a:r>
-            <a:endParaRPr lang="en-US" sz="750" dirty="0"/>
-          </a:p>
-        </p:txBody>
-      </p:sp>
-      <p:sp>
-        <p:nvSpPr>
-          <p:cNvPr id="38" name="Shape 36"/>
+          <p:cNvPr id="37" name="Shape 35"/>
           <p:cNvSpPr/>
           <p:nvPr/>
         </p:nvSpPr>
         <p:spPr>
           <a:xfrm>
             <a:off x="3942207" y="4169664"/>
-            <a:ext cx="685800" cy="384048"/>
+            <a:ext cx="685800" cy="475488"/>
           </a:xfrm>
           <a:prstGeom prst="rect">
             <a:avLst>
-              <a:gd name="adj" fmla="val 9524"/>
+              <a:gd name="adj" fmla="val 7692"/>
             </a:avLst>
           </a:prstGeom>
           <a:solidFill>
@@ -15344,14 +15266,14 @@
       </p:sp>
       <p:sp>
         <p:nvSpPr>
-          <p:cNvPr id="39" name="Text 37"/>
+          <p:cNvPr id="38" name="Text 36"/>
           <p:cNvSpPr/>
           <p:nvPr/>
         </p:nvSpPr>
         <p:spPr>
           <a:xfrm>
             <a:off x="3942207" y="4169664"/>
-            <a:ext cx="685800" cy="384048"/>
+            <a:ext cx="685800" cy="475488"/>
           </a:xfrm>
           <a:prstGeom prst="rect">
             <a:avLst/>
@@ -15383,18 +15305,18 @@
       </p:sp>
       <p:sp>
         <p:nvSpPr>
-          <p:cNvPr id="40" name="Shape 38"/>
+          <p:cNvPr id="39" name="Shape 37"/>
           <p:cNvSpPr/>
           <p:nvPr/>
         </p:nvSpPr>
         <p:spPr>
           <a:xfrm>
             <a:off x="4850892" y="4169664"/>
-            <a:ext cx="685800" cy="384048"/>
+            <a:ext cx="685800" cy="475488"/>
           </a:xfrm>
           <a:prstGeom prst="rect">
             <a:avLst>
-              <a:gd name="adj" fmla="val 9524"/>
+              <a:gd name="adj" fmla="val 7692"/>
             </a:avLst>
           </a:prstGeom>
           <a:solidFill>
@@ -15410,14 +15332,14 @@
       </p:sp>
       <p:sp>
         <p:nvSpPr>
-          <p:cNvPr id="41" name="Text 39"/>
+          <p:cNvPr id="40" name="Text 38"/>
           <p:cNvSpPr/>
           <p:nvPr/>
         </p:nvSpPr>
         <p:spPr>
           <a:xfrm>
             <a:off x="4850892" y="4169664"/>
-            <a:ext cx="685800" cy="384048"/>
+            <a:ext cx="685800" cy="475488"/>
           </a:xfrm>
           <a:prstGeom prst="rect">
             <a:avLst/>
@@ -15449,18 +15371,18 @@
       </p:sp>
       <p:sp>
         <p:nvSpPr>
-          <p:cNvPr id="42" name="Shape 40"/>
+          <p:cNvPr id="41" name="Shape 39"/>
           <p:cNvSpPr/>
           <p:nvPr/>
         </p:nvSpPr>
         <p:spPr>
           <a:xfrm>
             <a:off x="5759577" y="4169664"/>
-            <a:ext cx="685800" cy="384048"/>
+            <a:ext cx="685800" cy="475488"/>
           </a:xfrm>
           <a:prstGeom prst="rect">
             <a:avLst>
-              <a:gd name="adj" fmla="val 9524"/>
+              <a:gd name="adj" fmla="val 7692"/>
             </a:avLst>
           </a:prstGeom>
           <a:solidFill>
@@ -15476,14 +15398,14 @@
       </p:sp>
       <p:sp>
         <p:nvSpPr>
-          <p:cNvPr id="43" name="Text 41"/>
+          <p:cNvPr id="42" name="Text 40"/>
           <p:cNvSpPr/>
           <p:nvPr/>
         </p:nvSpPr>
         <p:spPr>
           <a:xfrm>
             <a:off x="5759577" y="4169664"/>
-            <a:ext cx="685800" cy="384048"/>
+            <a:ext cx="685800" cy="475488"/>
           </a:xfrm>
           <a:prstGeom prst="rect">
             <a:avLst/>
@@ -15515,18 +15437,18 @@
       </p:sp>
       <p:sp>
         <p:nvSpPr>
-          <p:cNvPr id="44" name="Shape 42"/>
+          <p:cNvPr id="43" name="Shape 41"/>
           <p:cNvSpPr/>
           <p:nvPr/>
         </p:nvSpPr>
         <p:spPr>
           <a:xfrm>
             <a:off x="6668262" y="4169664"/>
-            <a:ext cx="685800" cy="384048"/>
+            <a:ext cx="685800" cy="475488"/>
           </a:xfrm>
           <a:prstGeom prst="rect">
             <a:avLst>
-              <a:gd name="adj" fmla="val 9524"/>
+              <a:gd name="adj" fmla="val 7692"/>
             </a:avLst>
           </a:prstGeom>
           <a:solidFill>
@@ -15542,14 +15464,14 @@
       </p:sp>
       <p:sp>
         <p:nvSpPr>
-          <p:cNvPr id="45" name="Text 43"/>
+          <p:cNvPr id="44" name="Text 42"/>
           <p:cNvSpPr/>
           <p:nvPr/>
         </p:nvSpPr>
         <p:spPr>
           <a:xfrm>
             <a:off x="6668262" y="4169664"/>
-            <a:ext cx="685800" cy="384048"/>
+            <a:ext cx="685800" cy="475488"/>
           </a:xfrm>
           <a:prstGeom prst="rect">
             <a:avLst/>
@@ -15581,18 +15503,18 @@
       </p:sp>
       <p:sp>
         <p:nvSpPr>
-          <p:cNvPr id="46" name="Shape 44"/>
+          <p:cNvPr id="45" name="Shape 43"/>
           <p:cNvSpPr/>
           <p:nvPr/>
         </p:nvSpPr>
         <p:spPr>
           <a:xfrm>
             <a:off x="7576947" y="4169664"/>
-            <a:ext cx="685800" cy="384048"/>
+            <a:ext cx="685800" cy="475488"/>
           </a:xfrm>
           <a:prstGeom prst="rect">
             <a:avLst>
-              <a:gd name="adj" fmla="val 9524"/>
+              <a:gd name="adj" fmla="val 7692"/>
             </a:avLst>
           </a:prstGeom>
           <a:solidFill>
@@ -15608,14 +15530,14 @@
       </p:sp>
       <p:sp>
         <p:nvSpPr>
-          <p:cNvPr id="47" name="Text 45"/>
+          <p:cNvPr id="46" name="Text 44"/>
           <p:cNvSpPr/>
           <p:nvPr/>
         </p:nvSpPr>
         <p:spPr>
           <a:xfrm>
             <a:off x="7576947" y="4169664"/>
-            <a:ext cx="685800" cy="384048"/>
+            <a:ext cx="685800" cy="475488"/>
           </a:xfrm>
           <a:prstGeom prst="rect">
             <a:avLst/>
@@ -16213,7 +16135,7 @@
                 <a:ea typeface="Calibri" pitchFamily="34" charset="-122"/>
                 <a:cs typeface="Calibri" pitchFamily="34" charset="-120"/>
               </a:rPr>
-              <a:t>Word Labs  •  wordlabs.app  •  Root: 'friend' = person who is liked</a:t>
+              <a:t>Word Labs  •  wordlabs.app  •  Root: 'friend' = person one likes and trusts</a:t>
             </a:r>
             <a:endParaRPr lang="en-US" sz="800" dirty="0"/>
           </a:p>
@@ -16853,7 +16775,7 @@
                 <a:ea typeface="Calibri" pitchFamily="34" charset="-122"/>
                 <a:cs typeface="Calibri" pitchFamily="34" charset="-120"/>
               </a:rPr>
-              <a:t>Word Labs  •  wordlabs.app  •  Root: 'friend' = person who is liked</a:t>
+              <a:t>Word Labs  •  wordlabs.app  •  Root: 'friend' = person one likes and trusts</a:t>
             </a:r>
             <a:endParaRPr lang="en-US" sz="800" dirty="0"/>
           </a:p>
@@ -16965,7 +16887,7 @@
                 <a:ea typeface="Calibri" pitchFamily="34" charset="-122"/>
                 <a:cs typeface="Calibri" pitchFamily="34" charset="-120"/>
               </a:rPr>
-              <a:t>Being </a:t>
+              <a:t>His </a:t>
             </a:r>
             <a:pPr algn="l" indent="0" marL="0">
               <a:buNone/>
@@ -16982,7 +16904,7 @@
                 <a:ea typeface="Calibri" pitchFamily="34" charset="-122"/>
                 <a:cs typeface="Calibri" pitchFamily="34" charset="-120"/>
               </a:rPr>
-              <a:t>friendly</a:t>
+              <a:t>unfriendly</a:t>
             </a:r>
             <a:pPr algn="l" indent="0" marL="0">
               <a:buNone/>
@@ -16996,7 +16918,7 @@
                 <a:ea typeface="Calibri" pitchFamily="34" charset="-122"/>
                 <a:cs typeface="Calibri" pitchFamily="34" charset="-120"/>
               </a:rPr>
-              <a:t> and kind helped her </a:t>
+              <a:t> attitude surprised us; however, his </a:t>
             </a:r>
             <a:pPr algn="l" indent="0" marL="0">
               <a:buNone/>
@@ -17013,7 +16935,7 @@
                 <a:ea typeface="Calibri" pitchFamily="34" charset="-122"/>
                 <a:cs typeface="Calibri" pitchFamily="34" charset="-120"/>
               </a:rPr>
-              <a:t>befriend</a:t>
+              <a:t>friendliness</a:t>
             </a:r>
             <a:pPr algn="l" indent="0" marL="0">
               <a:buNone/>
@@ -17027,7 +16949,7 @@
                 <a:ea typeface="Calibri" pitchFamily="34" charset="-122"/>
                 <a:cs typeface="Calibri" pitchFamily="34" charset="-120"/>
               </a:rPr>
-              <a:t> many people, and her </a:t>
+              <a:t> returned once he felt comfortable, and we became firm </a:t>
             </a:r>
             <a:pPr algn="l" indent="0" marL="0">
               <a:buNone/>
@@ -17044,7 +16966,7 @@
                 <a:ea typeface="Calibri" pitchFamily="34" charset="-122"/>
                 <a:cs typeface="Calibri" pitchFamily="34" charset="-120"/>
               </a:rPr>
-              <a:t>friendliness</a:t>
+              <a:t>friends</a:t>
             </a:r>
             <a:pPr algn="l" indent="0" marL="0">
               <a:buNone/>
@@ -17058,7 +16980,7 @@
                 <a:ea typeface="Calibri" pitchFamily="34" charset="-122"/>
                 <a:cs typeface="Calibri" pitchFamily="34" charset="-120"/>
               </a:rPr>
-              <a:t> made everyone feel welcome.</a:t>
+              <a:t>.</a:t>
             </a:r>
             <a:endParaRPr lang="en-US" sz="1800" dirty="0"/>
           </a:p>
@@ -17213,7 +17135,7 @@
                 <a:ea typeface="Trebuchet MS" pitchFamily="34" charset="-122"/>
                 <a:cs typeface="Trebuchet MS" pitchFamily="34" charset="-120"/>
               </a:rPr>
-              <a:t>friendly</a:t>
+              <a:t>unfriendly</a:t>
             </a:r>
             <a:endParaRPr lang="en-US" sz="1400" dirty="0"/>
           </a:p>
@@ -17341,7 +17263,7 @@
                 <a:ea typeface="Trebuchet MS" pitchFamily="34" charset="-122"/>
                 <a:cs typeface="Trebuchet MS" pitchFamily="34" charset="-120"/>
               </a:rPr>
-              <a:t>befriend</a:t>
+              <a:t>friendliness</a:t>
             </a:r>
             <a:endParaRPr lang="en-US" sz="1400" dirty="0"/>
           </a:p>
@@ -17469,7 +17391,7 @@
                 <a:ea typeface="Trebuchet MS" pitchFamily="34" charset="-122"/>
                 <a:cs typeface="Trebuchet MS" pitchFamily="34" charset="-120"/>
               </a:rPr>
-              <a:t>friendliness</a:t>
+              <a:t>friends</a:t>
             </a:r>
             <a:endParaRPr lang="en-US" sz="1400" dirty="0"/>
           </a:p>
@@ -17800,7 +17722,7 @@
                 <a:ea typeface="Calibri" pitchFamily="34" charset="-122"/>
                 <a:cs typeface="Calibri" pitchFamily="34" charset="-120"/>
               </a:rPr>
-              <a:t>Word Labs  •  wordlabs.app  •  Root: 'friend' = person who is liked</a:t>
+              <a:t>Word Labs  •  wordlabs.app  •  Root: 'friend' = person one likes and trusts</a:t>
             </a:r>
             <a:endParaRPr lang="en-US" sz="800" dirty="0"/>
           </a:p>
@@ -17939,7 +17861,7 @@
                 <a:ea typeface="Trebuchet MS" pitchFamily="34" charset="-122"/>
                 <a:cs typeface="Trebuchet MS" pitchFamily="34" charset="-120"/>
               </a:rPr>
-              <a:t>friendly</a:t>
+              <a:t>unfriendly</a:t>
             </a:r>
             <a:endParaRPr lang="en-US" sz="2800" dirty="0"/>
           </a:p>
@@ -18627,7 +18549,7 @@
                 <a:ea typeface="Calibri" pitchFamily="34" charset="-122"/>
                 <a:cs typeface="Calibri" pitchFamily="34" charset="-120"/>
               </a:rPr>
-              <a:t>Word Labs  •  wordlabs.app  •  Root: 'friend' = person who is liked</a:t>
+              <a:t>Word Labs  •  wordlabs.app  •  Root: 'friend' = person one likes and trusts</a:t>
             </a:r>
             <a:endParaRPr lang="en-US" sz="800" dirty="0"/>
           </a:p>
@@ -18766,7 +18688,7 @@
                 <a:ea typeface="Trebuchet MS" pitchFamily="34" charset="-122"/>
                 <a:cs typeface="Trebuchet MS" pitchFamily="34" charset="-120"/>
               </a:rPr>
-              <a:t>friendly</a:t>
+              <a:t>unfriendly</a:t>
             </a:r>
             <a:endParaRPr lang="en-US" sz="2800" dirty="0"/>
           </a:p>
@@ -18846,7 +18768,7 @@
         </p:nvSpPr>
         <p:spPr>
           <a:xfrm>
-            <a:off x="2938272" y="2258568"/>
+            <a:off x="2221992" y="2258568"/>
             <a:ext cx="1828800" cy="292608"/>
           </a:xfrm>
           <a:prstGeom prst="rect">
@@ -18855,11 +18777,11 @@
             </a:avLst>
           </a:prstGeom>
           <a:solidFill>
-            <a:srgbClr val="CCFBF1"/>
+            <a:srgbClr val="DDD6FE"/>
           </a:solidFill>
           <a:ln w="19050">
             <a:solidFill>
-              <a:srgbClr val="0D9488"/>
+              <a:srgbClr val="7C3AED"/>
             </a:solidFill>
             <a:prstDash val="solid"/>
           </a:ln>
@@ -18880,7 +18802,7 @@
         </p:nvSpPr>
         <p:spPr>
           <a:xfrm>
-            <a:off x="2938272" y="2258568"/>
+            <a:off x="2221992" y="2258568"/>
             <a:ext cx="1828800" cy="292608"/>
           </a:xfrm>
           <a:prstGeom prst="rect">
@@ -18899,13 +18821,13 @@
             <a:r>
               <a:rPr lang="en-US" sz="1300" b="1" dirty="0">
                 <a:solidFill>
-                  <a:srgbClr val="0F766E"/>
+                  <a:srgbClr val="4C1D95"/>
                 </a:solidFill>
                 <a:latin typeface="Trebuchet MS" pitchFamily="34" charset="0"/>
                 <a:ea typeface="Trebuchet MS" pitchFamily="34" charset="-122"/>
                 <a:cs typeface="Trebuchet MS" pitchFamily="34" charset="-120"/>
               </a:rPr>
-              <a:t>friend</a:t>
+              <a:t>un</a:t>
             </a:r>
             <a:endParaRPr lang="en-US" sz="1300" dirty="0"/>
           </a:p>
@@ -18919,7 +18841,7 @@
         </p:nvSpPr>
         <p:spPr>
           <a:xfrm>
-            <a:off x="2938272" y="2569464"/>
+            <a:off x="2221992" y="2569464"/>
             <a:ext cx="1828800" cy="201168"/>
           </a:xfrm>
           <a:prstGeom prst="rect">
@@ -18944,7 +18866,7 @@
                 <a:ea typeface="Calibri" pitchFamily="34" charset="-122"/>
                 <a:cs typeface="Calibri" pitchFamily="34" charset="-120"/>
               </a:rPr>
-              <a:t>person who is liked</a:t>
+              <a:t>not</a:t>
             </a:r>
             <a:endParaRPr lang="en-US" sz="850" dirty="0"/>
           </a:p>
@@ -18958,7 +18880,7 @@
         </p:nvSpPr>
         <p:spPr>
           <a:xfrm>
-            <a:off x="5803392" y="2258568"/>
+            <a:off x="4370832" y="2258568"/>
             <a:ext cx="1828800" cy="292608"/>
           </a:xfrm>
           <a:prstGeom prst="rect">
@@ -18967,11 +18889,11 @@
             </a:avLst>
           </a:prstGeom>
           <a:solidFill>
-            <a:srgbClr val="FCE7F3"/>
+            <a:srgbClr val="CCFBF1"/>
           </a:solidFill>
           <a:ln w="19050">
             <a:solidFill>
-              <a:srgbClr val="DB2777"/>
+              <a:srgbClr val="0D9488"/>
             </a:solidFill>
             <a:prstDash val="solid"/>
           </a:ln>
@@ -18992,7 +18914,7 @@
         </p:nvSpPr>
         <p:spPr>
           <a:xfrm>
-            <a:off x="5803392" y="2258568"/>
+            <a:off x="4370832" y="2258568"/>
             <a:ext cx="1828800" cy="292608"/>
           </a:xfrm>
           <a:prstGeom prst="rect">
@@ -19011,13 +18933,13 @@
             <a:r>
               <a:rPr lang="en-US" sz="1300" b="1" dirty="0">
                 <a:solidFill>
-                  <a:srgbClr val="9D174D"/>
+                  <a:srgbClr val="0F766E"/>
                 </a:solidFill>
                 <a:latin typeface="Trebuchet MS" pitchFamily="34" charset="0"/>
                 <a:ea typeface="Trebuchet MS" pitchFamily="34" charset="-122"/>
                 <a:cs typeface="Trebuchet MS" pitchFamily="34" charset="-120"/>
               </a:rPr>
-              <a:t>ly</a:t>
+              <a:t>friend</a:t>
             </a:r>
             <a:endParaRPr lang="en-US" sz="1300" dirty="0"/>
           </a:p>
@@ -19031,7 +18953,7 @@
         </p:nvSpPr>
         <p:spPr>
           <a:xfrm>
-            <a:off x="5803392" y="2569464"/>
+            <a:off x="4370832" y="2569464"/>
             <a:ext cx="1828800" cy="201168"/>
           </a:xfrm>
           <a:prstGeom prst="rect">
@@ -19056,7 +18978,7 @@
                 <a:ea typeface="Calibri" pitchFamily="34" charset="-122"/>
                 <a:cs typeface="Calibri" pitchFamily="34" charset="-120"/>
               </a:rPr>
-              <a:t>in a certain way</a:t>
+              <a:t>person one likes and trusts</a:t>
             </a:r>
             <a:endParaRPr lang="en-US" sz="850" dirty="0"/>
           </a:p>
@@ -19065,6 +18987,118 @@
       <p:sp>
         <p:nvSpPr>
           <p:cNvPr id="22" name="Shape 20"/>
+          <p:cNvSpPr/>
+          <p:nvPr/>
+        </p:nvSpPr>
+        <p:spPr>
+          <a:xfrm>
+            <a:off x="6519672" y="2258568"/>
+            <a:ext cx="1828800" cy="292608"/>
+          </a:xfrm>
+          <a:prstGeom prst="rect">
+            <a:avLst>
+              <a:gd name="adj" fmla="val 25000"/>
+            </a:avLst>
+          </a:prstGeom>
+          <a:solidFill>
+            <a:srgbClr val="FCE7F3"/>
+          </a:solidFill>
+          <a:ln w="19050">
+            <a:solidFill>
+              <a:srgbClr val="DB2777"/>
+            </a:solidFill>
+            <a:prstDash val="solid"/>
+          </a:ln>
+          <a:effectLst>
+            <a:outerShdw sx="100000" sy="100000" kx="0" ky="0" algn="bl" rotWithShape="0" blurRad="101600" dist="38100" dir="8100000">
+              <a:srgbClr val="000000">
+                <a:alpha val="12000"/>
+              </a:srgbClr>
+            </a:outerShdw>
+          </a:effectLst>
+        </p:spPr>
+      </p:sp>
+      <p:sp>
+        <p:nvSpPr>
+          <p:cNvPr id="23" name="Text 21"/>
+          <p:cNvSpPr/>
+          <p:nvPr/>
+        </p:nvSpPr>
+        <p:spPr>
+          <a:xfrm>
+            <a:off x="6519672" y="2258568"/>
+            <a:ext cx="1828800" cy="292608"/>
+          </a:xfrm>
+          <a:prstGeom prst="rect">
+            <a:avLst/>
+          </a:prstGeom>
+          <a:noFill/>
+          <a:ln/>
+        </p:spPr>
+        <p:txBody>
+          <a:bodyPr wrap="square" lIns="0" tIns="0" rIns="0" bIns="0" rtlCol="0" anchor="ctr"/>
+          <a:lstStyle/>
+          <a:p>
+            <a:pPr algn="ctr" indent="0" marL="0">
+              <a:buNone/>
+            </a:pPr>
+            <a:r>
+              <a:rPr lang="en-US" sz="1300" b="1" dirty="0">
+                <a:solidFill>
+                  <a:srgbClr val="9D174D"/>
+                </a:solidFill>
+                <a:latin typeface="Trebuchet MS" pitchFamily="34" charset="0"/>
+                <a:ea typeface="Trebuchet MS" pitchFamily="34" charset="-122"/>
+                <a:cs typeface="Trebuchet MS" pitchFamily="34" charset="-120"/>
+              </a:rPr>
+              <a:t>ly</a:t>
+            </a:r>
+            <a:endParaRPr lang="en-US" sz="1300" dirty="0"/>
+          </a:p>
+        </p:txBody>
+      </p:sp>
+      <p:sp>
+        <p:nvSpPr>
+          <p:cNvPr id="24" name="Text 22"/>
+          <p:cNvSpPr/>
+          <p:nvPr/>
+        </p:nvSpPr>
+        <p:spPr>
+          <a:xfrm>
+            <a:off x="6519672" y="2569464"/>
+            <a:ext cx="1828800" cy="201168"/>
+          </a:xfrm>
+          <a:prstGeom prst="rect">
+            <a:avLst/>
+          </a:prstGeom>
+          <a:noFill/>
+          <a:ln/>
+        </p:spPr>
+        <p:txBody>
+          <a:bodyPr wrap="square" lIns="0" tIns="0" rIns="0" bIns="0" rtlCol="0" anchor="t"/>
+          <a:lstStyle/>
+          <a:p>
+            <a:pPr algn="ctr" indent="0" marL="0">
+              <a:buNone/>
+            </a:pPr>
+            <a:r>
+              <a:rPr lang="en-US" sz="850" dirty="0">
+                <a:solidFill>
+                  <a:srgbClr val="475569"/>
+                </a:solidFill>
+                <a:latin typeface="Calibri" pitchFamily="34" charset="0"/>
+                <a:ea typeface="Calibri" pitchFamily="34" charset="-122"/>
+                <a:cs typeface="Calibri" pitchFamily="34" charset="-120"/>
+              </a:rPr>
+              <a:t>in a certain way; having a quality</a:t>
+            </a:r>
+            <a:endParaRPr lang="en-US" sz="850" dirty="0"/>
+          </a:p>
+        </p:txBody>
+      </p:sp>
+      <p:sp>
+        <p:nvSpPr>
+          <p:cNvPr id="25" name="Shape 23"/>
           <p:cNvSpPr/>
           <p:nvPr/>
         </p:nvSpPr>
@@ -19091,7 +19125,7 @@
       </p:sp>
       <p:sp>
         <p:nvSpPr>
-          <p:cNvPr id="23" name="Text 21"/>
+          <p:cNvPr id="26" name="Text 24"/>
           <p:cNvSpPr/>
           <p:nvPr/>
         </p:nvSpPr>
@@ -19130,7 +19164,7 @@
       </p:sp>
       <p:sp>
         <p:nvSpPr>
-          <p:cNvPr id="24" name="Shape 22"/>
+          <p:cNvPr id="27" name="Shape 25"/>
           <p:cNvSpPr/>
           <p:nvPr/>
         </p:nvSpPr>
@@ -19157,7 +19191,7 @@
       </p:sp>
       <p:sp>
         <p:nvSpPr>
-          <p:cNvPr id="25" name="Text 23"/>
+          <p:cNvPr id="28" name="Text 26"/>
           <p:cNvSpPr/>
           <p:nvPr/>
         </p:nvSpPr>
@@ -19196,7 +19230,7 @@
       </p:sp>
       <p:sp>
         <p:nvSpPr>
-          <p:cNvPr id="26" name="Shape 24"/>
+          <p:cNvPr id="29" name="Shape 27"/>
           <p:cNvSpPr/>
           <p:nvPr/>
         </p:nvSpPr>
@@ -19223,7 +19257,7 @@
       </p:sp>
       <p:sp>
         <p:nvSpPr>
-          <p:cNvPr id="27" name="Text 25"/>
+          <p:cNvPr id="30" name="Text 28"/>
           <p:cNvSpPr/>
           <p:nvPr/>
         </p:nvSpPr>
@@ -19262,7 +19296,7 @@
       </p:sp>
       <p:sp>
         <p:nvSpPr>
-          <p:cNvPr id="28" name="Shape 26"/>
+          <p:cNvPr id="31" name="Shape 29"/>
           <p:cNvSpPr/>
           <p:nvPr/>
         </p:nvSpPr>
@@ -19289,7 +19323,7 @@
       </p:sp>
       <p:sp>
         <p:nvSpPr>
-          <p:cNvPr id="29" name="Text 27"/>
+          <p:cNvPr id="32" name="Text 30"/>
           <p:cNvSpPr/>
           <p:nvPr/>
         </p:nvSpPr>
@@ -19612,7 +19646,7 @@
                 <a:ea typeface="Calibri" pitchFamily="34" charset="-122"/>
                 <a:cs typeface="Calibri" pitchFamily="34" charset="-120"/>
               </a:rPr>
-              <a:t>Word Labs  •  wordlabs.app  •  Root: 'friend' = person who is liked</a:t>
+              <a:t>Word Labs  •  wordlabs.app  •  Root: 'friend' = person one likes and trusts</a:t>
             </a:r>
             <a:endParaRPr lang="en-US" sz="800" dirty="0"/>
           </a:p>
@@ -19751,7 +19785,7 @@
                 <a:ea typeface="Trebuchet MS" pitchFamily="34" charset="-122"/>
                 <a:cs typeface="Trebuchet MS" pitchFamily="34" charset="-120"/>
               </a:rPr>
-              <a:t>friendly</a:t>
+              <a:t>unfriendly</a:t>
             </a:r>
             <a:endParaRPr lang="en-US" sz="2800" dirty="0"/>
           </a:p>
@@ -19831,7 +19865,7 @@
         </p:nvSpPr>
         <p:spPr>
           <a:xfrm>
-            <a:off x="2938272" y="2258568"/>
+            <a:off x="2221992" y="2258568"/>
             <a:ext cx="1828800" cy="292608"/>
           </a:xfrm>
           <a:prstGeom prst="rect">
@@ -19840,11 +19874,11 @@
             </a:avLst>
           </a:prstGeom>
           <a:solidFill>
-            <a:srgbClr val="CCFBF1"/>
+            <a:srgbClr val="DDD6FE"/>
           </a:solidFill>
           <a:ln w="19050">
             <a:solidFill>
-              <a:srgbClr val="0D9488"/>
+              <a:srgbClr val="7C3AED"/>
             </a:solidFill>
             <a:prstDash val="solid"/>
           </a:ln>
@@ -19865,7 +19899,7 @@
         </p:nvSpPr>
         <p:spPr>
           <a:xfrm>
-            <a:off x="2938272" y="2258568"/>
+            <a:off x="2221992" y="2258568"/>
             <a:ext cx="1828800" cy="292608"/>
           </a:xfrm>
           <a:prstGeom prst="rect">
@@ -19884,13 +19918,13 @@
             <a:r>
               <a:rPr lang="en-US" sz="1300" b="1" dirty="0">
                 <a:solidFill>
-                  <a:srgbClr val="0F766E"/>
+                  <a:srgbClr val="4C1D95"/>
                 </a:solidFill>
                 <a:latin typeface="Trebuchet MS" pitchFamily="34" charset="0"/>
                 <a:ea typeface="Trebuchet MS" pitchFamily="34" charset="-122"/>
                 <a:cs typeface="Trebuchet MS" pitchFamily="34" charset="-120"/>
               </a:rPr>
-              <a:t>friend</a:t>
+              <a:t>un</a:t>
             </a:r>
             <a:endParaRPr lang="en-US" sz="1300" dirty="0"/>
           </a:p>
@@ -19904,7 +19938,7 @@
         </p:nvSpPr>
         <p:spPr>
           <a:xfrm>
-            <a:off x="2938272" y="2569464"/>
+            <a:off x="2221992" y="2569464"/>
             <a:ext cx="1828800" cy="201168"/>
           </a:xfrm>
           <a:prstGeom prst="rect">
@@ -19929,7 +19963,7 @@
                 <a:ea typeface="Calibri" pitchFamily="34" charset="-122"/>
                 <a:cs typeface="Calibri" pitchFamily="34" charset="-120"/>
               </a:rPr>
-              <a:t>person who is liked</a:t>
+              <a:t>not</a:t>
             </a:r>
             <a:endParaRPr lang="en-US" sz="850" dirty="0"/>
           </a:p>
@@ -19943,7 +19977,7 @@
         </p:nvSpPr>
         <p:spPr>
           <a:xfrm>
-            <a:off x="5803392" y="2258568"/>
+            <a:off x="4370832" y="2258568"/>
             <a:ext cx="1828800" cy="292608"/>
           </a:xfrm>
           <a:prstGeom prst="rect">
@@ -19952,11 +19986,11 @@
             </a:avLst>
           </a:prstGeom>
           <a:solidFill>
-            <a:srgbClr val="FCE7F3"/>
+            <a:srgbClr val="CCFBF1"/>
           </a:solidFill>
           <a:ln w="19050">
             <a:solidFill>
-              <a:srgbClr val="DB2777"/>
+              <a:srgbClr val="0D9488"/>
             </a:solidFill>
             <a:prstDash val="solid"/>
           </a:ln>
@@ -19977,7 +20011,7 @@
         </p:nvSpPr>
         <p:spPr>
           <a:xfrm>
-            <a:off x="5803392" y="2258568"/>
+            <a:off x="4370832" y="2258568"/>
             <a:ext cx="1828800" cy="292608"/>
           </a:xfrm>
           <a:prstGeom prst="rect">
@@ -19996,13 +20030,13 @@
             <a:r>
               <a:rPr lang="en-US" sz="1300" b="1" dirty="0">
                 <a:solidFill>
-                  <a:srgbClr val="9D174D"/>
+                  <a:srgbClr val="0F766E"/>
                 </a:solidFill>
                 <a:latin typeface="Trebuchet MS" pitchFamily="34" charset="0"/>
                 <a:ea typeface="Trebuchet MS" pitchFamily="34" charset="-122"/>
                 <a:cs typeface="Trebuchet MS" pitchFamily="34" charset="-120"/>
               </a:rPr>
-              <a:t>ly</a:t>
+              <a:t>friend</a:t>
             </a:r>
             <a:endParaRPr lang="en-US" sz="1300" dirty="0"/>
           </a:p>
@@ -20016,7 +20050,7 @@
         </p:nvSpPr>
         <p:spPr>
           <a:xfrm>
-            <a:off x="5803392" y="2569464"/>
+            <a:off x="4370832" y="2569464"/>
             <a:ext cx="1828800" cy="201168"/>
           </a:xfrm>
           <a:prstGeom prst="rect">
@@ -20041,7 +20075,7 @@
                 <a:ea typeface="Calibri" pitchFamily="34" charset="-122"/>
                 <a:cs typeface="Calibri" pitchFamily="34" charset="-120"/>
               </a:rPr>
-              <a:t>in a certain way</a:t>
+              <a:t>person one likes and trusts</a:t>
             </a:r>
             <a:endParaRPr lang="en-US" sz="850" dirty="0"/>
           </a:p>
@@ -20050,6 +20084,118 @@
       <p:sp>
         <p:nvSpPr>
           <p:cNvPr id="22" name="Shape 20"/>
+          <p:cNvSpPr/>
+          <p:nvPr/>
+        </p:nvSpPr>
+        <p:spPr>
+          <a:xfrm>
+            <a:off x="6519672" y="2258568"/>
+            <a:ext cx="1828800" cy="292608"/>
+          </a:xfrm>
+          <a:prstGeom prst="rect">
+            <a:avLst>
+              <a:gd name="adj" fmla="val 25000"/>
+            </a:avLst>
+          </a:prstGeom>
+          <a:solidFill>
+            <a:srgbClr val="FCE7F3"/>
+          </a:solidFill>
+          <a:ln w="19050">
+            <a:solidFill>
+              <a:srgbClr val="DB2777"/>
+            </a:solidFill>
+            <a:prstDash val="solid"/>
+          </a:ln>
+          <a:effectLst>
+            <a:outerShdw sx="100000" sy="100000" kx="0" ky="0" algn="bl" rotWithShape="0" blurRad="101600" dist="38100" dir="8100000">
+              <a:srgbClr val="000000">
+                <a:alpha val="12000"/>
+              </a:srgbClr>
+            </a:outerShdw>
+          </a:effectLst>
+        </p:spPr>
+      </p:sp>
+      <p:sp>
+        <p:nvSpPr>
+          <p:cNvPr id="23" name="Text 21"/>
+          <p:cNvSpPr/>
+          <p:nvPr/>
+        </p:nvSpPr>
+        <p:spPr>
+          <a:xfrm>
+            <a:off x="6519672" y="2258568"/>
+            <a:ext cx="1828800" cy="292608"/>
+          </a:xfrm>
+          <a:prstGeom prst="rect">
+            <a:avLst/>
+          </a:prstGeom>
+          <a:noFill/>
+          <a:ln/>
+        </p:spPr>
+        <p:txBody>
+          <a:bodyPr wrap="square" lIns="0" tIns="0" rIns="0" bIns="0" rtlCol="0" anchor="ctr"/>
+          <a:lstStyle/>
+          <a:p>
+            <a:pPr algn="ctr" indent="0" marL="0">
+              <a:buNone/>
+            </a:pPr>
+            <a:r>
+              <a:rPr lang="en-US" sz="1300" b="1" dirty="0">
+                <a:solidFill>
+                  <a:srgbClr val="9D174D"/>
+                </a:solidFill>
+                <a:latin typeface="Trebuchet MS" pitchFamily="34" charset="0"/>
+                <a:ea typeface="Trebuchet MS" pitchFamily="34" charset="-122"/>
+                <a:cs typeface="Trebuchet MS" pitchFamily="34" charset="-120"/>
+              </a:rPr>
+              <a:t>ly</a:t>
+            </a:r>
+            <a:endParaRPr lang="en-US" sz="1300" dirty="0"/>
+          </a:p>
+        </p:txBody>
+      </p:sp>
+      <p:sp>
+        <p:nvSpPr>
+          <p:cNvPr id="24" name="Text 22"/>
+          <p:cNvSpPr/>
+          <p:nvPr/>
+        </p:nvSpPr>
+        <p:spPr>
+          <a:xfrm>
+            <a:off x="6519672" y="2569464"/>
+            <a:ext cx="1828800" cy="201168"/>
+          </a:xfrm>
+          <a:prstGeom prst="rect">
+            <a:avLst/>
+          </a:prstGeom>
+          <a:noFill/>
+          <a:ln/>
+        </p:spPr>
+        <p:txBody>
+          <a:bodyPr wrap="square" lIns="0" tIns="0" rIns="0" bIns="0" rtlCol="0" anchor="t"/>
+          <a:lstStyle/>
+          <a:p>
+            <a:pPr algn="ctr" indent="0" marL="0">
+              <a:buNone/>
+            </a:pPr>
+            <a:r>
+              <a:rPr lang="en-US" sz="850" dirty="0">
+                <a:solidFill>
+                  <a:srgbClr val="475569"/>
+                </a:solidFill>
+                <a:latin typeface="Calibri" pitchFamily="34" charset="0"/>
+                <a:ea typeface="Calibri" pitchFamily="34" charset="-122"/>
+                <a:cs typeface="Calibri" pitchFamily="34" charset="-120"/>
+              </a:rPr>
+              <a:t>in a certain way; having a quality</a:t>
+            </a:r>
+            <a:endParaRPr lang="en-US" sz="850" dirty="0"/>
+          </a:p>
+        </p:txBody>
+      </p:sp>
+      <p:sp>
+        <p:nvSpPr>
+          <p:cNvPr id="25" name="Shape 23"/>
           <p:cNvSpPr/>
           <p:nvPr/>
         </p:nvSpPr>
@@ -20076,7 +20222,7 @@
       </p:sp>
       <p:sp>
         <p:nvSpPr>
-          <p:cNvPr id="23" name="Text 21"/>
+          <p:cNvPr id="26" name="Text 24"/>
           <p:cNvSpPr/>
           <p:nvPr/>
         </p:nvSpPr>
@@ -20115,7 +20261,7 @@
       </p:sp>
       <p:sp>
         <p:nvSpPr>
-          <p:cNvPr id="24" name="Shape 22"/>
+          <p:cNvPr id="27" name="Shape 25"/>
           <p:cNvSpPr/>
           <p:nvPr/>
         </p:nvSpPr>
@@ -20142,13 +20288,13 @@
       </p:sp>
       <p:sp>
         <p:nvSpPr>
-          <p:cNvPr id="25" name="Shape 23"/>
-          <p:cNvSpPr/>
-          <p:nvPr/>
-        </p:nvSpPr>
-        <p:spPr>
-          <a:xfrm>
-            <a:off x="2999232" y="3364992"/>
+          <p:cNvPr id="28" name="Shape 26"/>
+          <p:cNvSpPr/>
+          <p:nvPr/>
+        </p:nvSpPr>
+        <p:spPr>
+          <a:xfrm>
+            <a:off x="2313432" y="3364992"/>
             <a:ext cx="1645920" cy="475488"/>
           </a:xfrm>
           <a:prstGeom prst="rect">
@@ -20169,13 +20315,13 @@
       </p:sp>
       <p:sp>
         <p:nvSpPr>
-          <p:cNvPr id="26" name="Text 24"/>
-          <p:cNvSpPr/>
-          <p:nvPr/>
-        </p:nvSpPr>
-        <p:spPr>
-          <a:xfrm>
-            <a:off x="2999232" y="3364992"/>
+          <p:cNvPr id="29" name="Text 27"/>
+          <p:cNvSpPr/>
+          <p:nvPr/>
+        </p:nvSpPr>
+        <p:spPr>
+          <a:xfrm>
+            <a:off x="2313432" y="3364992"/>
             <a:ext cx="1645920" cy="475488"/>
           </a:xfrm>
           <a:prstGeom prst="rect">
@@ -20200,7 +20346,7 @@
                 <a:ea typeface="Trebuchet MS" pitchFamily="34" charset="-122"/>
                 <a:cs typeface="Trebuchet MS" pitchFamily="34" charset="-120"/>
               </a:rPr>
-              <a:t>friend</a:t>
+              <a:t>un</a:t>
             </a:r>
             <a:endParaRPr lang="en-US" sz="1400" dirty="0"/>
           </a:p>
@@ -20208,14 +20354,14 @@
       </p:sp>
       <p:sp>
         <p:nvSpPr>
-          <p:cNvPr id="27" name="Text 25"/>
-          <p:cNvSpPr/>
-          <p:nvPr/>
-        </p:nvSpPr>
-        <p:spPr>
-          <a:xfrm>
-            <a:off x="4645152" y="3364992"/>
-            <a:ext cx="1097280" cy="475488"/>
+          <p:cNvPr id="30" name="Text 28"/>
+          <p:cNvSpPr/>
+          <p:nvPr/>
+        </p:nvSpPr>
+        <p:spPr>
+          <a:xfrm>
+            <a:off x="3959352" y="3364992"/>
+            <a:ext cx="411480" cy="475488"/>
           </a:xfrm>
           <a:prstGeom prst="rect">
             <a:avLst/>
@@ -20247,13 +20393,13 @@
       </p:sp>
       <p:sp>
         <p:nvSpPr>
-          <p:cNvPr id="28" name="Shape 26"/>
-          <p:cNvSpPr/>
-          <p:nvPr/>
-        </p:nvSpPr>
-        <p:spPr>
-          <a:xfrm>
-            <a:off x="5742432" y="3364992"/>
+          <p:cNvPr id="31" name="Shape 29"/>
+          <p:cNvSpPr/>
+          <p:nvPr/>
+        </p:nvSpPr>
+        <p:spPr>
+          <a:xfrm>
+            <a:off x="4370832" y="3364992"/>
             <a:ext cx="1645920" cy="475488"/>
           </a:xfrm>
           <a:prstGeom prst="rect">
@@ -20274,13 +20420,13 @@
       </p:sp>
       <p:sp>
         <p:nvSpPr>
-          <p:cNvPr id="29" name="Text 27"/>
-          <p:cNvSpPr/>
-          <p:nvPr/>
-        </p:nvSpPr>
-        <p:spPr>
-          <a:xfrm>
-            <a:off x="5742432" y="3364992"/>
+          <p:cNvPr id="32" name="Text 30"/>
+          <p:cNvSpPr/>
+          <p:nvPr/>
+        </p:nvSpPr>
+        <p:spPr>
+          <a:xfrm>
+            <a:off x="4370832" y="3364992"/>
             <a:ext cx="1645920" cy="475488"/>
           </a:xfrm>
           <a:prstGeom prst="rect">
@@ -20305,6 +20451,111 @@
                 <a:ea typeface="Trebuchet MS" pitchFamily="34" charset="-122"/>
                 <a:cs typeface="Trebuchet MS" pitchFamily="34" charset="-120"/>
               </a:rPr>
+              <a:t>friend</a:t>
+            </a:r>
+            <a:endParaRPr lang="en-US" sz="1400" dirty="0"/>
+          </a:p>
+        </p:txBody>
+      </p:sp>
+      <p:sp>
+        <p:nvSpPr>
+          <p:cNvPr id="33" name="Text 31"/>
+          <p:cNvSpPr/>
+          <p:nvPr/>
+        </p:nvSpPr>
+        <p:spPr>
+          <a:xfrm>
+            <a:off x="6016752" y="3364992"/>
+            <a:ext cx="411480" cy="475488"/>
+          </a:xfrm>
+          <a:prstGeom prst="rect">
+            <a:avLst/>
+          </a:prstGeom>
+          <a:noFill/>
+          <a:ln/>
+        </p:spPr>
+        <p:txBody>
+          <a:bodyPr wrap="square" lIns="0" tIns="0" rIns="0" bIns="0" rtlCol="0" anchor="ctr"/>
+          <a:lstStyle/>
+          <a:p>
+            <a:pPr algn="ctr" indent="0" marL="0">
+              <a:buNone/>
+            </a:pPr>
+            <a:r>
+              <a:rPr lang="en-US" sz="1600" b="1" dirty="0">
+                <a:solidFill>
+                  <a:srgbClr val="0D9488"/>
+                </a:solidFill>
+                <a:latin typeface="Trebuchet MS" pitchFamily="34" charset="0"/>
+                <a:ea typeface="Trebuchet MS" pitchFamily="34" charset="-122"/>
+                <a:cs typeface="Trebuchet MS" pitchFamily="34" charset="-120"/>
+              </a:rPr>
+              <a:t>·</a:t>
+            </a:r>
+            <a:endParaRPr lang="en-US" sz="1600" dirty="0"/>
+          </a:p>
+        </p:txBody>
+      </p:sp>
+      <p:sp>
+        <p:nvSpPr>
+          <p:cNvPr id="34" name="Shape 32"/>
+          <p:cNvSpPr/>
+          <p:nvPr/>
+        </p:nvSpPr>
+        <p:spPr>
+          <a:xfrm>
+            <a:off x="6428232" y="3364992"/>
+            <a:ext cx="1645920" cy="475488"/>
+          </a:xfrm>
+          <a:prstGeom prst="rect">
+            <a:avLst>
+              <a:gd name="adj" fmla="val 9615"/>
+            </a:avLst>
+          </a:prstGeom>
+          <a:solidFill>
+            <a:srgbClr val="FFFFFF"/>
+          </a:solidFill>
+          <a:ln w="12700">
+            <a:solidFill>
+              <a:srgbClr val="0D9488"/>
+            </a:solidFill>
+            <a:prstDash val="solid"/>
+          </a:ln>
+        </p:spPr>
+      </p:sp>
+      <p:sp>
+        <p:nvSpPr>
+          <p:cNvPr id="35" name="Text 33"/>
+          <p:cNvSpPr/>
+          <p:nvPr/>
+        </p:nvSpPr>
+        <p:spPr>
+          <a:xfrm>
+            <a:off x="6428232" y="3364992"/>
+            <a:ext cx="1645920" cy="475488"/>
+          </a:xfrm>
+          <a:prstGeom prst="rect">
+            <a:avLst/>
+          </a:prstGeom>
+          <a:noFill/>
+          <a:ln/>
+        </p:spPr>
+        <p:txBody>
+          <a:bodyPr wrap="square" lIns="0" tIns="0" rIns="0" bIns="0" rtlCol="0" anchor="ctr"/>
+          <a:lstStyle/>
+          <a:p>
+            <a:pPr algn="ctr" indent="0" marL="0">
+              <a:buNone/>
+            </a:pPr>
+            <a:r>
+              <a:rPr lang="en-US" sz="1400" b="1" dirty="0">
+                <a:solidFill>
+                  <a:srgbClr val="0D9488"/>
+                </a:solidFill>
+                <a:latin typeface="Trebuchet MS" pitchFamily="34" charset="0"/>
+                <a:ea typeface="Trebuchet MS" pitchFamily="34" charset="-122"/>
+                <a:cs typeface="Trebuchet MS" pitchFamily="34" charset="-120"/>
+              </a:rPr>
               <a:t>ly</a:t>
             </a:r>
             <a:endParaRPr lang="en-US" sz="1400" dirty="0"/>
@@ -20313,7 +20564,7 @@
       </p:sp>
       <p:sp>
         <p:nvSpPr>
-          <p:cNvPr id="30" name="Shape 28"/>
+          <p:cNvPr id="36" name="Shape 34"/>
           <p:cNvSpPr/>
           <p:nvPr/>
         </p:nvSpPr>
@@ -20340,7 +20591,7 @@
       </p:sp>
       <p:sp>
         <p:nvSpPr>
-          <p:cNvPr id="31" name="Text 29"/>
+          <p:cNvPr id="37" name="Text 35"/>
           <p:cNvSpPr/>
           <p:nvPr/>
         </p:nvSpPr>
@@ -20379,7 +20630,7 @@
       </p:sp>
       <p:sp>
         <p:nvSpPr>
-          <p:cNvPr id="32" name="Shape 30"/>
+          <p:cNvPr id="38" name="Shape 36"/>
           <p:cNvSpPr/>
           <p:nvPr/>
         </p:nvSpPr>
@@ -20406,7 +20657,7 @@
       </p:sp>
       <p:sp>
         <p:nvSpPr>
-          <p:cNvPr id="33" name="Text 31"/>
+          <p:cNvPr id="39" name="Text 37"/>
           <p:cNvSpPr/>
           <p:nvPr/>
         </p:nvSpPr>
@@ -20729,7 +20980,7 @@
                 <a:ea typeface="Calibri" pitchFamily="34" charset="-122"/>
                 <a:cs typeface="Calibri" pitchFamily="34" charset="-120"/>
               </a:rPr>
-              <a:t>Word Labs  •  wordlabs.app  •  Root: 'friend' = person who is liked</a:t>
+              <a:t>Word Labs  •  wordlabs.app  •  Root: 'friend' = person one likes and trusts</a:t>
             </a:r>
             <a:endParaRPr lang="en-US" sz="800" dirty="0"/>
           </a:p>
@@ -20868,7 +21119,7 @@
                 <a:ea typeface="Trebuchet MS" pitchFamily="34" charset="-122"/>
                 <a:cs typeface="Trebuchet MS" pitchFamily="34" charset="-120"/>
               </a:rPr>
-              <a:t>friendly</a:t>
+              <a:t>unfriendly</a:t>
             </a:r>
             <a:endParaRPr lang="en-US" sz="2800" dirty="0"/>
           </a:p>
@@ -20948,7 +21199,7 @@
         </p:nvSpPr>
         <p:spPr>
           <a:xfrm>
-            <a:off x="2938272" y="2258568"/>
+            <a:off x="2221992" y="2258568"/>
             <a:ext cx="1828800" cy="292608"/>
           </a:xfrm>
           <a:prstGeom prst="rect">
@@ -20957,11 +21208,11 @@
             </a:avLst>
           </a:prstGeom>
           <a:solidFill>
-            <a:srgbClr val="CCFBF1"/>
+            <a:srgbClr val="DDD6FE"/>
           </a:solidFill>
           <a:ln w="19050">
             <a:solidFill>
-              <a:srgbClr val="0D9488"/>
+              <a:srgbClr val="7C3AED"/>
             </a:solidFill>
             <a:prstDash val="solid"/>
           </a:ln>
@@ -20982,7 +21233,7 @@
         </p:nvSpPr>
         <p:spPr>
           <a:xfrm>
-            <a:off x="2938272" y="2258568"/>
+            <a:off x="2221992" y="2258568"/>
             <a:ext cx="1828800" cy="292608"/>
           </a:xfrm>
           <a:prstGeom prst="rect">
@@ -21001,13 +21252,13 @@
             <a:r>
               <a:rPr lang="en-US" sz="1300" b="1" dirty="0">
                 <a:solidFill>
-                  <a:srgbClr val="0F766E"/>
+                  <a:srgbClr val="4C1D95"/>
                 </a:solidFill>
                 <a:latin typeface="Trebuchet MS" pitchFamily="34" charset="0"/>
                 <a:ea typeface="Trebuchet MS" pitchFamily="34" charset="-122"/>
                 <a:cs typeface="Trebuchet MS" pitchFamily="34" charset="-120"/>
               </a:rPr>
-              <a:t>friend</a:t>
+              <a:t>un</a:t>
             </a:r>
             <a:endParaRPr lang="en-US" sz="1300" dirty="0"/>
           </a:p>
@@ -21021,7 +21272,7 @@
         </p:nvSpPr>
         <p:spPr>
           <a:xfrm>
-            <a:off x="2938272" y="2569464"/>
+            <a:off x="2221992" y="2569464"/>
             <a:ext cx="1828800" cy="201168"/>
           </a:xfrm>
           <a:prstGeom prst="rect">
@@ -21046,7 +21297,7 @@
                 <a:ea typeface="Calibri" pitchFamily="34" charset="-122"/>
                 <a:cs typeface="Calibri" pitchFamily="34" charset="-120"/>
               </a:rPr>
-              <a:t>person who is liked</a:t>
+              <a:t>not</a:t>
             </a:r>
             <a:endParaRPr lang="en-US" sz="850" dirty="0"/>
           </a:p>
@@ -21060,7 +21311,7 @@
         </p:nvSpPr>
         <p:spPr>
           <a:xfrm>
-            <a:off x="5803392" y="2258568"/>
+            <a:off x="4370832" y="2258568"/>
             <a:ext cx="1828800" cy="292608"/>
           </a:xfrm>
           <a:prstGeom prst="rect">
@@ -21069,11 +21320,11 @@
             </a:avLst>
           </a:prstGeom>
           <a:solidFill>
-            <a:srgbClr val="FCE7F3"/>
+            <a:srgbClr val="CCFBF1"/>
           </a:solidFill>
           <a:ln w="19050">
             <a:solidFill>
-              <a:srgbClr val="DB2777"/>
+              <a:srgbClr val="0D9488"/>
             </a:solidFill>
             <a:prstDash val="solid"/>
           </a:ln>
@@ -21094,7 +21345,7 @@
         </p:nvSpPr>
         <p:spPr>
           <a:xfrm>
-            <a:off x="5803392" y="2258568"/>
+            <a:off x="4370832" y="2258568"/>
             <a:ext cx="1828800" cy="292608"/>
           </a:xfrm>
           <a:prstGeom prst="rect">
@@ -21113,13 +21364,13 @@
             <a:r>
               <a:rPr lang="en-US" sz="1300" b="1" dirty="0">
                 <a:solidFill>
-                  <a:srgbClr val="9D174D"/>
+                  <a:srgbClr val="0F766E"/>
                 </a:solidFill>
                 <a:latin typeface="Trebuchet MS" pitchFamily="34" charset="0"/>
                 <a:ea typeface="Trebuchet MS" pitchFamily="34" charset="-122"/>
                 <a:cs typeface="Trebuchet MS" pitchFamily="34" charset="-120"/>
               </a:rPr>
-              <a:t>ly</a:t>
+              <a:t>friend</a:t>
             </a:r>
             <a:endParaRPr lang="en-US" sz="1300" dirty="0"/>
           </a:p>
@@ -21133,7 +21384,7 @@
         </p:nvSpPr>
         <p:spPr>
           <a:xfrm>
-            <a:off x="5803392" y="2569464"/>
+            <a:off x="4370832" y="2569464"/>
             <a:ext cx="1828800" cy="201168"/>
           </a:xfrm>
           <a:prstGeom prst="rect">
@@ -21158,7 +21409,7 @@
                 <a:ea typeface="Calibri" pitchFamily="34" charset="-122"/>
                 <a:cs typeface="Calibri" pitchFamily="34" charset="-120"/>
               </a:rPr>
-              <a:t>in a certain way</a:t>
+              <a:t>person one likes and trusts</a:t>
             </a:r>
             <a:endParaRPr lang="en-US" sz="850" dirty="0"/>
           </a:p>
@@ -21167,6 +21418,118 @@
       <p:sp>
         <p:nvSpPr>
           <p:cNvPr id="22" name="Shape 20"/>
+          <p:cNvSpPr/>
+          <p:nvPr/>
+        </p:nvSpPr>
+        <p:spPr>
+          <a:xfrm>
+            <a:off x="6519672" y="2258568"/>
+            <a:ext cx="1828800" cy="292608"/>
+          </a:xfrm>
+          <a:prstGeom prst="rect">
+            <a:avLst>
+              <a:gd name="adj" fmla="val 25000"/>
+            </a:avLst>
+          </a:prstGeom>
+          <a:solidFill>
+            <a:srgbClr val="FCE7F3"/>
+          </a:solidFill>
+          <a:ln w="19050">
+            <a:solidFill>
+              <a:srgbClr val="DB2777"/>
+            </a:solidFill>
+            <a:prstDash val="solid"/>
+          </a:ln>
+          <a:effectLst>
+            <a:outerShdw sx="100000" sy="100000" kx="0" ky="0" algn="bl" rotWithShape="0" blurRad="101600" dist="38100" dir="8100000">
+              <a:srgbClr val="000000">
+                <a:alpha val="12000"/>
+              </a:srgbClr>
+            </a:outerShdw>
+          </a:effectLst>
+        </p:spPr>
+      </p:sp>
+      <p:sp>
+        <p:nvSpPr>
+          <p:cNvPr id="23" name="Text 21"/>
+          <p:cNvSpPr/>
+          <p:nvPr/>
+        </p:nvSpPr>
+        <p:spPr>
+          <a:xfrm>
+            <a:off x="6519672" y="2258568"/>
+            <a:ext cx="1828800" cy="292608"/>
+          </a:xfrm>
+          <a:prstGeom prst="rect">
+            <a:avLst/>
+          </a:prstGeom>
+          <a:noFill/>
+          <a:ln/>
+        </p:spPr>
+        <p:txBody>
+          <a:bodyPr wrap="square" lIns="0" tIns="0" rIns="0" bIns="0" rtlCol="0" anchor="ctr"/>
+          <a:lstStyle/>
+          <a:p>
+            <a:pPr algn="ctr" indent="0" marL="0">
+              <a:buNone/>
+            </a:pPr>
+            <a:r>
+              <a:rPr lang="en-US" sz="1300" b="1" dirty="0">
+                <a:solidFill>
+                  <a:srgbClr val="9D174D"/>
+                </a:solidFill>
+                <a:latin typeface="Trebuchet MS" pitchFamily="34" charset="0"/>
+                <a:ea typeface="Trebuchet MS" pitchFamily="34" charset="-122"/>
+                <a:cs typeface="Trebuchet MS" pitchFamily="34" charset="-120"/>
+              </a:rPr>
+              <a:t>ly</a:t>
+            </a:r>
+            <a:endParaRPr lang="en-US" sz="1300" dirty="0"/>
+          </a:p>
+        </p:txBody>
+      </p:sp>
+      <p:sp>
+        <p:nvSpPr>
+          <p:cNvPr id="24" name="Text 22"/>
+          <p:cNvSpPr/>
+          <p:nvPr/>
+        </p:nvSpPr>
+        <p:spPr>
+          <a:xfrm>
+            <a:off x="6519672" y="2569464"/>
+            <a:ext cx="1828800" cy="201168"/>
+          </a:xfrm>
+          <a:prstGeom prst="rect">
+            <a:avLst/>
+          </a:prstGeom>
+          <a:noFill/>
+          <a:ln/>
+        </p:spPr>
+        <p:txBody>
+          <a:bodyPr wrap="square" lIns="0" tIns="0" rIns="0" bIns="0" rtlCol="0" anchor="t"/>
+          <a:lstStyle/>
+          <a:p>
+            <a:pPr algn="ctr" indent="0" marL="0">
+              <a:buNone/>
+            </a:pPr>
+            <a:r>
+              <a:rPr lang="en-US" sz="850" dirty="0">
+                <a:solidFill>
+                  <a:srgbClr val="475569"/>
+                </a:solidFill>
+                <a:latin typeface="Calibri" pitchFamily="34" charset="0"/>
+                <a:ea typeface="Calibri" pitchFamily="34" charset="-122"/>
+                <a:cs typeface="Calibri" pitchFamily="34" charset="-120"/>
+              </a:rPr>
+              <a:t>in a certain way; having a quality</a:t>
+            </a:r>
+            <a:endParaRPr lang="en-US" sz="850" dirty="0"/>
+          </a:p>
+        </p:txBody>
+      </p:sp>
+      <p:sp>
+        <p:nvSpPr>
+          <p:cNvPr id="25" name="Shape 23"/>
           <p:cNvSpPr/>
           <p:nvPr/>
         </p:nvSpPr>
@@ -21193,7 +21556,7 @@
       </p:sp>
       <p:sp>
         <p:nvSpPr>
-          <p:cNvPr id="23" name="Text 21"/>
+          <p:cNvPr id="26" name="Text 24"/>
           <p:cNvSpPr/>
           <p:nvPr/>
         </p:nvSpPr>
@@ -21232,7 +21595,7 @@
       </p:sp>
       <p:sp>
         <p:nvSpPr>
-          <p:cNvPr id="24" name="Shape 22"/>
+          <p:cNvPr id="27" name="Shape 25"/>
           <p:cNvSpPr/>
           <p:nvPr/>
         </p:nvSpPr>
@@ -21259,13 +21622,13 @@
       </p:sp>
       <p:sp>
         <p:nvSpPr>
-          <p:cNvPr id="25" name="Shape 23"/>
-          <p:cNvSpPr/>
-          <p:nvPr/>
-        </p:nvSpPr>
-        <p:spPr>
-          <a:xfrm>
-            <a:off x="2999232" y="3364992"/>
+          <p:cNvPr id="28" name="Shape 26"/>
+          <p:cNvSpPr/>
+          <p:nvPr/>
+        </p:nvSpPr>
+        <p:spPr>
+          <a:xfrm>
+            <a:off x="2313432" y="3364992"/>
             <a:ext cx="1645920" cy="475488"/>
           </a:xfrm>
           <a:prstGeom prst="rect">
@@ -21286,13 +21649,13 @@
       </p:sp>
       <p:sp>
         <p:nvSpPr>
-          <p:cNvPr id="26" name="Text 24"/>
-          <p:cNvSpPr/>
-          <p:nvPr/>
-        </p:nvSpPr>
-        <p:spPr>
-          <a:xfrm>
-            <a:off x="2999232" y="3364992"/>
+          <p:cNvPr id="29" name="Text 27"/>
+          <p:cNvSpPr/>
+          <p:nvPr/>
+        </p:nvSpPr>
+        <p:spPr>
+          <a:xfrm>
+            <a:off x="2313432" y="3364992"/>
             <a:ext cx="1645920" cy="475488"/>
           </a:xfrm>
           <a:prstGeom prst="rect">
@@ -21317,7 +21680,7 @@
                 <a:ea typeface="Trebuchet MS" pitchFamily="34" charset="-122"/>
                 <a:cs typeface="Trebuchet MS" pitchFamily="34" charset="-120"/>
               </a:rPr>
-              <a:t>friend</a:t>
+              <a:t>un</a:t>
             </a:r>
             <a:endParaRPr lang="en-US" sz="1400" dirty="0"/>
           </a:p>
@@ -21325,14 +21688,14 @@
       </p:sp>
       <p:sp>
         <p:nvSpPr>
-          <p:cNvPr id="27" name="Text 25"/>
-          <p:cNvSpPr/>
-          <p:nvPr/>
-        </p:nvSpPr>
-        <p:spPr>
-          <a:xfrm>
-            <a:off x="4645152" y="3364992"/>
-            <a:ext cx="1097280" cy="475488"/>
+          <p:cNvPr id="30" name="Text 28"/>
+          <p:cNvSpPr/>
+          <p:nvPr/>
+        </p:nvSpPr>
+        <p:spPr>
+          <a:xfrm>
+            <a:off x="3959352" y="3364992"/>
+            <a:ext cx="411480" cy="475488"/>
           </a:xfrm>
           <a:prstGeom prst="rect">
             <a:avLst/>
@@ -21364,13 +21727,13 @@
       </p:sp>
       <p:sp>
         <p:nvSpPr>
-          <p:cNvPr id="28" name="Shape 26"/>
-          <p:cNvSpPr/>
-          <p:nvPr/>
-        </p:nvSpPr>
-        <p:spPr>
-          <a:xfrm>
-            <a:off x="5742432" y="3364992"/>
+          <p:cNvPr id="31" name="Shape 29"/>
+          <p:cNvSpPr/>
+          <p:nvPr/>
+        </p:nvSpPr>
+        <p:spPr>
+          <a:xfrm>
+            <a:off x="4370832" y="3364992"/>
             <a:ext cx="1645920" cy="475488"/>
           </a:xfrm>
           <a:prstGeom prst="rect">
@@ -21391,13 +21754,13 @@
       </p:sp>
       <p:sp>
         <p:nvSpPr>
-          <p:cNvPr id="29" name="Text 27"/>
-          <p:cNvSpPr/>
-          <p:nvPr/>
-        </p:nvSpPr>
-        <p:spPr>
-          <a:xfrm>
-            <a:off x="5742432" y="3364992"/>
+          <p:cNvPr id="32" name="Text 30"/>
+          <p:cNvSpPr/>
+          <p:nvPr/>
+        </p:nvSpPr>
+        <p:spPr>
+          <a:xfrm>
+            <a:off x="4370832" y="3364992"/>
             <a:ext cx="1645920" cy="475488"/>
           </a:xfrm>
           <a:prstGeom prst="rect">
@@ -21422,6 +21785,111 @@
                 <a:ea typeface="Trebuchet MS" pitchFamily="34" charset="-122"/>
                 <a:cs typeface="Trebuchet MS" pitchFamily="34" charset="-120"/>
               </a:rPr>
+              <a:t>friend</a:t>
+            </a:r>
+            <a:endParaRPr lang="en-US" sz="1400" dirty="0"/>
+          </a:p>
+        </p:txBody>
+      </p:sp>
+      <p:sp>
+        <p:nvSpPr>
+          <p:cNvPr id="33" name="Text 31"/>
+          <p:cNvSpPr/>
+          <p:nvPr/>
+        </p:nvSpPr>
+        <p:spPr>
+          <a:xfrm>
+            <a:off x="6016752" y="3364992"/>
+            <a:ext cx="411480" cy="475488"/>
+          </a:xfrm>
+          <a:prstGeom prst="rect">
+            <a:avLst/>
+          </a:prstGeom>
+          <a:noFill/>
+          <a:ln/>
+        </p:spPr>
+        <p:txBody>
+          <a:bodyPr wrap="square" lIns="0" tIns="0" rIns="0" bIns="0" rtlCol="0" anchor="ctr"/>
+          <a:lstStyle/>
+          <a:p>
+            <a:pPr algn="ctr" indent="0" marL="0">
+              <a:buNone/>
+            </a:pPr>
+            <a:r>
+              <a:rPr lang="en-US" sz="1600" b="1" dirty="0">
+                <a:solidFill>
+                  <a:srgbClr val="0D9488"/>
+                </a:solidFill>
+                <a:latin typeface="Trebuchet MS" pitchFamily="34" charset="0"/>
+                <a:ea typeface="Trebuchet MS" pitchFamily="34" charset="-122"/>
+                <a:cs typeface="Trebuchet MS" pitchFamily="34" charset="-120"/>
+              </a:rPr>
+              <a:t>·</a:t>
+            </a:r>
+            <a:endParaRPr lang="en-US" sz="1600" dirty="0"/>
+          </a:p>
+        </p:txBody>
+      </p:sp>
+      <p:sp>
+        <p:nvSpPr>
+          <p:cNvPr id="34" name="Shape 32"/>
+          <p:cNvSpPr/>
+          <p:nvPr/>
+        </p:nvSpPr>
+        <p:spPr>
+          <a:xfrm>
+            <a:off x="6428232" y="3364992"/>
+            <a:ext cx="1645920" cy="475488"/>
+          </a:xfrm>
+          <a:prstGeom prst="rect">
+            <a:avLst>
+              <a:gd name="adj" fmla="val 9615"/>
+            </a:avLst>
+          </a:prstGeom>
+          <a:solidFill>
+            <a:srgbClr val="FFFFFF"/>
+          </a:solidFill>
+          <a:ln w="12700">
+            <a:solidFill>
+              <a:srgbClr val="0D9488"/>
+            </a:solidFill>
+            <a:prstDash val="solid"/>
+          </a:ln>
+        </p:spPr>
+      </p:sp>
+      <p:sp>
+        <p:nvSpPr>
+          <p:cNvPr id="35" name="Text 33"/>
+          <p:cNvSpPr/>
+          <p:nvPr/>
+        </p:nvSpPr>
+        <p:spPr>
+          <a:xfrm>
+            <a:off x="6428232" y="3364992"/>
+            <a:ext cx="1645920" cy="475488"/>
+          </a:xfrm>
+          <a:prstGeom prst="rect">
+            <a:avLst/>
+          </a:prstGeom>
+          <a:noFill/>
+          <a:ln/>
+        </p:spPr>
+        <p:txBody>
+          <a:bodyPr wrap="square" lIns="0" tIns="0" rIns="0" bIns="0" rtlCol="0" anchor="ctr"/>
+          <a:lstStyle/>
+          <a:p>
+            <a:pPr algn="ctr" indent="0" marL="0">
+              <a:buNone/>
+            </a:pPr>
+            <a:r>
+              <a:rPr lang="en-US" sz="1400" b="1" dirty="0">
+                <a:solidFill>
+                  <a:srgbClr val="0D9488"/>
+                </a:solidFill>
+                <a:latin typeface="Trebuchet MS" pitchFamily="34" charset="0"/>
+                <a:ea typeface="Trebuchet MS" pitchFamily="34" charset="-122"/>
+                <a:cs typeface="Trebuchet MS" pitchFamily="34" charset="-120"/>
+              </a:rPr>
               <a:t>ly</a:t>
             </a:r>
             <a:endParaRPr lang="en-US" sz="1400" dirty="0"/>
@@ -21430,7 +21898,7 @@
       </p:sp>
       <p:sp>
         <p:nvSpPr>
-          <p:cNvPr id="30" name="Shape 28"/>
+          <p:cNvPr id="36" name="Shape 34"/>
           <p:cNvSpPr/>
           <p:nvPr/>
         </p:nvSpPr>
@@ -21457,7 +21925,7 @@
       </p:sp>
       <p:sp>
         <p:nvSpPr>
-          <p:cNvPr id="31" name="Text 29"/>
+          <p:cNvPr id="37" name="Text 35"/>
           <p:cNvSpPr/>
           <p:nvPr/>
         </p:nvSpPr>
@@ -21496,7 +21964,7 @@
       </p:sp>
       <p:sp>
         <p:nvSpPr>
-          <p:cNvPr id="32" name="Shape 30"/>
+          <p:cNvPr id="38" name="Shape 36"/>
           <p:cNvSpPr/>
           <p:nvPr/>
         </p:nvSpPr>
@@ -21523,13 +21991,13 @@
       </p:sp>
       <p:sp>
         <p:nvSpPr>
-          <p:cNvPr id="33" name="Shape 31"/>
-          <p:cNvSpPr/>
-          <p:nvPr/>
-        </p:nvSpPr>
-        <p:spPr>
-          <a:xfrm>
-            <a:off x="2254649" y="4169664"/>
+          <p:cNvPr id="39" name="Shape 37"/>
+          <p:cNvSpPr/>
+          <p:nvPr/>
+        </p:nvSpPr>
+        <p:spPr>
+          <a:xfrm>
+            <a:off x="2023872" y="4169664"/>
             <a:ext cx="685800" cy="384048"/>
           </a:xfrm>
           <a:prstGeom prst="rect">
@@ -21550,13 +22018,13 @@
       </p:sp>
       <p:sp>
         <p:nvSpPr>
-          <p:cNvPr id="34" name="Text 32"/>
-          <p:cNvSpPr/>
-          <p:nvPr/>
-        </p:nvSpPr>
-        <p:spPr>
-          <a:xfrm>
-            <a:off x="2254649" y="4169664"/>
+          <p:cNvPr id="40" name="Text 38"/>
+          <p:cNvSpPr/>
+          <p:nvPr/>
+        </p:nvSpPr>
+        <p:spPr>
+          <a:xfrm>
+            <a:off x="2023872" y="4169664"/>
             <a:ext cx="685800" cy="384048"/>
           </a:xfrm>
           <a:prstGeom prst="rect">
@@ -21581,7 +22049,7 @@
                 <a:ea typeface="Trebuchet MS" pitchFamily="34" charset="-122"/>
                 <a:cs typeface="Trebuchet MS" pitchFamily="34" charset="-120"/>
               </a:rPr>
-              <a:t>fr</a:t>
+              <a:t>u</a:t>
             </a:r>
             <a:endParaRPr lang="en-US" sz="900" dirty="0"/>
           </a:p>
@@ -21589,13 +22057,13 @@
       </p:sp>
       <p:sp>
         <p:nvSpPr>
-          <p:cNvPr id="35" name="Shape 33"/>
-          <p:cNvSpPr/>
-          <p:nvPr/>
-        </p:nvSpPr>
-        <p:spPr>
-          <a:xfrm>
-            <a:off x="3293146" y="4169664"/>
+          <p:cNvPr id="41" name="Shape 39"/>
+          <p:cNvSpPr/>
+          <p:nvPr/>
+        </p:nvSpPr>
+        <p:spPr>
+          <a:xfrm>
+            <a:off x="2831592" y="4169664"/>
             <a:ext cx="685800" cy="384048"/>
           </a:xfrm>
           <a:prstGeom prst="rect">
@@ -21616,13 +22084,13 @@
       </p:sp>
       <p:sp>
         <p:nvSpPr>
-          <p:cNvPr id="36" name="Text 34"/>
-          <p:cNvSpPr/>
-          <p:nvPr/>
-        </p:nvSpPr>
-        <p:spPr>
-          <a:xfrm>
-            <a:off x="3293146" y="4169664"/>
+          <p:cNvPr id="42" name="Text 40"/>
+          <p:cNvSpPr/>
+          <p:nvPr/>
+        </p:nvSpPr>
+        <p:spPr>
+          <a:xfrm>
+            <a:off x="2831592" y="4169664"/>
             <a:ext cx="685800" cy="384048"/>
           </a:xfrm>
           <a:prstGeom prst="rect">
@@ -21647,7 +22115,7 @@
                 <a:ea typeface="Trebuchet MS" pitchFamily="34" charset="-122"/>
                 <a:cs typeface="Trebuchet MS" pitchFamily="34" charset="-120"/>
               </a:rPr>
-              <a:t>ie</a:t>
+              <a:t>n</a:t>
             </a:r>
             <a:endParaRPr lang="en-US" sz="900" dirty="0"/>
           </a:p>
@@ -21655,52 +22123,13 @@
       </p:sp>
       <p:sp>
         <p:nvSpPr>
-          <p:cNvPr id="37" name="Text 35"/>
-          <p:cNvSpPr/>
-          <p:nvPr/>
-        </p:nvSpPr>
-        <p:spPr>
-          <a:xfrm>
-            <a:off x="3293146" y="4572000"/>
-            <a:ext cx="685800" cy="219456"/>
-          </a:xfrm>
-          <a:prstGeom prst="rect">
-            <a:avLst/>
-          </a:prstGeom>
-          <a:noFill/>
-          <a:ln/>
-        </p:spPr>
-        <p:txBody>
-          <a:bodyPr wrap="square" lIns="0" tIns="0" rIns="0" bIns="0" rtlCol="0" anchor="t"/>
-          <a:lstStyle/>
-          <a:p>
-            <a:pPr algn="ctr" indent="0" marL="0">
-              <a:buNone/>
-            </a:pPr>
-            <a:r>
-              <a:rPr lang="en-US" sz="750" i="1" dirty="0">
-                <a:solidFill>
-                  <a:srgbClr val="94A3B8"/>
-                </a:solidFill>
-                <a:latin typeface="Calibri" pitchFamily="34" charset="0"/>
-                <a:ea typeface="Calibri" pitchFamily="34" charset="-122"/>
-                <a:cs typeface="Calibri" pitchFamily="34" charset="-120"/>
-              </a:rPr>
-              <a:t>/e/</a:t>
-            </a:r>
-            <a:endParaRPr lang="en-US" sz="750" dirty="0"/>
-          </a:p>
-        </p:txBody>
-      </p:sp>
-      <p:sp>
-        <p:nvSpPr>
-          <p:cNvPr id="38" name="Shape 36"/>
-          <p:cNvSpPr/>
-          <p:nvPr/>
-        </p:nvSpPr>
-        <p:spPr>
-          <a:xfrm>
-            <a:off x="4331643" y="4169664"/>
+          <p:cNvPr id="43" name="Shape 41"/>
+          <p:cNvSpPr/>
+          <p:nvPr/>
+        </p:nvSpPr>
+        <p:spPr>
+          <a:xfrm>
+            <a:off x="3639312" y="4169664"/>
             <a:ext cx="685800" cy="384048"/>
           </a:xfrm>
           <a:prstGeom prst="rect">
@@ -21721,13 +22150,13 @@
       </p:sp>
       <p:sp>
         <p:nvSpPr>
-          <p:cNvPr id="39" name="Text 37"/>
-          <p:cNvSpPr/>
-          <p:nvPr/>
-        </p:nvSpPr>
-        <p:spPr>
-          <a:xfrm>
-            <a:off x="4331643" y="4169664"/>
+          <p:cNvPr id="44" name="Text 42"/>
+          <p:cNvSpPr/>
+          <p:nvPr/>
+        </p:nvSpPr>
+        <p:spPr>
+          <a:xfrm>
+            <a:off x="3639312" y="4169664"/>
             <a:ext cx="685800" cy="384048"/>
           </a:xfrm>
           <a:prstGeom prst="rect">
@@ -21752,7 +22181,7 @@
                 <a:ea typeface="Trebuchet MS" pitchFamily="34" charset="-122"/>
                 <a:cs typeface="Trebuchet MS" pitchFamily="34" charset="-120"/>
               </a:rPr>
-              <a:t>n</a:t>
+              <a:t>fr</a:t>
             </a:r>
             <a:endParaRPr lang="en-US" sz="900" dirty="0"/>
           </a:p>
@@ -21760,13 +22189,13 @@
       </p:sp>
       <p:sp>
         <p:nvSpPr>
-          <p:cNvPr id="40" name="Shape 38"/>
-          <p:cNvSpPr/>
-          <p:nvPr/>
-        </p:nvSpPr>
-        <p:spPr>
-          <a:xfrm>
-            <a:off x="5370141" y="4169664"/>
+          <p:cNvPr id="45" name="Shape 43"/>
+          <p:cNvSpPr/>
+          <p:nvPr/>
+        </p:nvSpPr>
+        <p:spPr>
+          <a:xfrm>
+            <a:off x="4447032" y="4169664"/>
             <a:ext cx="685800" cy="384048"/>
           </a:xfrm>
           <a:prstGeom prst="rect">
@@ -21787,13 +22216,13 @@
       </p:sp>
       <p:sp>
         <p:nvSpPr>
-          <p:cNvPr id="41" name="Text 39"/>
-          <p:cNvSpPr/>
-          <p:nvPr/>
-        </p:nvSpPr>
-        <p:spPr>
-          <a:xfrm>
-            <a:off x="5370141" y="4169664"/>
+          <p:cNvPr id="46" name="Text 44"/>
+          <p:cNvSpPr/>
+          <p:nvPr/>
+        </p:nvSpPr>
+        <p:spPr>
+          <a:xfrm>
+            <a:off x="4447032" y="4169664"/>
             <a:ext cx="685800" cy="384048"/>
           </a:xfrm>
           <a:prstGeom prst="rect">
@@ -21818,7 +22247,7 @@
                 <a:ea typeface="Trebuchet MS" pitchFamily="34" charset="-122"/>
                 <a:cs typeface="Trebuchet MS" pitchFamily="34" charset="-120"/>
               </a:rPr>
-              <a:t>d</a:t>
+              <a:t>ie</a:t>
             </a:r>
             <a:endParaRPr lang="en-US" sz="900" dirty="0"/>
           </a:p>
@@ -21826,13 +22255,13 @@
       </p:sp>
       <p:sp>
         <p:nvSpPr>
-          <p:cNvPr id="42" name="Shape 40"/>
-          <p:cNvSpPr/>
-          <p:nvPr/>
-        </p:nvSpPr>
-        <p:spPr>
-          <a:xfrm>
-            <a:off x="6408638" y="4169664"/>
+          <p:cNvPr id="47" name="Shape 45"/>
+          <p:cNvSpPr/>
+          <p:nvPr/>
+        </p:nvSpPr>
+        <p:spPr>
+          <a:xfrm>
+            <a:off x="5254752" y="4169664"/>
             <a:ext cx="685800" cy="384048"/>
           </a:xfrm>
           <a:prstGeom prst="rect">
@@ -21853,13 +22282,13 @@
       </p:sp>
       <p:sp>
         <p:nvSpPr>
-          <p:cNvPr id="43" name="Text 41"/>
-          <p:cNvSpPr/>
-          <p:nvPr/>
-        </p:nvSpPr>
-        <p:spPr>
-          <a:xfrm>
-            <a:off x="6408638" y="4169664"/>
+          <p:cNvPr id="48" name="Text 46"/>
+          <p:cNvSpPr/>
+          <p:nvPr/>
+        </p:nvSpPr>
+        <p:spPr>
+          <a:xfrm>
+            <a:off x="5254752" y="4169664"/>
             <a:ext cx="685800" cy="384048"/>
           </a:xfrm>
           <a:prstGeom prst="rect">
@@ -21884,7 +22313,7 @@
                 <a:ea typeface="Trebuchet MS" pitchFamily="34" charset="-122"/>
                 <a:cs typeface="Trebuchet MS" pitchFamily="34" charset="-120"/>
               </a:rPr>
-              <a:t>l</a:t>
+              <a:t>n</a:t>
             </a:r>
             <a:endParaRPr lang="en-US" sz="900" dirty="0"/>
           </a:p>
@@ -21892,13 +22321,13 @@
       </p:sp>
       <p:sp>
         <p:nvSpPr>
-          <p:cNvPr id="44" name="Shape 42"/>
-          <p:cNvSpPr/>
-          <p:nvPr/>
-        </p:nvSpPr>
-        <p:spPr>
-          <a:xfrm>
-            <a:off x="7447135" y="4169664"/>
+          <p:cNvPr id="49" name="Shape 47"/>
+          <p:cNvSpPr/>
+          <p:nvPr/>
+        </p:nvSpPr>
+        <p:spPr>
+          <a:xfrm>
+            <a:off x="6062472" y="4169664"/>
             <a:ext cx="685800" cy="384048"/>
           </a:xfrm>
           <a:prstGeom prst="rect">
@@ -21919,13 +22348,13 @@
       </p:sp>
       <p:sp>
         <p:nvSpPr>
-          <p:cNvPr id="45" name="Text 43"/>
-          <p:cNvSpPr/>
-          <p:nvPr/>
-        </p:nvSpPr>
-        <p:spPr>
-          <a:xfrm>
-            <a:off x="7447135" y="4169664"/>
+          <p:cNvPr id="50" name="Text 48"/>
+          <p:cNvSpPr/>
+          <p:nvPr/>
+        </p:nvSpPr>
+        <p:spPr>
+          <a:xfrm>
+            <a:off x="6062472" y="4169664"/>
             <a:ext cx="685800" cy="384048"/>
           </a:xfrm>
           <a:prstGeom prst="rect">
@@ -21950,7 +22379,7 @@
                 <a:ea typeface="Trebuchet MS" pitchFamily="34" charset="-122"/>
                 <a:cs typeface="Trebuchet MS" pitchFamily="34" charset="-120"/>
               </a:rPr>
-              <a:t>y</a:t>
+              <a:t>d</a:t>
             </a:r>
             <a:endParaRPr lang="en-US" sz="900" dirty="0"/>
           </a:p>
@@ -21958,13 +22387,145 @@
       </p:sp>
       <p:sp>
         <p:nvSpPr>
-          <p:cNvPr id="46" name="Text 44"/>
-          <p:cNvSpPr/>
-          <p:nvPr/>
-        </p:nvSpPr>
-        <p:spPr>
-          <a:xfrm>
-            <a:off x="7447135" y="4572000"/>
+          <p:cNvPr id="51" name="Shape 49"/>
+          <p:cNvSpPr/>
+          <p:nvPr/>
+        </p:nvSpPr>
+        <p:spPr>
+          <a:xfrm>
+            <a:off x="6870192" y="4169664"/>
+            <a:ext cx="685800" cy="384048"/>
+          </a:xfrm>
+          <a:prstGeom prst="rect">
+            <a:avLst>
+              <a:gd name="adj" fmla="val 9524"/>
+            </a:avLst>
+          </a:prstGeom>
+          <a:solidFill>
+            <a:srgbClr val="FFFFFF"/>
+          </a:solidFill>
+          <a:ln w="12700">
+            <a:solidFill>
+              <a:srgbClr val="DB2777"/>
+            </a:solidFill>
+            <a:prstDash val="solid"/>
+          </a:ln>
+        </p:spPr>
+      </p:sp>
+      <p:sp>
+        <p:nvSpPr>
+          <p:cNvPr id="52" name="Text 50"/>
+          <p:cNvSpPr/>
+          <p:nvPr/>
+        </p:nvSpPr>
+        <p:spPr>
+          <a:xfrm>
+            <a:off x="6870192" y="4169664"/>
+            <a:ext cx="685800" cy="384048"/>
+          </a:xfrm>
+          <a:prstGeom prst="rect">
+            <a:avLst/>
+          </a:prstGeom>
+          <a:noFill/>
+          <a:ln/>
+        </p:spPr>
+        <p:txBody>
+          <a:bodyPr wrap="square" lIns="0" tIns="0" rIns="0" bIns="0" rtlCol="0" anchor="ctr"/>
+          <a:lstStyle/>
+          <a:p>
+            <a:pPr algn="ctr" indent="0" marL="0">
+              <a:buNone/>
+            </a:pPr>
+            <a:r>
+              <a:rPr lang="en-US" sz="900" b="1" dirty="0">
+                <a:solidFill>
+                  <a:srgbClr val="9D174D"/>
+                </a:solidFill>
+                <a:latin typeface="Trebuchet MS" pitchFamily="34" charset="0"/>
+                <a:ea typeface="Trebuchet MS" pitchFamily="34" charset="-122"/>
+                <a:cs typeface="Trebuchet MS" pitchFamily="34" charset="-120"/>
+              </a:rPr>
+              <a:t>l</a:t>
+            </a:r>
+            <a:endParaRPr lang="en-US" sz="900" dirty="0"/>
+          </a:p>
+        </p:txBody>
+      </p:sp>
+      <p:sp>
+        <p:nvSpPr>
+          <p:cNvPr id="53" name="Shape 51"/>
+          <p:cNvSpPr/>
+          <p:nvPr/>
+        </p:nvSpPr>
+        <p:spPr>
+          <a:xfrm>
+            <a:off x="7677912" y="4169664"/>
+            <a:ext cx="685800" cy="384048"/>
+          </a:xfrm>
+          <a:prstGeom prst="rect">
+            <a:avLst>
+              <a:gd name="adj" fmla="val 9524"/>
+            </a:avLst>
+          </a:prstGeom>
+          <a:solidFill>
+            <a:srgbClr val="FFFFFF"/>
+          </a:solidFill>
+          <a:ln w="12700">
+            <a:solidFill>
+              <a:srgbClr val="DB2777"/>
+            </a:solidFill>
+            <a:prstDash val="solid"/>
+          </a:ln>
+        </p:spPr>
+      </p:sp>
+      <p:sp>
+        <p:nvSpPr>
+          <p:cNvPr id="54" name="Text 52"/>
+          <p:cNvSpPr/>
+          <p:nvPr/>
+        </p:nvSpPr>
+        <p:spPr>
+          <a:xfrm>
+            <a:off x="7677912" y="4169664"/>
+            <a:ext cx="685800" cy="384048"/>
+          </a:xfrm>
+          <a:prstGeom prst="rect">
+            <a:avLst/>
+          </a:prstGeom>
+          <a:noFill/>
+          <a:ln/>
+        </p:spPr>
+        <p:txBody>
+          <a:bodyPr wrap="square" lIns="0" tIns="0" rIns="0" bIns="0" rtlCol="0" anchor="ctr"/>
+          <a:lstStyle/>
+          <a:p>
+            <a:pPr algn="ctr" indent="0" marL="0">
+              <a:buNone/>
+            </a:pPr>
+            <a:r>
+              <a:rPr lang="en-US" sz="900" b="1" dirty="0">
+                <a:solidFill>
+                  <a:srgbClr val="9D174D"/>
+                </a:solidFill>
+                <a:latin typeface="Trebuchet MS" pitchFamily="34" charset="0"/>
+                <a:ea typeface="Trebuchet MS" pitchFamily="34" charset="-122"/>
+                <a:cs typeface="Trebuchet MS" pitchFamily="34" charset="-120"/>
+              </a:rPr>
+              <a:t>ee</a:t>
+            </a:r>
+            <a:endParaRPr lang="en-US" sz="900" dirty="0"/>
+          </a:p>
+        </p:txBody>
+      </p:sp>
+      <p:sp>
+        <p:nvSpPr>
+          <p:cNvPr id="55" name="Text 53"/>
+          <p:cNvSpPr/>
+          <p:nvPr/>
+        </p:nvSpPr>
+        <p:spPr>
+          <a:xfrm>
+            <a:off x="7677912" y="4572000"/>
             <a:ext cx="685800" cy="219456"/>
           </a:xfrm>
           <a:prstGeom prst="rect">
@@ -22281,7 +22842,7 @@
                 <a:ea typeface="Calibri" pitchFamily="34" charset="-122"/>
                 <a:cs typeface="Calibri" pitchFamily="34" charset="-120"/>
               </a:rPr>
-              <a:t>Word Labs  •  wordlabs.app  •  Root: 'friend' = person who is liked</a:t>
+              <a:t>Word Labs  •  wordlabs.app  •  Root: 'friend' = person one likes and trusts</a:t>
             </a:r>
             <a:endParaRPr lang="en-US" sz="800" dirty="0"/>
           </a:p>
@@ -22420,7 +22981,7 @@
                 <a:ea typeface="Trebuchet MS" pitchFamily="34" charset="-122"/>
                 <a:cs typeface="Trebuchet MS" pitchFamily="34" charset="-120"/>
               </a:rPr>
-              <a:t>befriend</a:t>
+              <a:t>friendliness</a:t>
             </a:r>
             <a:endParaRPr lang="en-US" sz="2800" dirty="0"/>
           </a:p>
@@ -23108,7 +23669,7 @@
                 <a:ea typeface="Calibri" pitchFamily="34" charset="-122"/>
                 <a:cs typeface="Calibri" pitchFamily="34" charset="-120"/>
               </a:rPr>
-              <a:t>Word Labs  •  wordlabs.app  •  Root: 'friend' = person who is liked</a:t>
+              <a:t>Word Labs  •  wordlabs.app  •  Root: 'friend' = person one likes and trusts</a:t>
             </a:r>
             <a:endParaRPr lang="en-US" sz="800" dirty="0"/>
           </a:p>
@@ -23247,7 +23808,7 @@
                 <a:ea typeface="Trebuchet MS" pitchFamily="34" charset="-122"/>
                 <a:cs typeface="Trebuchet MS" pitchFamily="34" charset="-120"/>
               </a:rPr>
-              <a:t>befriend</a:t>
+              <a:t>friendliness</a:t>
             </a:r>
             <a:endParaRPr lang="en-US" sz="2800" dirty="0"/>
           </a:p>
@@ -23327,7 +23888,7 @@
         </p:nvSpPr>
         <p:spPr>
           <a:xfrm>
-            <a:off x="2938272" y="2258568"/>
+            <a:off x="2221992" y="2258568"/>
             <a:ext cx="1828800" cy="292608"/>
           </a:xfrm>
           <a:prstGeom prst="rect">
@@ -23336,11 +23897,11 @@
             </a:avLst>
           </a:prstGeom>
           <a:solidFill>
-            <a:srgbClr val="DDD6FE"/>
+            <a:srgbClr val="CCFBF1"/>
           </a:solidFill>
           <a:ln w="19050">
             <a:solidFill>
-              <a:srgbClr val="7C3AED"/>
+              <a:srgbClr val="0D9488"/>
             </a:solidFill>
             <a:prstDash val="solid"/>
           </a:ln>
@@ -23361,7 +23922,7 @@
         </p:nvSpPr>
         <p:spPr>
           <a:xfrm>
-            <a:off x="2938272" y="2258568"/>
+            <a:off x="2221992" y="2258568"/>
             <a:ext cx="1828800" cy="292608"/>
           </a:xfrm>
           <a:prstGeom prst="rect">
@@ -23380,13 +23941,13 @@
             <a:r>
               <a:rPr lang="en-US" sz="1300" b="1" dirty="0">
                 <a:solidFill>
-                  <a:srgbClr val="4C1D95"/>
+                  <a:srgbClr val="0F766E"/>
                 </a:solidFill>
                 <a:latin typeface="Trebuchet MS" pitchFamily="34" charset="0"/>
                 <a:ea typeface="Trebuchet MS" pitchFamily="34" charset="-122"/>
                 <a:cs typeface="Trebuchet MS" pitchFamily="34" charset="-120"/>
               </a:rPr>
-              <a:t>be</a:t>
+              <a:t>friend</a:t>
             </a:r>
             <a:endParaRPr lang="en-US" sz="1300" dirty="0"/>
           </a:p>
@@ -23400,7 +23961,7 @@
         </p:nvSpPr>
         <p:spPr>
           <a:xfrm>
-            <a:off x="2938272" y="2569464"/>
+            <a:off x="2221992" y="2569464"/>
             <a:ext cx="1828800" cy="201168"/>
           </a:xfrm>
           <a:prstGeom prst="rect">
@@ -23425,7 +23986,7 @@
                 <a:ea typeface="Calibri" pitchFamily="34" charset="-122"/>
                 <a:cs typeface="Calibri" pitchFamily="34" charset="-120"/>
               </a:rPr>
-              <a:t>to make or cause</a:t>
+              <a:t>person one likes and trusts</a:t>
             </a:r>
             <a:endParaRPr lang="en-US" sz="850" dirty="0"/>
           </a:p>
@@ -23439,7 +24000,7 @@
         </p:nvSpPr>
         <p:spPr>
           <a:xfrm>
-            <a:off x="5803392" y="2258568"/>
+            <a:off x="4370832" y="2258568"/>
             <a:ext cx="1828800" cy="292608"/>
           </a:xfrm>
           <a:prstGeom prst="rect">
@@ -23448,11 +24009,11 @@
             </a:avLst>
           </a:prstGeom>
           <a:solidFill>
-            <a:srgbClr val="CCFBF1"/>
+            <a:srgbClr val="FCE7F3"/>
           </a:solidFill>
           <a:ln w="19050">
             <a:solidFill>
-              <a:srgbClr val="0D9488"/>
+              <a:srgbClr val="DB2777"/>
             </a:solidFill>
             <a:prstDash val="solid"/>
           </a:ln>
@@ -23473,7 +24034,7 @@
         </p:nvSpPr>
         <p:spPr>
           <a:xfrm>
-            <a:off x="5803392" y="2258568"/>
+            <a:off x="4370832" y="2258568"/>
             <a:ext cx="1828800" cy="292608"/>
           </a:xfrm>
           <a:prstGeom prst="rect">
@@ -23492,13 +24053,13 @@
             <a:r>
               <a:rPr lang="en-US" sz="1300" b="1" dirty="0">
                 <a:solidFill>
-                  <a:srgbClr val="0F766E"/>
+                  <a:srgbClr val="9D174D"/>
                 </a:solidFill>
                 <a:latin typeface="Trebuchet MS" pitchFamily="34" charset="0"/>
                 <a:ea typeface="Trebuchet MS" pitchFamily="34" charset="-122"/>
                 <a:cs typeface="Trebuchet MS" pitchFamily="34" charset="-120"/>
               </a:rPr>
-              <a:t>friend</a:t>
+              <a:t>li</a:t>
             </a:r>
             <a:endParaRPr lang="en-US" sz="1300" dirty="0"/>
           </a:p>
@@ -23512,7 +24073,7 @@
         </p:nvSpPr>
         <p:spPr>
           <a:xfrm>
-            <a:off x="5803392" y="2569464"/>
+            <a:off x="4370832" y="2569464"/>
             <a:ext cx="1828800" cy="201168"/>
           </a:xfrm>
           <a:prstGeom prst="rect">
@@ -23537,7 +24098,7 @@
                 <a:ea typeface="Calibri" pitchFamily="34" charset="-122"/>
                 <a:cs typeface="Calibri" pitchFamily="34" charset="-120"/>
               </a:rPr>
-              <a:t>person who is liked</a:t>
+              <a:t>in a certain way</a:t>
             </a:r>
             <a:endParaRPr lang="en-US" sz="850" dirty="0"/>
           </a:p>
@@ -23545,7 +24106,158 @@
       </p:sp>
       <p:sp>
         <p:nvSpPr>
-          <p:cNvPr id="22" name="Shape 20"/>
+          <p:cNvPr id="22" name="Text 20"/>
+          <p:cNvSpPr/>
+          <p:nvPr/>
+        </p:nvSpPr>
+        <p:spPr>
+          <a:xfrm>
+            <a:off x="4370832" y="2752344"/>
+            <a:ext cx="1828800" cy="182880"/>
+          </a:xfrm>
+          <a:prstGeom prst="rect">
+            <a:avLst/>
+          </a:prstGeom>
+          <a:noFill/>
+          <a:ln/>
+        </p:spPr>
+        <p:txBody>
+          <a:bodyPr wrap="square" lIns="0" tIns="0" rIns="0" bIns="0" rtlCol="0" anchor="t"/>
+          <a:lstStyle/>
+          <a:p>
+            <a:pPr algn="ctr" indent="0" marL="0">
+              <a:buNone/>
+            </a:pPr>
+            <a:r>
+              <a:rPr lang="en-US" sz="700" i="1" dirty="0">
+                <a:solidFill>
+                  <a:srgbClr val="94A3B8"/>
+                </a:solidFill>
+                <a:latin typeface="Calibri" pitchFamily="34" charset="0"/>
+                <a:ea typeface="Calibri" pitchFamily="34" charset="-122"/>
+                <a:cs typeface="Calibri" pitchFamily="34" charset="-120"/>
+              </a:rPr>
+              <a:t>'y' changes to 'i' before suffix</a:t>
+            </a:r>
+            <a:endParaRPr lang="en-US" sz="700" dirty="0"/>
+          </a:p>
+        </p:txBody>
+      </p:sp>
+      <p:sp>
+        <p:nvSpPr>
+          <p:cNvPr id="23" name="Shape 21"/>
+          <p:cNvSpPr/>
+          <p:nvPr/>
+        </p:nvSpPr>
+        <p:spPr>
+          <a:xfrm>
+            <a:off x="6519672" y="2258568"/>
+            <a:ext cx="1828800" cy="292608"/>
+          </a:xfrm>
+          <a:prstGeom prst="rect">
+            <a:avLst>
+              <a:gd name="adj" fmla="val 25000"/>
+            </a:avLst>
+          </a:prstGeom>
+          <a:solidFill>
+            <a:srgbClr val="FCE7F3"/>
+          </a:solidFill>
+          <a:ln w="19050">
+            <a:solidFill>
+              <a:srgbClr val="DB2777"/>
+            </a:solidFill>
+            <a:prstDash val="solid"/>
+          </a:ln>
+          <a:effectLst>
+            <a:outerShdw sx="100000" sy="100000" kx="0" ky="0" algn="bl" rotWithShape="0" blurRad="101600" dist="38100" dir="8100000">
+              <a:srgbClr val="000000">
+                <a:alpha val="12000"/>
+              </a:srgbClr>
+            </a:outerShdw>
+          </a:effectLst>
+        </p:spPr>
+      </p:sp>
+      <p:sp>
+        <p:nvSpPr>
+          <p:cNvPr id="24" name="Text 22"/>
+          <p:cNvSpPr/>
+          <p:nvPr/>
+        </p:nvSpPr>
+        <p:spPr>
+          <a:xfrm>
+            <a:off x="6519672" y="2258568"/>
+            <a:ext cx="1828800" cy="292608"/>
+          </a:xfrm>
+          <a:prstGeom prst="rect">
+            <a:avLst/>
+          </a:prstGeom>
+          <a:noFill/>
+          <a:ln/>
+        </p:spPr>
+        <p:txBody>
+          <a:bodyPr wrap="square" lIns="0" tIns="0" rIns="0" bIns="0" rtlCol="0" anchor="ctr"/>
+          <a:lstStyle/>
+          <a:p>
+            <a:pPr algn="ctr" indent="0" marL="0">
+              <a:buNone/>
+            </a:pPr>
+            <a:r>
+              <a:rPr lang="en-US" sz="1300" b="1" dirty="0">
+                <a:solidFill>
+                  <a:srgbClr val="9D174D"/>
+                </a:solidFill>
+                <a:latin typeface="Trebuchet MS" pitchFamily="34" charset="0"/>
+                <a:ea typeface="Trebuchet MS" pitchFamily="34" charset="-122"/>
+                <a:cs typeface="Trebuchet MS" pitchFamily="34" charset="-120"/>
+              </a:rPr>
+              <a:t>ness</a:t>
+            </a:r>
+            <a:endParaRPr lang="en-US" sz="1300" dirty="0"/>
+          </a:p>
+        </p:txBody>
+      </p:sp>
+      <p:sp>
+        <p:nvSpPr>
+          <p:cNvPr id="25" name="Text 23"/>
+          <p:cNvSpPr/>
+          <p:nvPr/>
+        </p:nvSpPr>
+        <p:spPr>
+          <a:xfrm>
+            <a:off x="6519672" y="2569464"/>
+            <a:ext cx="1828800" cy="201168"/>
+          </a:xfrm>
+          <a:prstGeom prst="rect">
+            <a:avLst/>
+          </a:prstGeom>
+          <a:noFill/>
+          <a:ln/>
+        </p:spPr>
+        <p:txBody>
+          <a:bodyPr wrap="square" lIns="0" tIns="0" rIns="0" bIns="0" rtlCol="0" anchor="t"/>
+          <a:lstStyle/>
+          <a:p>
+            <a:pPr algn="ctr" indent="0" marL="0">
+              <a:buNone/>
+            </a:pPr>
+            <a:r>
+              <a:rPr lang="en-US" sz="850" dirty="0">
+                <a:solidFill>
+                  <a:srgbClr val="475569"/>
+                </a:solidFill>
+                <a:latin typeface="Calibri" pitchFamily="34" charset="0"/>
+                <a:ea typeface="Calibri" pitchFamily="34" charset="-122"/>
+                <a:cs typeface="Calibri" pitchFamily="34" charset="-120"/>
+              </a:rPr>
+              <a:t>quality or state of</a:t>
+            </a:r>
+            <a:endParaRPr lang="en-US" sz="850" dirty="0"/>
+          </a:p>
+        </p:txBody>
+      </p:sp>
+      <p:sp>
+        <p:nvSpPr>
+          <p:cNvPr id="26" name="Shape 24"/>
           <p:cNvSpPr/>
           <p:nvPr/>
         </p:nvSpPr>
@@ -23572,7 +24284,7 @@
       </p:sp>
       <p:sp>
         <p:nvSpPr>
-          <p:cNvPr id="23" name="Text 21"/>
+          <p:cNvPr id="27" name="Text 25"/>
           <p:cNvSpPr/>
           <p:nvPr/>
         </p:nvSpPr>
@@ -23611,7 +24323,7 @@
       </p:sp>
       <p:sp>
         <p:nvSpPr>
-          <p:cNvPr id="24" name="Shape 22"/>
+          <p:cNvPr id="28" name="Shape 26"/>
           <p:cNvSpPr/>
           <p:nvPr/>
         </p:nvSpPr>
@@ -23638,7 +24350,7 @@
       </p:sp>
       <p:sp>
         <p:nvSpPr>
-          <p:cNvPr id="25" name="Text 23"/>
+          <p:cNvPr id="29" name="Text 27"/>
           <p:cNvSpPr/>
           <p:nvPr/>
         </p:nvSpPr>
@@ -23677,7 +24389,7 @@
       </p:sp>
       <p:sp>
         <p:nvSpPr>
-          <p:cNvPr id="26" name="Shape 24"/>
+          <p:cNvPr id="30" name="Shape 28"/>
           <p:cNvSpPr/>
           <p:nvPr/>
         </p:nvSpPr>
@@ -23704,7 +24416,7 @@
       </p:sp>
       <p:sp>
         <p:nvSpPr>
-          <p:cNvPr id="27" name="Text 25"/>
+          <p:cNvPr id="31" name="Text 29"/>
           <p:cNvSpPr/>
           <p:nvPr/>
         </p:nvSpPr>
@@ -23743,7 +24455,7 @@
       </p:sp>
       <p:sp>
         <p:nvSpPr>
-          <p:cNvPr id="28" name="Shape 26"/>
+          <p:cNvPr id="32" name="Shape 30"/>
           <p:cNvSpPr/>
           <p:nvPr/>
         </p:nvSpPr>
@@ -23770,7 +24482,7 @@
       </p:sp>
       <p:sp>
         <p:nvSpPr>
-          <p:cNvPr id="29" name="Text 27"/>
+          <p:cNvPr id="33" name="Text 31"/>
           <p:cNvSpPr/>
           <p:nvPr/>
         </p:nvSpPr>
@@ -24093,7 +24805,7 @@
                 <a:ea typeface="Calibri" pitchFamily="34" charset="-122"/>
                 <a:cs typeface="Calibri" pitchFamily="34" charset="-120"/>
               </a:rPr>
-              <a:t>Word Labs  •  wordlabs.app  •  Root: 'friend' = person who is liked</a:t>
+              <a:t>Word Labs  •  wordlabs.app  •  Root: 'friend' = person one likes and trusts</a:t>
             </a:r>
             <a:endParaRPr lang="en-US" sz="800" dirty="0"/>
           </a:p>
@@ -24166,7 +24878,7 @@
                 <a:ea typeface="Trebuchet MS" pitchFamily="34" charset="-122"/>
                 <a:cs typeface="Trebuchet MS" pitchFamily="34" charset="-120"/>
               </a:rPr>
-              <a:t>We are learning that the root 'friend' means 'person who is liked'.</a:t>
+              <a:t>We are learning that the root 'friend' means 'person one likes and trusts'.</a:t>
             </a:r>
             <a:endParaRPr lang="en-US" sz="2000" dirty="0"/>
           </a:p>
@@ -24812,7 +25524,7 @@
                 <a:ea typeface="Calibri" pitchFamily="34" charset="-122"/>
                 <a:cs typeface="Calibri" pitchFamily="34" charset="-120"/>
               </a:rPr>
-              <a:t>Word Labs  •  wordlabs.app  •  Root: 'friend' = person who is liked</a:t>
+              <a:t>Word Labs  •  wordlabs.app  •  Root: 'friend' = person one likes and trusts</a:t>
             </a:r>
             <a:endParaRPr lang="en-US" sz="800" dirty="0"/>
           </a:p>
@@ -24951,7 +25663,7 @@
                 <a:ea typeface="Trebuchet MS" pitchFamily="34" charset="-122"/>
                 <a:cs typeface="Trebuchet MS" pitchFamily="34" charset="-120"/>
               </a:rPr>
-              <a:t>befriend</a:t>
+              <a:t>friendliness</a:t>
             </a:r>
             <a:endParaRPr lang="en-US" sz="2800" dirty="0"/>
           </a:p>
@@ -25031,7 +25743,7 @@
         </p:nvSpPr>
         <p:spPr>
           <a:xfrm>
-            <a:off x="2938272" y="2258568"/>
+            <a:off x="2221992" y="2258568"/>
             <a:ext cx="1828800" cy="292608"/>
           </a:xfrm>
           <a:prstGeom prst="rect">
@@ -25040,11 +25752,11 @@
             </a:avLst>
           </a:prstGeom>
           <a:solidFill>
-            <a:srgbClr val="DDD6FE"/>
+            <a:srgbClr val="CCFBF1"/>
           </a:solidFill>
           <a:ln w="19050">
             <a:solidFill>
-              <a:srgbClr val="7C3AED"/>
+              <a:srgbClr val="0D9488"/>
             </a:solidFill>
             <a:prstDash val="solid"/>
           </a:ln>
@@ -25065,7 +25777,7 @@
         </p:nvSpPr>
         <p:spPr>
           <a:xfrm>
-            <a:off x="2938272" y="2258568"/>
+            <a:off x="2221992" y="2258568"/>
             <a:ext cx="1828800" cy="292608"/>
           </a:xfrm>
           <a:prstGeom prst="rect">
@@ -25084,13 +25796,13 @@
             <a:r>
               <a:rPr lang="en-US" sz="1300" b="1" dirty="0">
                 <a:solidFill>
-                  <a:srgbClr val="4C1D95"/>
+                  <a:srgbClr val="0F766E"/>
                 </a:solidFill>
                 <a:latin typeface="Trebuchet MS" pitchFamily="34" charset="0"/>
                 <a:ea typeface="Trebuchet MS" pitchFamily="34" charset="-122"/>
                 <a:cs typeface="Trebuchet MS" pitchFamily="34" charset="-120"/>
               </a:rPr>
-              <a:t>be</a:t>
+              <a:t>friend</a:t>
             </a:r>
             <a:endParaRPr lang="en-US" sz="1300" dirty="0"/>
           </a:p>
@@ -25104,7 +25816,7 @@
         </p:nvSpPr>
         <p:spPr>
           <a:xfrm>
-            <a:off x="2938272" y="2569464"/>
+            <a:off x="2221992" y="2569464"/>
             <a:ext cx="1828800" cy="201168"/>
           </a:xfrm>
           <a:prstGeom prst="rect">
@@ -25129,7 +25841,7 @@
                 <a:ea typeface="Calibri" pitchFamily="34" charset="-122"/>
                 <a:cs typeface="Calibri" pitchFamily="34" charset="-120"/>
               </a:rPr>
-              <a:t>to make or cause</a:t>
+              <a:t>person one likes and trusts</a:t>
             </a:r>
             <a:endParaRPr lang="en-US" sz="850" dirty="0"/>
           </a:p>
@@ -25143,7 +25855,7 @@
         </p:nvSpPr>
         <p:spPr>
           <a:xfrm>
-            <a:off x="5803392" y="2258568"/>
+            <a:off x="4370832" y="2258568"/>
             <a:ext cx="1828800" cy="292608"/>
           </a:xfrm>
           <a:prstGeom prst="rect">
@@ -25152,11 +25864,11 @@
             </a:avLst>
           </a:prstGeom>
           <a:solidFill>
-            <a:srgbClr val="CCFBF1"/>
+            <a:srgbClr val="FCE7F3"/>
           </a:solidFill>
           <a:ln w="19050">
             <a:solidFill>
-              <a:srgbClr val="0D9488"/>
+              <a:srgbClr val="DB2777"/>
             </a:solidFill>
             <a:prstDash val="solid"/>
           </a:ln>
@@ -25177,7 +25889,7 @@
         </p:nvSpPr>
         <p:spPr>
           <a:xfrm>
-            <a:off x="5803392" y="2258568"/>
+            <a:off x="4370832" y="2258568"/>
             <a:ext cx="1828800" cy="292608"/>
           </a:xfrm>
           <a:prstGeom prst="rect">
@@ -25196,13 +25908,13 @@
             <a:r>
               <a:rPr lang="en-US" sz="1300" b="1" dirty="0">
                 <a:solidFill>
-                  <a:srgbClr val="0F766E"/>
+                  <a:srgbClr val="9D174D"/>
                 </a:solidFill>
                 <a:latin typeface="Trebuchet MS" pitchFamily="34" charset="0"/>
                 <a:ea typeface="Trebuchet MS" pitchFamily="34" charset="-122"/>
                 <a:cs typeface="Trebuchet MS" pitchFamily="34" charset="-120"/>
               </a:rPr>
-              <a:t>friend</a:t>
+              <a:t>li</a:t>
             </a:r>
             <a:endParaRPr lang="en-US" sz="1300" dirty="0"/>
           </a:p>
@@ -25216,7 +25928,7 @@
         </p:nvSpPr>
         <p:spPr>
           <a:xfrm>
-            <a:off x="5803392" y="2569464"/>
+            <a:off x="4370832" y="2569464"/>
             <a:ext cx="1828800" cy="201168"/>
           </a:xfrm>
           <a:prstGeom prst="rect">
@@ -25241,7 +25953,7 @@
                 <a:ea typeface="Calibri" pitchFamily="34" charset="-122"/>
                 <a:cs typeface="Calibri" pitchFamily="34" charset="-120"/>
               </a:rPr>
-              <a:t>person who is liked</a:t>
+              <a:t>in a certain way</a:t>
             </a:r>
             <a:endParaRPr lang="en-US" sz="850" dirty="0"/>
           </a:p>
@@ -25249,7 +25961,158 @@
       </p:sp>
       <p:sp>
         <p:nvSpPr>
-          <p:cNvPr id="22" name="Shape 20"/>
+          <p:cNvPr id="22" name="Text 20"/>
+          <p:cNvSpPr/>
+          <p:nvPr/>
+        </p:nvSpPr>
+        <p:spPr>
+          <a:xfrm>
+            <a:off x="4370832" y="2752344"/>
+            <a:ext cx="1828800" cy="182880"/>
+          </a:xfrm>
+          <a:prstGeom prst="rect">
+            <a:avLst/>
+          </a:prstGeom>
+          <a:noFill/>
+          <a:ln/>
+        </p:spPr>
+        <p:txBody>
+          <a:bodyPr wrap="square" lIns="0" tIns="0" rIns="0" bIns="0" rtlCol="0" anchor="t"/>
+          <a:lstStyle/>
+          <a:p>
+            <a:pPr algn="ctr" indent="0" marL="0">
+              <a:buNone/>
+            </a:pPr>
+            <a:r>
+              <a:rPr lang="en-US" sz="700" i="1" dirty="0">
+                <a:solidFill>
+                  <a:srgbClr val="94A3B8"/>
+                </a:solidFill>
+                <a:latin typeface="Calibri" pitchFamily="34" charset="0"/>
+                <a:ea typeface="Calibri" pitchFamily="34" charset="-122"/>
+                <a:cs typeface="Calibri" pitchFamily="34" charset="-120"/>
+              </a:rPr>
+              <a:t>'y' changes to 'i' before suffix</a:t>
+            </a:r>
+            <a:endParaRPr lang="en-US" sz="700" dirty="0"/>
+          </a:p>
+        </p:txBody>
+      </p:sp>
+      <p:sp>
+        <p:nvSpPr>
+          <p:cNvPr id="23" name="Shape 21"/>
+          <p:cNvSpPr/>
+          <p:nvPr/>
+        </p:nvSpPr>
+        <p:spPr>
+          <a:xfrm>
+            <a:off x="6519672" y="2258568"/>
+            <a:ext cx="1828800" cy="292608"/>
+          </a:xfrm>
+          <a:prstGeom prst="rect">
+            <a:avLst>
+              <a:gd name="adj" fmla="val 25000"/>
+            </a:avLst>
+          </a:prstGeom>
+          <a:solidFill>
+            <a:srgbClr val="FCE7F3"/>
+          </a:solidFill>
+          <a:ln w="19050">
+            <a:solidFill>
+              <a:srgbClr val="DB2777"/>
+            </a:solidFill>
+            <a:prstDash val="solid"/>
+          </a:ln>
+          <a:effectLst>
+            <a:outerShdw sx="100000" sy="100000" kx="0" ky="0" algn="bl" rotWithShape="0" blurRad="101600" dist="38100" dir="8100000">
+              <a:srgbClr val="000000">
+                <a:alpha val="12000"/>
+              </a:srgbClr>
+            </a:outerShdw>
+          </a:effectLst>
+        </p:spPr>
+      </p:sp>
+      <p:sp>
+        <p:nvSpPr>
+          <p:cNvPr id="24" name="Text 22"/>
+          <p:cNvSpPr/>
+          <p:nvPr/>
+        </p:nvSpPr>
+        <p:spPr>
+          <a:xfrm>
+            <a:off x="6519672" y="2258568"/>
+            <a:ext cx="1828800" cy="292608"/>
+          </a:xfrm>
+          <a:prstGeom prst="rect">
+            <a:avLst/>
+          </a:prstGeom>
+          <a:noFill/>
+          <a:ln/>
+        </p:spPr>
+        <p:txBody>
+          <a:bodyPr wrap="square" lIns="0" tIns="0" rIns="0" bIns="0" rtlCol="0" anchor="ctr"/>
+          <a:lstStyle/>
+          <a:p>
+            <a:pPr algn="ctr" indent="0" marL="0">
+              <a:buNone/>
+            </a:pPr>
+            <a:r>
+              <a:rPr lang="en-US" sz="1300" b="1" dirty="0">
+                <a:solidFill>
+                  <a:srgbClr val="9D174D"/>
+                </a:solidFill>
+                <a:latin typeface="Trebuchet MS" pitchFamily="34" charset="0"/>
+                <a:ea typeface="Trebuchet MS" pitchFamily="34" charset="-122"/>
+                <a:cs typeface="Trebuchet MS" pitchFamily="34" charset="-120"/>
+              </a:rPr>
+              <a:t>ness</a:t>
+            </a:r>
+            <a:endParaRPr lang="en-US" sz="1300" dirty="0"/>
+          </a:p>
+        </p:txBody>
+      </p:sp>
+      <p:sp>
+        <p:nvSpPr>
+          <p:cNvPr id="25" name="Text 23"/>
+          <p:cNvSpPr/>
+          <p:nvPr/>
+        </p:nvSpPr>
+        <p:spPr>
+          <a:xfrm>
+            <a:off x="6519672" y="2569464"/>
+            <a:ext cx="1828800" cy="201168"/>
+          </a:xfrm>
+          <a:prstGeom prst="rect">
+            <a:avLst/>
+          </a:prstGeom>
+          <a:noFill/>
+          <a:ln/>
+        </p:spPr>
+        <p:txBody>
+          <a:bodyPr wrap="square" lIns="0" tIns="0" rIns="0" bIns="0" rtlCol="0" anchor="t"/>
+          <a:lstStyle/>
+          <a:p>
+            <a:pPr algn="ctr" indent="0" marL="0">
+              <a:buNone/>
+            </a:pPr>
+            <a:r>
+              <a:rPr lang="en-US" sz="850" dirty="0">
+                <a:solidFill>
+                  <a:srgbClr val="475569"/>
+                </a:solidFill>
+                <a:latin typeface="Calibri" pitchFamily="34" charset="0"/>
+                <a:ea typeface="Calibri" pitchFamily="34" charset="-122"/>
+                <a:cs typeface="Calibri" pitchFamily="34" charset="-120"/>
+              </a:rPr>
+              <a:t>quality or state of</a:t>
+            </a:r>
+            <a:endParaRPr lang="en-US" sz="850" dirty="0"/>
+          </a:p>
+        </p:txBody>
+      </p:sp>
+      <p:sp>
+        <p:nvSpPr>
+          <p:cNvPr id="26" name="Shape 24"/>
           <p:cNvSpPr/>
           <p:nvPr/>
         </p:nvSpPr>
@@ -25276,7 +26139,7 @@
       </p:sp>
       <p:sp>
         <p:nvSpPr>
-          <p:cNvPr id="23" name="Text 21"/>
+          <p:cNvPr id="27" name="Text 25"/>
           <p:cNvSpPr/>
           <p:nvPr/>
         </p:nvSpPr>
@@ -25315,7 +26178,7 @@
       </p:sp>
       <p:sp>
         <p:nvSpPr>
-          <p:cNvPr id="24" name="Shape 22"/>
+          <p:cNvPr id="28" name="Shape 26"/>
           <p:cNvSpPr/>
           <p:nvPr/>
         </p:nvSpPr>
@@ -25342,13 +26205,13 @@
       </p:sp>
       <p:sp>
         <p:nvSpPr>
-          <p:cNvPr id="25" name="Shape 23"/>
-          <p:cNvSpPr/>
-          <p:nvPr/>
-        </p:nvSpPr>
-        <p:spPr>
-          <a:xfrm>
-            <a:off x="2999232" y="3364992"/>
+          <p:cNvPr id="29" name="Shape 27"/>
+          <p:cNvSpPr/>
+          <p:nvPr/>
+        </p:nvSpPr>
+        <p:spPr>
+          <a:xfrm>
+            <a:off x="2313432" y="3364992"/>
             <a:ext cx="1645920" cy="475488"/>
           </a:xfrm>
           <a:prstGeom prst="rect">
@@ -25369,13 +26232,13 @@
       </p:sp>
       <p:sp>
         <p:nvSpPr>
-          <p:cNvPr id="26" name="Text 24"/>
-          <p:cNvSpPr/>
-          <p:nvPr/>
-        </p:nvSpPr>
-        <p:spPr>
-          <a:xfrm>
-            <a:off x="2999232" y="3364992"/>
+          <p:cNvPr id="30" name="Text 28"/>
+          <p:cNvSpPr/>
+          <p:nvPr/>
+        </p:nvSpPr>
+        <p:spPr>
+          <a:xfrm>
+            <a:off x="2313432" y="3364992"/>
             <a:ext cx="1645920" cy="475488"/>
           </a:xfrm>
           <a:prstGeom prst="rect">
@@ -25400,7 +26263,7 @@
                 <a:ea typeface="Trebuchet MS" pitchFamily="34" charset="-122"/>
                 <a:cs typeface="Trebuchet MS" pitchFamily="34" charset="-120"/>
               </a:rPr>
-              <a:t>be</a:t>
+              <a:t>friend</a:t>
             </a:r>
             <a:endParaRPr lang="en-US" sz="1400" dirty="0"/>
           </a:p>
@@ -25408,14 +26271,14 @@
       </p:sp>
       <p:sp>
         <p:nvSpPr>
-          <p:cNvPr id="27" name="Text 25"/>
-          <p:cNvSpPr/>
-          <p:nvPr/>
-        </p:nvSpPr>
-        <p:spPr>
-          <a:xfrm>
-            <a:off x="4645152" y="3364992"/>
-            <a:ext cx="1097280" cy="475488"/>
+          <p:cNvPr id="31" name="Text 29"/>
+          <p:cNvSpPr/>
+          <p:nvPr/>
+        </p:nvSpPr>
+        <p:spPr>
+          <a:xfrm>
+            <a:off x="3959352" y="3364992"/>
+            <a:ext cx="411480" cy="475488"/>
           </a:xfrm>
           <a:prstGeom prst="rect">
             <a:avLst/>
@@ -25447,13 +26310,13 @@
       </p:sp>
       <p:sp>
         <p:nvSpPr>
-          <p:cNvPr id="28" name="Shape 26"/>
-          <p:cNvSpPr/>
-          <p:nvPr/>
-        </p:nvSpPr>
-        <p:spPr>
-          <a:xfrm>
-            <a:off x="5742432" y="3364992"/>
+          <p:cNvPr id="32" name="Shape 30"/>
+          <p:cNvSpPr/>
+          <p:nvPr/>
+        </p:nvSpPr>
+        <p:spPr>
+          <a:xfrm>
+            <a:off x="4370832" y="3364992"/>
             <a:ext cx="1645920" cy="475488"/>
           </a:xfrm>
           <a:prstGeom prst="rect">
@@ -25474,13 +26337,13 @@
       </p:sp>
       <p:sp>
         <p:nvSpPr>
-          <p:cNvPr id="29" name="Text 27"/>
-          <p:cNvSpPr/>
-          <p:nvPr/>
-        </p:nvSpPr>
-        <p:spPr>
-          <a:xfrm>
-            <a:off x="5742432" y="3364992"/>
+          <p:cNvPr id="33" name="Text 31"/>
+          <p:cNvSpPr/>
+          <p:nvPr/>
+        </p:nvSpPr>
+        <p:spPr>
+          <a:xfrm>
+            <a:off x="4370832" y="3364992"/>
             <a:ext cx="1645920" cy="475488"/>
           </a:xfrm>
           <a:prstGeom prst="rect">
@@ -25505,7 +26368,7 @@
                 <a:ea typeface="Trebuchet MS" pitchFamily="34" charset="-122"/>
                 <a:cs typeface="Trebuchet MS" pitchFamily="34" charset="-120"/>
               </a:rPr>
-              <a:t>friend</a:t>
+              <a:t>li</a:t>
             </a:r>
             <a:endParaRPr lang="en-US" sz="1400" dirty="0"/>
           </a:p>
@@ -25513,7 +26376,112 @@
       </p:sp>
       <p:sp>
         <p:nvSpPr>
-          <p:cNvPr id="30" name="Shape 28"/>
+          <p:cNvPr id="34" name="Text 32"/>
+          <p:cNvSpPr/>
+          <p:nvPr/>
+        </p:nvSpPr>
+        <p:spPr>
+          <a:xfrm>
+            <a:off x="6016752" y="3364992"/>
+            <a:ext cx="411480" cy="475488"/>
+          </a:xfrm>
+          <a:prstGeom prst="rect">
+            <a:avLst/>
+          </a:prstGeom>
+          <a:noFill/>
+          <a:ln/>
+        </p:spPr>
+        <p:txBody>
+          <a:bodyPr wrap="square" lIns="0" tIns="0" rIns="0" bIns="0" rtlCol="0" anchor="ctr"/>
+          <a:lstStyle/>
+          <a:p>
+            <a:pPr algn="ctr" indent="0" marL="0">
+              <a:buNone/>
+            </a:pPr>
+            <a:r>
+              <a:rPr lang="en-US" sz="1600" b="1" dirty="0">
+                <a:solidFill>
+                  <a:srgbClr val="0D9488"/>
+                </a:solidFill>
+                <a:latin typeface="Trebuchet MS" pitchFamily="34" charset="0"/>
+                <a:ea typeface="Trebuchet MS" pitchFamily="34" charset="-122"/>
+                <a:cs typeface="Trebuchet MS" pitchFamily="34" charset="-120"/>
+              </a:rPr>
+              <a:t>·</a:t>
+            </a:r>
+            <a:endParaRPr lang="en-US" sz="1600" dirty="0"/>
+          </a:p>
+        </p:txBody>
+      </p:sp>
+      <p:sp>
+        <p:nvSpPr>
+          <p:cNvPr id="35" name="Shape 33"/>
+          <p:cNvSpPr/>
+          <p:nvPr/>
+        </p:nvSpPr>
+        <p:spPr>
+          <a:xfrm>
+            <a:off x="6428232" y="3364992"/>
+            <a:ext cx="1645920" cy="475488"/>
+          </a:xfrm>
+          <a:prstGeom prst="rect">
+            <a:avLst>
+              <a:gd name="adj" fmla="val 9615"/>
+            </a:avLst>
+          </a:prstGeom>
+          <a:solidFill>
+            <a:srgbClr val="FFFFFF"/>
+          </a:solidFill>
+          <a:ln w="12700">
+            <a:solidFill>
+              <a:srgbClr val="0D9488"/>
+            </a:solidFill>
+            <a:prstDash val="solid"/>
+          </a:ln>
+        </p:spPr>
+      </p:sp>
+      <p:sp>
+        <p:nvSpPr>
+          <p:cNvPr id="36" name="Text 34"/>
+          <p:cNvSpPr/>
+          <p:nvPr/>
+        </p:nvSpPr>
+        <p:spPr>
+          <a:xfrm>
+            <a:off x="6428232" y="3364992"/>
+            <a:ext cx="1645920" cy="475488"/>
+          </a:xfrm>
+          <a:prstGeom prst="rect">
+            <a:avLst/>
+          </a:prstGeom>
+          <a:noFill/>
+          <a:ln/>
+        </p:spPr>
+        <p:txBody>
+          <a:bodyPr wrap="square" lIns="0" tIns="0" rIns="0" bIns="0" rtlCol="0" anchor="ctr"/>
+          <a:lstStyle/>
+          <a:p>
+            <a:pPr algn="ctr" indent="0" marL="0">
+              <a:buNone/>
+            </a:pPr>
+            <a:r>
+              <a:rPr lang="en-US" sz="1400" b="1" dirty="0">
+                <a:solidFill>
+                  <a:srgbClr val="0D9488"/>
+                </a:solidFill>
+                <a:latin typeface="Trebuchet MS" pitchFamily="34" charset="0"/>
+                <a:ea typeface="Trebuchet MS" pitchFamily="34" charset="-122"/>
+                <a:cs typeface="Trebuchet MS" pitchFamily="34" charset="-120"/>
+              </a:rPr>
+              <a:t>ness</a:t>
+            </a:r>
+            <a:endParaRPr lang="en-US" sz="1400" dirty="0"/>
+          </a:p>
+        </p:txBody>
+      </p:sp>
+      <p:sp>
+        <p:nvSpPr>
+          <p:cNvPr id="37" name="Shape 35"/>
           <p:cNvSpPr/>
           <p:nvPr/>
         </p:nvSpPr>
@@ -25540,7 +26508,7 @@
       </p:sp>
       <p:sp>
         <p:nvSpPr>
-          <p:cNvPr id="31" name="Text 29"/>
+          <p:cNvPr id="38" name="Text 36"/>
           <p:cNvSpPr/>
           <p:nvPr/>
         </p:nvSpPr>
@@ -25579,7 +26547,7 @@
       </p:sp>
       <p:sp>
         <p:nvSpPr>
-          <p:cNvPr id="32" name="Shape 30"/>
+          <p:cNvPr id="39" name="Shape 37"/>
           <p:cNvSpPr/>
           <p:nvPr/>
         </p:nvSpPr>
@@ -25606,7 +26574,7 @@
       </p:sp>
       <p:sp>
         <p:nvSpPr>
-          <p:cNvPr id="33" name="Text 31"/>
+          <p:cNvPr id="40" name="Text 38"/>
           <p:cNvSpPr/>
           <p:nvPr/>
         </p:nvSpPr>
@@ -25929,7 +26897,7 @@
                 <a:ea typeface="Calibri" pitchFamily="34" charset="-122"/>
                 <a:cs typeface="Calibri" pitchFamily="34" charset="-120"/>
               </a:rPr>
-              <a:t>Word Labs  •  wordlabs.app  •  Root: 'friend' = person who is liked</a:t>
+              <a:t>Word Labs  •  wordlabs.app  •  Root: 'friend' = person one likes and trusts</a:t>
             </a:r>
             <a:endParaRPr lang="en-US" sz="800" dirty="0"/>
           </a:p>
@@ -26068,7 +27036,7 @@
                 <a:ea typeface="Trebuchet MS" pitchFamily="34" charset="-122"/>
                 <a:cs typeface="Trebuchet MS" pitchFamily="34" charset="-120"/>
               </a:rPr>
-              <a:t>befriend</a:t>
+              <a:t>friendliness</a:t>
             </a:r>
             <a:endParaRPr lang="en-US" sz="2800" dirty="0"/>
           </a:p>
@@ -26148,7 +27116,7 @@
         </p:nvSpPr>
         <p:spPr>
           <a:xfrm>
-            <a:off x="2938272" y="2258568"/>
+            <a:off x="2221992" y="2258568"/>
             <a:ext cx="1828800" cy="292608"/>
           </a:xfrm>
           <a:prstGeom prst="rect">
@@ -26157,11 +27125,11 @@
             </a:avLst>
           </a:prstGeom>
           <a:solidFill>
-            <a:srgbClr val="DDD6FE"/>
+            <a:srgbClr val="CCFBF1"/>
           </a:solidFill>
           <a:ln w="19050">
             <a:solidFill>
-              <a:srgbClr val="7C3AED"/>
+              <a:srgbClr val="0D9488"/>
             </a:solidFill>
             <a:prstDash val="solid"/>
           </a:ln>
@@ -26182,7 +27150,7 @@
         </p:nvSpPr>
         <p:spPr>
           <a:xfrm>
-            <a:off x="2938272" y="2258568"/>
+            <a:off x="2221992" y="2258568"/>
             <a:ext cx="1828800" cy="292608"/>
           </a:xfrm>
           <a:prstGeom prst="rect">
@@ -26201,13 +27169,13 @@
             <a:r>
               <a:rPr lang="en-US" sz="1300" b="1" dirty="0">
                 <a:solidFill>
-                  <a:srgbClr val="4C1D95"/>
+                  <a:srgbClr val="0F766E"/>
                 </a:solidFill>
                 <a:latin typeface="Trebuchet MS" pitchFamily="34" charset="0"/>
                 <a:ea typeface="Trebuchet MS" pitchFamily="34" charset="-122"/>
                 <a:cs typeface="Trebuchet MS" pitchFamily="34" charset="-120"/>
               </a:rPr>
-              <a:t>be</a:t>
+              <a:t>friend</a:t>
             </a:r>
             <a:endParaRPr lang="en-US" sz="1300" dirty="0"/>
           </a:p>
@@ -26221,7 +27189,7 @@
         </p:nvSpPr>
         <p:spPr>
           <a:xfrm>
-            <a:off x="2938272" y="2569464"/>
+            <a:off x="2221992" y="2569464"/>
             <a:ext cx="1828800" cy="201168"/>
           </a:xfrm>
           <a:prstGeom prst="rect">
@@ -26246,7 +27214,7 @@
                 <a:ea typeface="Calibri" pitchFamily="34" charset="-122"/>
                 <a:cs typeface="Calibri" pitchFamily="34" charset="-120"/>
               </a:rPr>
-              <a:t>to make or cause</a:t>
+              <a:t>person one likes and trusts</a:t>
             </a:r>
             <a:endParaRPr lang="en-US" sz="850" dirty="0"/>
           </a:p>
@@ -26260,7 +27228,7 @@
         </p:nvSpPr>
         <p:spPr>
           <a:xfrm>
-            <a:off x="5803392" y="2258568"/>
+            <a:off x="4370832" y="2258568"/>
             <a:ext cx="1828800" cy="292608"/>
           </a:xfrm>
           <a:prstGeom prst="rect">
@@ -26269,11 +27237,11 @@
             </a:avLst>
           </a:prstGeom>
           <a:solidFill>
-            <a:srgbClr val="CCFBF1"/>
+            <a:srgbClr val="FCE7F3"/>
           </a:solidFill>
           <a:ln w="19050">
             <a:solidFill>
-              <a:srgbClr val="0D9488"/>
+              <a:srgbClr val="DB2777"/>
             </a:solidFill>
             <a:prstDash val="solid"/>
           </a:ln>
@@ -26294,7 +27262,7 @@
         </p:nvSpPr>
         <p:spPr>
           <a:xfrm>
-            <a:off x="5803392" y="2258568"/>
+            <a:off x="4370832" y="2258568"/>
             <a:ext cx="1828800" cy="292608"/>
           </a:xfrm>
           <a:prstGeom prst="rect">
@@ -26313,13 +27281,13 @@
             <a:r>
               <a:rPr lang="en-US" sz="1300" b="1" dirty="0">
                 <a:solidFill>
-                  <a:srgbClr val="0F766E"/>
+                  <a:srgbClr val="9D174D"/>
                 </a:solidFill>
                 <a:latin typeface="Trebuchet MS" pitchFamily="34" charset="0"/>
                 <a:ea typeface="Trebuchet MS" pitchFamily="34" charset="-122"/>
                 <a:cs typeface="Trebuchet MS" pitchFamily="34" charset="-120"/>
               </a:rPr>
-              <a:t>friend</a:t>
+              <a:t>li</a:t>
             </a:r>
             <a:endParaRPr lang="en-US" sz="1300" dirty="0"/>
           </a:p>
@@ -26333,7 +27301,7 @@
         </p:nvSpPr>
         <p:spPr>
           <a:xfrm>
-            <a:off x="5803392" y="2569464"/>
+            <a:off x="4370832" y="2569464"/>
             <a:ext cx="1828800" cy="201168"/>
           </a:xfrm>
           <a:prstGeom prst="rect">
@@ -26358,7 +27326,7 @@
                 <a:ea typeface="Calibri" pitchFamily="34" charset="-122"/>
                 <a:cs typeface="Calibri" pitchFamily="34" charset="-120"/>
               </a:rPr>
-              <a:t>person who is liked</a:t>
+              <a:t>in a certain way</a:t>
             </a:r>
             <a:endParaRPr lang="en-US" sz="850" dirty="0"/>
           </a:p>
@@ -26366,7 +27334,158 @@
       </p:sp>
       <p:sp>
         <p:nvSpPr>
-          <p:cNvPr id="22" name="Shape 20"/>
+          <p:cNvPr id="22" name="Text 20"/>
+          <p:cNvSpPr/>
+          <p:nvPr/>
+        </p:nvSpPr>
+        <p:spPr>
+          <a:xfrm>
+            <a:off x="4370832" y="2752344"/>
+            <a:ext cx="1828800" cy="182880"/>
+          </a:xfrm>
+          <a:prstGeom prst="rect">
+            <a:avLst/>
+          </a:prstGeom>
+          <a:noFill/>
+          <a:ln/>
+        </p:spPr>
+        <p:txBody>
+          <a:bodyPr wrap="square" lIns="0" tIns="0" rIns="0" bIns="0" rtlCol="0" anchor="t"/>
+          <a:lstStyle/>
+          <a:p>
+            <a:pPr algn="ctr" indent="0" marL="0">
+              <a:buNone/>
+            </a:pPr>
+            <a:r>
+              <a:rPr lang="en-US" sz="700" i="1" dirty="0">
+                <a:solidFill>
+                  <a:srgbClr val="94A3B8"/>
+                </a:solidFill>
+                <a:latin typeface="Calibri" pitchFamily="34" charset="0"/>
+                <a:ea typeface="Calibri" pitchFamily="34" charset="-122"/>
+                <a:cs typeface="Calibri" pitchFamily="34" charset="-120"/>
+              </a:rPr>
+              <a:t>'y' changes to 'i' before suffix</a:t>
+            </a:r>
+            <a:endParaRPr lang="en-US" sz="700" dirty="0"/>
+          </a:p>
+        </p:txBody>
+      </p:sp>
+      <p:sp>
+        <p:nvSpPr>
+          <p:cNvPr id="23" name="Shape 21"/>
+          <p:cNvSpPr/>
+          <p:nvPr/>
+        </p:nvSpPr>
+        <p:spPr>
+          <a:xfrm>
+            <a:off x="6519672" y="2258568"/>
+            <a:ext cx="1828800" cy="292608"/>
+          </a:xfrm>
+          <a:prstGeom prst="rect">
+            <a:avLst>
+              <a:gd name="adj" fmla="val 25000"/>
+            </a:avLst>
+          </a:prstGeom>
+          <a:solidFill>
+            <a:srgbClr val="FCE7F3"/>
+          </a:solidFill>
+          <a:ln w="19050">
+            <a:solidFill>
+              <a:srgbClr val="DB2777"/>
+            </a:solidFill>
+            <a:prstDash val="solid"/>
+          </a:ln>
+          <a:effectLst>
+            <a:outerShdw sx="100000" sy="100000" kx="0" ky="0" algn="bl" rotWithShape="0" blurRad="101600" dist="38100" dir="8100000">
+              <a:srgbClr val="000000">
+                <a:alpha val="12000"/>
+              </a:srgbClr>
+            </a:outerShdw>
+          </a:effectLst>
+        </p:spPr>
+      </p:sp>
+      <p:sp>
+        <p:nvSpPr>
+          <p:cNvPr id="24" name="Text 22"/>
+          <p:cNvSpPr/>
+          <p:nvPr/>
+        </p:nvSpPr>
+        <p:spPr>
+          <a:xfrm>
+            <a:off x="6519672" y="2258568"/>
+            <a:ext cx="1828800" cy="292608"/>
+          </a:xfrm>
+          <a:prstGeom prst="rect">
+            <a:avLst/>
+          </a:prstGeom>
+          <a:noFill/>
+          <a:ln/>
+        </p:spPr>
+        <p:txBody>
+          <a:bodyPr wrap="square" lIns="0" tIns="0" rIns="0" bIns="0" rtlCol="0" anchor="ctr"/>
+          <a:lstStyle/>
+          <a:p>
+            <a:pPr algn="ctr" indent="0" marL="0">
+              <a:buNone/>
+            </a:pPr>
+            <a:r>
+              <a:rPr lang="en-US" sz="1300" b="1" dirty="0">
+                <a:solidFill>
+                  <a:srgbClr val="9D174D"/>
+                </a:solidFill>
+                <a:latin typeface="Trebuchet MS" pitchFamily="34" charset="0"/>
+                <a:ea typeface="Trebuchet MS" pitchFamily="34" charset="-122"/>
+                <a:cs typeface="Trebuchet MS" pitchFamily="34" charset="-120"/>
+              </a:rPr>
+              <a:t>ness</a:t>
+            </a:r>
+            <a:endParaRPr lang="en-US" sz="1300" dirty="0"/>
+          </a:p>
+        </p:txBody>
+      </p:sp>
+      <p:sp>
+        <p:nvSpPr>
+          <p:cNvPr id="25" name="Text 23"/>
+          <p:cNvSpPr/>
+          <p:nvPr/>
+        </p:nvSpPr>
+        <p:spPr>
+          <a:xfrm>
+            <a:off x="6519672" y="2569464"/>
+            <a:ext cx="1828800" cy="201168"/>
+          </a:xfrm>
+          <a:prstGeom prst="rect">
+            <a:avLst/>
+          </a:prstGeom>
+          <a:noFill/>
+          <a:ln/>
+        </p:spPr>
+        <p:txBody>
+          <a:bodyPr wrap="square" lIns="0" tIns="0" rIns="0" bIns="0" rtlCol="0" anchor="t"/>
+          <a:lstStyle/>
+          <a:p>
+            <a:pPr algn="ctr" indent="0" marL="0">
+              <a:buNone/>
+            </a:pPr>
+            <a:r>
+              <a:rPr lang="en-US" sz="850" dirty="0">
+                <a:solidFill>
+                  <a:srgbClr val="475569"/>
+                </a:solidFill>
+                <a:latin typeface="Calibri" pitchFamily="34" charset="0"/>
+                <a:ea typeface="Calibri" pitchFamily="34" charset="-122"/>
+                <a:cs typeface="Calibri" pitchFamily="34" charset="-120"/>
+              </a:rPr>
+              <a:t>quality or state of</a:t>
+            </a:r>
+            <a:endParaRPr lang="en-US" sz="850" dirty="0"/>
+          </a:p>
+        </p:txBody>
+      </p:sp>
+      <p:sp>
+        <p:nvSpPr>
+          <p:cNvPr id="26" name="Shape 24"/>
           <p:cNvSpPr/>
           <p:nvPr/>
         </p:nvSpPr>
@@ -26393,7 +27512,7 @@
       </p:sp>
       <p:sp>
         <p:nvSpPr>
-          <p:cNvPr id="23" name="Text 21"/>
+          <p:cNvPr id="27" name="Text 25"/>
           <p:cNvSpPr/>
           <p:nvPr/>
         </p:nvSpPr>
@@ -26432,7 +27551,7 @@
       </p:sp>
       <p:sp>
         <p:nvSpPr>
-          <p:cNvPr id="24" name="Shape 22"/>
+          <p:cNvPr id="28" name="Shape 26"/>
           <p:cNvSpPr/>
           <p:nvPr/>
         </p:nvSpPr>
@@ -26459,13 +27578,13 @@
       </p:sp>
       <p:sp>
         <p:nvSpPr>
-          <p:cNvPr id="25" name="Shape 23"/>
-          <p:cNvSpPr/>
-          <p:nvPr/>
-        </p:nvSpPr>
-        <p:spPr>
-          <a:xfrm>
-            <a:off x="2999232" y="3364992"/>
+          <p:cNvPr id="29" name="Shape 27"/>
+          <p:cNvSpPr/>
+          <p:nvPr/>
+        </p:nvSpPr>
+        <p:spPr>
+          <a:xfrm>
+            <a:off x="2313432" y="3364992"/>
             <a:ext cx="1645920" cy="475488"/>
           </a:xfrm>
           <a:prstGeom prst="rect">
@@ -26486,13 +27605,13 @@
       </p:sp>
       <p:sp>
         <p:nvSpPr>
-          <p:cNvPr id="26" name="Text 24"/>
-          <p:cNvSpPr/>
-          <p:nvPr/>
-        </p:nvSpPr>
-        <p:spPr>
-          <a:xfrm>
-            <a:off x="2999232" y="3364992"/>
+          <p:cNvPr id="30" name="Text 28"/>
+          <p:cNvSpPr/>
+          <p:nvPr/>
+        </p:nvSpPr>
+        <p:spPr>
+          <a:xfrm>
+            <a:off x="2313432" y="3364992"/>
             <a:ext cx="1645920" cy="475488"/>
           </a:xfrm>
           <a:prstGeom prst="rect">
@@ -26517,7 +27636,7 @@
                 <a:ea typeface="Trebuchet MS" pitchFamily="34" charset="-122"/>
                 <a:cs typeface="Trebuchet MS" pitchFamily="34" charset="-120"/>
               </a:rPr>
-              <a:t>be</a:t>
+              <a:t>friend</a:t>
             </a:r>
             <a:endParaRPr lang="en-US" sz="1400" dirty="0"/>
           </a:p>
@@ -26525,14 +27644,14 @@
       </p:sp>
       <p:sp>
         <p:nvSpPr>
-          <p:cNvPr id="27" name="Text 25"/>
-          <p:cNvSpPr/>
-          <p:nvPr/>
-        </p:nvSpPr>
-        <p:spPr>
-          <a:xfrm>
-            <a:off x="4645152" y="3364992"/>
-            <a:ext cx="1097280" cy="475488"/>
+          <p:cNvPr id="31" name="Text 29"/>
+          <p:cNvSpPr/>
+          <p:nvPr/>
+        </p:nvSpPr>
+        <p:spPr>
+          <a:xfrm>
+            <a:off x="3959352" y="3364992"/>
+            <a:ext cx="411480" cy="475488"/>
           </a:xfrm>
           <a:prstGeom prst="rect">
             <a:avLst/>
@@ -26564,13 +27683,13 @@
       </p:sp>
       <p:sp>
         <p:nvSpPr>
-          <p:cNvPr id="28" name="Shape 26"/>
-          <p:cNvSpPr/>
-          <p:nvPr/>
-        </p:nvSpPr>
-        <p:spPr>
-          <a:xfrm>
-            <a:off x="5742432" y="3364992"/>
+          <p:cNvPr id="32" name="Shape 30"/>
+          <p:cNvSpPr/>
+          <p:nvPr/>
+        </p:nvSpPr>
+        <p:spPr>
+          <a:xfrm>
+            <a:off x="4370832" y="3364992"/>
             <a:ext cx="1645920" cy="475488"/>
           </a:xfrm>
           <a:prstGeom prst="rect">
@@ -26591,13 +27710,13 @@
       </p:sp>
       <p:sp>
         <p:nvSpPr>
-          <p:cNvPr id="29" name="Text 27"/>
-          <p:cNvSpPr/>
-          <p:nvPr/>
-        </p:nvSpPr>
-        <p:spPr>
-          <a:xfrm>
-            <a:off x="5742432" y="3364992"/>
+          <p:cNvPr id="33" name="Text 31"/>
+          <p:cNvSpPr/>
+          <p:nvPr/>
+        </p:nvSpPr>
+        <p:spPr>
+          <a:xfrm>
+            <a:off x="4370832" y="3364992"/>
             <a:ext cx="1645920" cy="475488"/>
           </a:xfrm>
           <a:prstGeom prst="rect">
@@ -26622,7 +27741,7 @@
                 <a:ea typeface="Trebuchet MS" pitchFamily="34" charset="-122"/>
                 <a:cs typeface="Trebuchet MS" pitchFamily="34" charset="-120"/>
               </a:rPr>
-              <a:t>friend</a:t>
+              <a:t>li</a:t>
             </a:r>
             <a:endParaRPr lang="en-US" sz="1400" dirty="0"/>
           </a:p>
@@ -26630,7 +27749,112 @@
       </p:sp>
       <p:sp>
         <p:nvSpPr>
-          <p:cNvPr id="30" name="Shape 28"/>
+          <p:cNvPr id="34" name="Text 32"/>
+          <p:cNvSpPr/>
+          <p:nvPr/>
+        </p:nvSpPr>
+        <p:spPr>
+          <a:xfrm>
+            <a:off x="6016752" y="3364992"/>
+            <a:ext cx="411480" cy="475488"/>
+          </a:xfrm>
+          <a:prstGeom prst="rect">
+            <a:avLst/>
+          </a:prstGeom>
+          <a:noFill/>
+          <a:ln/>
+        </p:spPr>
+        <p:txBody>
+          <a:bodyPr wrap="square" lIns="0" tIns="0" rIns="0" bIns="0" rtlCol="0" anchor="ctr"/>
+          <a:lstStyle/>
+          <a:p>
+            <a:pPr algn="ctr" indent="0" marL="0">
+              <a:buNone/>
+            </a:pPr>
+            <a:r>
+              <a:rPr lang="en-US" sz="1600" b="1" dirty="0">
+                <a:solidFill>
+                  <a:srgbClr val="0D9488"/>
+                </a:solidFill>
+                <a:latin typeface="Trebuchet MS" pitchFamily="34" charset="0"/>
+                <a:ea typeface="Trebuchet MS" pitchFamily="34" charset="-122"/>
+                <a:cs typeface="Trebuchet MS" pitchFamily="34" charset="-120"/>
+              </a:rPr>
+              <a:t>·</a:t>
+            </a:r>
+            <a:endParaRPr lang="en-US" sz="1600" dirty="0"/>
+          </a:p>
+        </p:txBody>
+      </p:sp>
+      <p:sp>
+        <p:nvSpPr>
+          <p:cNvPr id="35" name="Shape 33"/>
+          <p:cNvSpPr/>
+          <p:nvPr/>
+        </p:nvSpPr>
+        <p:spPr>
+          <a:xfrm>
+            <a:off x="6428232" y="3364992"/>
+            <a:ext cx="1645920" cy="475488"/>
+          </a:xfrm>
+          <a:prstGeom prst="rect">
+            <a:avLst>
+              <a:gd name="adj" fmla="val 9615"/>
+            </a:avLst>
+          </a:prstGeom>
+          <a:solidFill>
+            <a:srgbClr val="FFFFFF"/>
+          </a:solidFill>
+          <a:ln w="12700">
+            <a:solidFill>
+              <a:srgbClr val="0D9488"/>
+            </a:solidFill>
+            <a:prstDash val="solid"/>
+          </a:ln>
+        </p:spPr>
+      </p:sp>
+      <p:sp>
+        <p:nvSpPr>
+          <p:cNvPr id="36" name="Text 34"/>
+          <p:cNvSpPr/>
+          <p:nvPr/>
+        </p:nvSpPr>
+        <p:spPr>
+          <a:xfrm>
+            <a:off x="6428232" y="3364992"/>
+            <a:ext cx="1645920" cy="475488"/>
+          </a:xfrm>
+          <a:prstGeom prst="rect">
+            <a:avLst/>
+          </a:prstGeom>
+          <a:noFill/>
+          <a:ln/>
+        </p:spPr>
+        <p:txBody>
+          <a:bodyPr wrap="square" lIns="0" tIns="0" rIns="0" bIns="0" rtlCol="0" anchor="ctr"/>
+          <a:lstStyle/>
+          <a:p>
+            <a:pPr algn="ctr" indent="0" marL="0">
+              <a:buNone/>
+            </a:pPr>
+            <a:r>
+              <a:rPr lang="en-US" sz="1400" b="1" dirty="0">
+                <a:solidFill>
+                  <a:srgbClr val="0D9488"/>
+                </a:solidFill>
+                <a:latin typeface="Trebuchet MS" pitchFamily="34" charset="0"/>
+                <a:ea typeface="Trebuchet MS" pitchFamily="34" charset="-122"/>
+                <a:cs typeface="Trebuchet MS" pitchFamily="34" charset="-120"/>
+              </a:rPr>
+              <a:t>ness</a:t>
+            </a:r>
+            <a:endParaRPr lang="en-US" sz="1400" dirty="0"/>
+          </a:p>
+        </p:txBody>
+      </p:sp>
+      <p:sp>
+        <p:nvSpPr>
+          <p:cNvPr id="37" name="Shape 35"/>
           <p:cNvSpPr/>
           <p:nvPr/>
         </p:nvSpPr>
@@ -26657,7 +27881,7 @@
       </p:sp>
       <p:sp>
         <p:nvSpPr>
-          <p:cNvPr id="31" name="Text 29"/>
+          <p:cNvPr id="38" name="Text 36"/>
           <p:cNvSpPr/>
           <p:nvPr/>
         </p:nvSpPr>
@@ -26696,18 +27920,18 @@
       </p:sp>
       <p:sp>
         <p:nvSpPr>
-          <p:cNvPr id="32" name="Shape 30"/>
+          <p:cNvPr id="39" name="Shape 37"/>
           <p:cNvSpPr/>
           <p:nvPr/>
         </p:nvSpPr>
         <p:spPr>
           <a:xfrm>
             <a:off x="1874520" y="4096512"/>
-            <a:ext cx="6903720" cy="804672"/>
+            <a:ext cx="6903720" cy="658368"/>
           </a:xfrm>
           <a:prstGeom prst="rect">
             <a:avLst>
-              <a:gd name="adj" fmla="val 6818"/>
+              <a:gd name="adj" fmla="val 8333"/>
             </a:avLst>
           </a:prstGeom>
           <a:solidFill>
@@ -26723,18 +27947,18 @@
       </p:sp>
       <p:sp>
         <p:nvSpPr>
-          <p:cNvPr id="33" name="Shape 31"/>
-          <p:cNvSpPr/>
-          <p:nvPr/>
-        </p:nvSpPr>
-        <p:spPr>
-          <a:xfrm>
-            <a:off x="2254649" y="4169664"/>
-            <a:ext cx="685800" cy="384048"/>
+          <p:cNvPr id="40" name="Shape 38"/>
+          <p:cNvSpPr/>
+          <p:nvPr/>
+        </p:nvSpPr>
+        <p:spPr>
+          <a:xfrm>
+            <a:off x="1951330" y="4169664"/>
+            <a:ext cx="676656" cy="475488"/>
           </a:xfrm>
           <a:prstGeom prst="rect">
             <a:avLst>
-              <a:gd name="adj" fmla="val 9524"/>
+              <a:gd name="adj" fmla="val 7692"/>
             </a:avLst>
           </a:prstGeom>
           <a:solidFill>
@@ -26750,14 +27974,14 @@
       </p:sp>
       <p:sp>
         <p:nvSpPr>
-          <p:cNvPr id="34" name="Text 32"/>
-          <p:cNvSpPr/>
-          <p:nvPr/>
-        </p:nvSpPr>
-        <p:spPr>
-          <a:xfrm>
-            <a:off x="2254649" y="4169664"/>
-            <a:ext cx="685800" cy="384048"/>
+          <p:cNvPr id="41" name="Text 39"/>
+          <p:cNvSpPr/>
+          <p:nvPr/>
+        </p:nvSpPr>
+        <p:spPr>
+          <a:xfrm>
+            <a:off x="1951330" y="4169664"/>
+            <a:ext cx="676656" cy="475488"/>
           </a:xfrm>
           <a:prstGeom prst="rect">
             <a:avLst/>
@@ -26781,7 +28005,7 @@
                 <a:ea typeface="Trebuchet MS" pitchFamily="34" charset="-122"/>
                 <a:cs typeface="Trebuchet MS" pitchFamily="34" charset="-120"/>
               </a:rPr>
-              <a:t>b</a:t>
+              <a:t>fr</a:t>
             </a:r>
             <a:endParaRPr lang="en-US" sz="900" dirty="0"/>
           </a:p>
@@ -26789,18 +28013,18 @@
       </p:sp>
       <p:sp>
         <p:nvSpPr>
-          <p:cNvPr id="35" name="Shape 33"/>
-          <p:cNvSpPr/>
-          <p:nvPr/>
-        </p:nvSpPr>
-        <p:spPr>
-          <a:xfrm>
-            <a:off x="3293146" y="4169664"/>
-            <a:ext cx="685800" cy="384048"/>
+          <p:cNvPr id="42" name="Shape 40"/>
+          <p:cNvSpPr/>
+          <p:nvPr/>
+        </p:nvSpPr>
+        <p:spPr>
+          <a:xfrm>
+            <a:off x="2677363" y="4169664"/>
+            <a:ext cx="676656" cy="475488"/>
           </a:xfrm>
           <a:prstGeom prst="rect">
             <a:avLst>
-              <a:gd name="adj" fmla="val 9524"/>
+              <a:gd name="adj" fmla="val 7692"/>
             </a:avLst>
           </a:prstGeom>
           <a:solidFill>
@@ -26816,14 +28040,14 @@
       </p:sp>
       <p:sp>
         <p:nvSpPr>
-          <p:cNvPr id="36" name="Text 34"/>
-          <p:cNvSpPr/>
-          <p:nvPr/>
-        </p:nvSpPr>
-        <p:spPr>
-          <a:xfrm>
-            <a:off x="3293146" y="4169664"/>
-            <a:ext cx="685800" cy="384048"/>
+          <p:cNvPr id="43" name="Text 41"/>
+          <p:cNvSpPr/>
+          <p:nvPr/>
+        </p:nvSpPr>
+        <p:spPr>
+          <a:xfrm>
+            <a:off x="2677363" y="4169664"/>
+            <a:ext cx="676656" cy="475488"/>
           </a:xfrm>
           <a:prstGeom prst="rect">
             <a:avLst/>
@@ -26847,7 +28071,7 @@
                 <a:ea typeface="Trebuchet MS" pitchFamily="34" charset="-122"/>
                 <a:cs typeface="Trebuchet MS" pitchFamily="34" charset="-120"/>
               </a:rPr>
-              <a:t>e</a:t>
+              <a:t>ie</a:t>
             </a:r>
             <a:endParaRPr lang="en-US" sz="900" dirty="0"/>
           </a:p>
@@ -26855,18 +28079,18 @@
       </p:sp>
       <p:sp>
         <p:nvSpPr>
-          <p:cNvPr id="37" name="Shape 35"/>
-          <p:cNvSpPr/>
-          <p:nvPr/>
-        </p:nvSpPr>
-        <p:spPr>
-          <a:xfrm>
-            <a:off x="4331643" y="4169664"/>
-            <a:ext cx="685800" cy="384048"/>
+          <p:cNvPr id="44" name="Shape 42"/>
+          <p:cNvSpPr/>
+          <p:nvPr/>
+        </p:nvSpPr>
+        <p:spPr>
+          <a:xfrm>
+            <a:off x="3403397" y="4169664"/>
+            <a:ext cx="676656" cy="475488"/>
           </a:xfrm>
           <a:prstGeom prst="rect">
             <a:avLst>
-              <a:gd name="adj" fmla="val 9524"/>
+              <a:gd name="adj" fmla="val 7692"/>
             </a:avLst>
           </a:prstGeom>
           <a:solidFill>
@@ -26882,14 +28106,14 @@
       </p:sp>
       <p:sp>
         <p:nvSpPr>
-          <p:cNvPr id="38" name="Text 36"/>
-          <p:cNvSpPr/>
-          <p:nvPr/>
-        </p:nvSpPr>
-        <p:spPr>
-          <a:xfrm>
-            <a:off x="4331643" y="4169664"/>
-            <a:ext cx="685800" cy="384048"/>
+          <p:cNvPr id="45" name="Text 43"/>
+          <p:cNvSpPr/>
+          <p:nvPr/>
+        </p:nvSpPr>
+        <p:spPr>
+          <a:xfrm>
+            <a:off x="3403397" y="4169664"/>
+            <a:ext cx="676656" cy="475488"/>
           </a:xfrm>
           <a:prstGeom prst="rect">
             <a:avLst/>
@@ -26913,7 +28137,7 @@
                 <a:ea typeface="Trebuchet MS" pitchFamily="34" charset="-122"/>
                 <a:cs typeface="Trebuchet MS" pitchFamily="34" charset="-120"/>
               </a:rPr>
-              <a:t>fr</a:t>
+              <a:t>n</a:t>
             </a:r>
             <a:endParaRPr lang="en-US" sz="900" dirty="0"/>
           </a:p>
@@ -26921,18 +28145,18 @@
       </p:sp>
       <p:sp>
         <p:nvSpPr>
-          <p:cNvPr id="39" name="Shape 37"/>
-          <p:cNvSpPr/>
-          <p:nvPr/>
-        </p:nvSpPr>
-        <p:spPr>
-          <a:xfrm>
-            <a:off x="5370141" y="4169664"/>
-            <a:ext cx="685800" cy="384048"/>
+          <p:cNvPr id="46" name="Shape 44"/>
+          <p:cNvSpPr/>
+          <p:nvPr/>
+        </p:nvSpPr>
+        <p:spPr>
+          <a:xfrm>
+            <a:off x="4129430" y="4169664"/>
+            <a:ext cx="676656" cy="475488"/>
           </a:xfrm>
           <a:prstGeom prst="rect">
             <a:avLst>
-              <a:gd name="adj" fmla="val 9524"/>
+              <a:gd name="adj" fmla="val 7692"/>
             </a:avLst>
           </a:prstGeom>
           <a:solidFill>
@@ -26948,14 +28172,14 @@
       </p:sp>
       <p:sp>
         <p:nvSpPr>
-          <p:cNvPr id="40" name="Text 38"/>
-          <p:cNvSpPr/>
-          <p:nvPr/>
-        </p:nvSpPr>
-        <p:spPr>
-          <a:xfrm>
-            <a:off x="5370141" y="4169664"/>
-            <a:ext cx="685800" cy="384048"/>
+          <p:cNvPr id="47" name="Text 45"/>
+          <p:cNvSpPr/>
+          <p:nvPr/>
+        </p:nvSpPr>
+        <p:spPr>
+          <a:xfrm>
+            <a:off x="4129430" y="4169664"/>
+            <a:ext cx="676656" cy="475488"/>
           </a:xfrm>
           <a:prstGeom prst="rect">
             <a:avLst/>
@@ -26979,7 +28203,7 @@
                 <a:ea typeface="Trebuchet MS" pitchFamily="34" charset="-122"/>
                 <a:cs typeface="Trebuchet MS" pitchFamily="34" charset="-120"/>
               </a:rPr>
-              <a:t>ie</a:t>
+              <a:t>d</a:t>
             </a:r>
             <a:endParaRPr lang="en-US" sz="900" dirty="0"/>
           </a:p>
@@ -26987,57 +28211,18 @@
       </p:sp>
       <p:sp>
         <p:nvSpPr>
-          <p:cNvPr id="41" name="Text 39"/>
-          <p:cNvSpPr/>
-          <p:nvPr/>
-        </p:nvSpPr>
-        <p:spPr>
-          <a:xfrm>
-            <a:off x="5370141" y="4572000"/>
-            <a:ext cx="685800" cy="219456"/>
-          </a:xfrm>
-          <a:prstGeom prst="rect">
-            <a:avLst/>
-          </a:prstGeom>
-          <a:noFill/>
-          <a:ln/>
-        </p:spPr>
-        <p:txBody>
-          <a:bodyPr wrap="square" lIns="0" tIns="0" rIns="0" bIns="0" rtlCol="0" anchor="t"/>
-          <a:lstStyle/>
-          <a:p>
-            <a:pPr algn="ctr" indent="0" marL="0">
-              <a:buNone/>
-            </a:pPr>
-            <a:r>
-              <a:rPr lang="en-US" sz="750" i="1" dirty="0">
-                <a:solidFill>
-                  <a:srgbClr val="94A3B8"/>
-                </a:solidFill>
-                <a:latin typeface="Calibri" pitchFamily="34" charset="0"/>
-                <a:ea typeface="Calibri" pitchFamily="34" charset="-122"/>
-                <a:cs typeface="Calibri" pitchFamily="34" charset="-120"/>
-              </a:rPr>
-              <a:t>/e/</a:t>
-            </a:r>
-            <a:endParaRPr lang="en-US" sz="750" dirty="0"/>
-          </a:p>
-        </p:txBody>
-      </p:sp>
-      <p:sp>
-        <p:nvSpPr>
-          <p:cNvPr id="42" name="Shape 40"/>
-          <p:cNvSpPr/>
-          <p:nvPr/>
-        </p:nvSpPr>
-        <p:spPr>
-          <a:xfrm>
-            <a:off x="6408638" y="4169664"/>
-            <a:ext cx="685800" cy="384048"/>
+          <p:cNvPr id="48" name="Shape 46"/>
+          <p:cNvSpPr/>
+          <p:nvPr/>
+        </p:nvSpPr>
+        <p:spPr>
+          <a:xfrm>
+            <a:off x="4855464" y="4169664"/>
+            <a:ext cx="676656" cy="475488"/>
           </a:xfrm>
           <a:prstGeom prst="rect">
             <a:avLst>
-              <a:gd name="adj" fmla="val 9524"/>
+              <a:gd name="adj" fmla="val 7692"/>
             </a:avLst>
           </a:prstGeom>
           <a:solidFill>
@@ -27053,14 +28238,14 @@
       </p:sp>
       <p:sp>
         <p:nvSpPr>
-          <p:cNvPr id="43" name="Text 41"/>
-          <p:cNvSpPr/>
-          <p:nvPr/>
-        </p:nvSpPr>
-        <p:spPr>
-          <a:xfrm>
-            <a:off x="6408638" y="4169664"/>
-            <a:ext cx="685800" cy="384048"/>
+          <p:cNvPr id="49" name="Text 47"/>
+          <p:cNvSpPr/>
+          <p:nvPr/>
+        </p:nvSpPr>
+        <p:spPr>
+          <a:xfrm>
+            <a:off x="4855464" y="4169664"/>
+            <a:ext cx="676656" cy="475488"/>
           </a:xfrm>
           <a:prstGeom prst="rect">
             <a:avLst/>
@@ -27084,7 +28269,7 @@
                 <a:ea typeface="Trebuchet MS" pitchFamily="34" charset="-122"/>
                 <a:cs typeface="Trebuchet MS" pitchFamily="34" charset="-120"/>
               </a:rPr>
-              <a:t>n</a:t>
+              <a:t>l</a:t>
             </a:r>
             <a:endParaRPr lang="en-US" sz="900" dirty="0"/>
           </a:p>
@@ -27092,18 +28277,18 @@
       </p:sp>
       <p:sp>
         <p:nvSpPr>
-          <p:cNvPr id="44" name="Shape 42"/>
-          <p:cNvSpPr/>
-          <p:nvPr/>
-        </p:nvSpPr>
-        <p:spPr>
-          <a:xfrm>
-            <a:off x="7447135" y="4169664"/>
-            <a:ext cx="685800" cy="384048"/>
+          <p:cNvPr id="50" name="Shape 48"/>
+          <p:cNvSpPr/>
+          <p:nvPr/>
+        </p:nvSpPr>
+        <p:spPr>
+          <a:xfrm>
+            <a:off x="5581498" y="4169664"/>
+            <a:ext cx="676656" cy="475488"/>
           </a:xfrm>
           <a:prstGeom prst="rect">
             <a:avLst>
-              <a:gd name="adj" fmla="val 9524"/>
+              <a:gd name="adj" fmla="val 7692"/>
             </a:avLst>
           </a:prstGeom>
           <a:solidFill>
@@ -27119,14 +28304,14 @@
       </p:sp>
       <p:sp>
         <p:nvSpPr>
-          <p:cNvPr id="45" name="Text 43"/>
-          <p:cNvSpPr/>
-          <p:nvPr/>
-        </p:nvSpPr>
-        <p:spPr>
-          <a:xfrm>
-            <a:off x="7447135" y="4169664"/>
-            <a:ext cx="685800" cy="384048"/>
+          <p:cNvPr id="51" name="Text 49"/>
+          <p:cNvSpPr/>
+          <p:nvPr/>
+        </p:nvSpPr>
+        <p:spPr>
+          <a:xfrm>
+            <a:off x="5581498" y="4169664"/>
+            <a:ext cx="676656" cy="475488"/>
           </a:xfrm>
           <a:prstGeom prst="rect">
             <a:avLst/>
@@ -27150,7 +28335,205 @@
                 <a:ea typeface="Trebuchet MS" pitchFamily="34" charset="-122"/>
                 <a:cs typeface="Trebuchet MS" pitchFamily="34" charset="-120"/>
               </a:rPr>
-              <a:t>d</a:t>
+              <a:t>i</a:t>
+            </a:r>
+            <a:endParaRPr lang="en-US" sz="900" dirty="0"/>
+          </a:p>
+        </p:txBody>
+      </p:sp>
+      <p:sp>
+        <p:nvSpPr>
+          <p:cNvPr id="52" name="Shape 50"/>
+          <p:cNvSpPr/>
+          <p:nvPr/>
+        </p:nvSpPr>
+        <p:spPr>
+          <a:xfrm>
+            <a:off x="6307531" y="4169664"/>
+            <a:ext cx="676656" cy="475488"/>
+          </a:xfrm>
+          <a:prstGeom prst="rect">
+            <a:avLst>
+              <a:gd name="adj" fmla="val 7692"/>
+            </a:avLst>
+          </a:prstGeom>
+          <a:solidFill>
+            <a:srgbClr val="FFFFFF"/>
+          </a:solidFill>
+          <a:ln w="12700">
+            <a:solidFill>
+              <a:srgbClr val="DB2777"/>
+            </a:solidFill>
+            <a:prstDash val="solid"/>
+          </a:ln>
+        </p:spPr>
+      </p:sp>
+      <p:sp>
+        <p:nvSpPr>
+          <p:cNvPr id="53" name="Text 51"/>
+          <p:cNvSpPr/>
+          <p:nvPr/>
+        </p:nvSpPr>
+        <p:spPr>
+          <a:xfrm>
+            <a:off x="6307531" y="4169664"/>
+            <a:ext cx="676656" cy="475488"/>
+          </a:xfrm>
+          <a:prstGeom prst="rect">
+            <a:avLst/>
+          </a:prstGeom>
+          <a:noFill/>
+          <a:ln/>
+        </p:spPr>
+        <p:txBody>
+          <a:bodyPr wrap="square" lIns="0" tIns="0" rIns="0" bIns="0" rtlCol="0" anchor="ctr"/>
+          <a:lstStyle/>
+          <a:p>
+            <a:pPr algn="ctr" indent="0" marL="0">
+              <a:buNone/>
+            </a:pPr>
+            <a:r>
+              <a:rPr lang="en-US" sz="900" b="1" dirty="0">
+                <a:solidFill>
+                  <a:srgbClr val="9D174D"/>
+                </a:solidFill>
+                <a:latin typeface="Trebuchet MS" pitchFamily="34" charset="0"/>
+                <a:ea typeface="Trebuchet MS" pitchFamily="34" charset="-122"/>
+                <a:cs typeface="Trebuchet MS" pitchFamily="34" charset="-120"/>
+              </a:rPr>
+              <a:t>n</a:t>
+            </a:r>
+            <a:endParaRPr lang="en-US" sz="900" dirty="0"/>
+          </a:p>
+        </p:txBody>
+      </p:sp>
+      <p:sp>
+        <p:nvSpPr>
+          <p:cNvPr id="54" name="Shape 52"/>
+          <p:cNvSpPr/>
+          <p:nvPr/>
+        </p:nvSpPr>
+        <p:spPr>
+          <a:xfrm>
+            <a:off x="7033565" y="4169664"/>
+            <a:ext cx="676656" cy="475488"/>
+          </a:xfrm>
+          <a:prstGeom prst="rect">
+            <a:avLst>
+              <a:gd name="adj" fmla="val 7692"/>
+            </a:avLst>
+          </a:prstGeom>
+          <a:solidFill>
+            <a:srgbClr val="FFFFFF"/>
+          </a:solidFill>
+          <a:ln w="12700">
+            <a:solidFill>
+              <a:srgbClr val="DB2777"/>
+            </a:solidFill>
+            <a:prstDash val="solid"/>
+          </a:ln>
+        </p:spPr>
+      </p:sp>
+      <p:sp>
+        <p:nvSpPr>
+          <p:cNvPr id="55" name="Text 53"/>
+          <p:cNvSpPr/>
+          <p:nvPr/>
+        </p:nvSpPr>
+        <p:spPr>
+          <a:xfrm>
+            <a:off x="7033565" y="4169664"/>
+            <a:ext cx="676656" cy="475488"/>
+          </a:xfrm>
+          <a:prstGeom prst="rect">
+            <a:avLst/>
+          </a:prstGeom>
+          <a:noFill/>
+          <a:ln/>
+        </p:spPr>
+        <p:txBody>
+          <a:bodyPr wrap="square" lIns="0" tIns="0" rIns="0" bIns="0" rtlCol="0" anchor="ctr"/>
+          <a:lstStyle/>
+          <a:p>
+            <a:pPr algn="ctr" indent="0" marL="0">
+              <a:buNone/>
+            </a:pPr>
+            <a:r>
+              <a:rPr lang="en-US" sz="900" b="1" dirty="0">
+                <a:solidFill>
+                  <a:srgbClr val="9D174D"/>
+                </a:solidFill>
+                <a:latin typeface="Trebuchet MS" pitchFamily="34" charset="0"/>
+                <a:ea typeface="Trebuchet MS" pitchFamily="34" charset="-122"/>
+                <a:cs typeface="Trebuchet MS" pitchFamily="34" charset="-120"/>
+              </a:rPr>
+              <a:t>e</a:t>
+            </a:r>
+            <a:endParaRPr lang="en-US" sz="900" dirty="0"/>
+          </a:p>
+        </p:txBody>
+      </p:sp>
+      <p:sp>
+        <p:nvSpPr>
+          <p:cNvPr id="56" name="Shape 54"/>
+          <p:cNvSpPr/>
+          <p:nvPr/>
+        </p:nvSpPr>
+        <p:spPr>
+          <a:xfrm>
+            <a:off x="7759598" y="4169664"/>
+            <a:ext cx="676656" cy="475488"/>
+          </a:xfrm>
+          <a:prstGeom prst="rect">
+            <a:avLst>
+              <a:gd name="adj" fmla="val 7692"/>
+            </a:avLst>
+          </a:prstGeom>
+          <a:solidFill>
+            <a:srgbClr val="FFFFFF"/>
+          </a:solidFill>
+          <a:ln w="12700">
+            <a:solidFill>
+              <a:srgbClr val="DB2777"/>
+            </a:solidFill>
+            <a:prstDash val="solid"/>
+          </a:ln>
+        </p:spPr>
+      </p:sp>
+      <p:sp>
+        <p:nvSpPr>
+          <p:cNvPr id="57" name="Text 55"/>
+          <p:cNvSpPr/>
+          <p:nvPr/>
+        </p:nvSpPr>
+        <p:spPr>
+          <a:xfrm>
+            <a:off x="7759598" y="4169664"/>
+            <a:ext cx="676656" cy="475488"/>
+          </a:xfrm>
+          <a:prstGeom prst="rect">
+            <a:avLst/>
+          </a:prstGeom>
+          <a:noFill/>
+          <a:ln/>
+        </p:spPr>
+        <p:txBody>
+          <a:bodyPr wrap="square" lIns="0" tIns="0" rIns="0" bIns="0" rtlCol="0" anchor="ctr"/>
+          <a:lstStyle/>
+          <a:p>
+            <a:pPr algn="ctr" indent="0" marL="0">
+              <a:buNone/>
+            </a:pPr>
+            <a:r>
+              <a:rPr lang="en-US" sz="900" b="1" dirty="0">
+                <a:solidFill>
+                  <a:srgbClr val="9D174D"/>
+                </a:solidFill>
+                <a:latin typeface="Trebuchet MS" pitchFamily="34" charset="0"/>
+                <a:ea typeface="Trebuchet MS" pitchFamily="34" charset="-122"/>
+                <a:cs typeface="Trebuchet MS" pitchFamily="34" charset="-120"/>
+              </a:rPr>
+              <a:t>ss</a:t>
             </a:r>
             <a:endParaRPr lang="en-US" sz="900" dirty="0"/>
           </a:p>
@@ -27442,7 +28825,7 @@
                 <a:ea typeface="Calibri" pitchFamily="34" charset="-122"/>
                 <a:cs typeface="Calibri" pitchFamily="34" charset="-120"/>
               </a:rPr>
-              <a:t>Word Labs  •  wordlabs.app  •  Root: 'friend' = person who is liked</a:t>
+              <a:t>Word Labs  •  wordlabs.app  •  Root: 'friend' = person one likes and trusts</a:t>
             </a:r>
             <a:endParaRPr lang="en-US" sz="800" dirty="0"/>
           </a:p>
@@ -27581,7 +28964,7 @@
                 <a:ea typeface="Trebuchet MS" pitchFamily="34" charset="-122"/>
                 <a:cs typeface="Trebuchet MS" pitchFamily="34" charset="-120"/>
               </a:rPr>
-              <a:t>friendliness</a:t>
+              <a:t>friends</a:t>
             </a:r>
             <a:endParaRPr lang="en-US" sz="2800" dirty="0"/>
           </a:p>
@@ -28269,7 +29652,7 @@
                 <a:ea typeface="Calibri" pitchFamily="34" charset="-122"/>
                 <a:cs typeface="Calibri" pitchFamily="34" charset="-120"/>
               </a:rPr>
-              <a:t>Word Labs  •  wordlabs.app  •  Root: 'friend' = person who is liked</a:t>
+              <a:t>Word Labs  •  wordlabs.app  •  Root: 'friend' = person one likes and trusts</a:t>
             </a:r>
             <a:endParaRPr lang="en-US" sz="800" dirty="0"/>
           </a:p>
@@ -28408,7 +29791,7 @@
                 <a:ea typeface="Trebuchet MS" pitchFamily="34" charset="-122"/>
                 <a:cs typeface="Trebuchet MS" pitchFamily="34" charset="-120"/>
               </a:rPr>
-              <a:t>friendliness</a:t>
+              <a:t>friends</a:t>
             </a:r>
             <a:endParaRPr lang="en-US" sz="2800" dirty="0"/>
           </a:p>
@@ -28488,7 +29871,7 @@
         </p:nvSpPr>
         <p:spPr>
           <a:xfrm>
-            <a:off x="2221992" y="2258568"/>
+            <a:off x="2938272" y="2258568"/>
             <a:ext cx="1828800" cy="292608"/>
           </a:xfrm>
           <a:prstGeom prst="rect">
@@ -28522,7 +29905,7 @@
         </p:nvSpPr>
         <p:spPr>
           <a:xfrm>
-            <a:off x="2221992" y="2258568"/>
+            <a:off x="2938272" y="2258568"/>
             <a:ext cx="1828800" cy="292608"/>
           </a:xfrm>
           <a:prstGeom prst="rect">
@@ -28561,7 +29944,7 @@
         </p:nvSpPr>
         <p:spPr>
           <a:xfrm>
-            <a:off x="2221992" y="2569464"/>
+            <a:off x="2938272" y="2569464"/>
             <a:ext cx="1828800" cy="201168"/>
           </a:xfrm>
           <a:prstGeom prst="rect">
@@ -28586,7 +29969,7 @@
                 <a:ea typeface="Calibri" pitchFamily="34" charset="-122"/>
                 <a:cs typeface="Calibri" pitchFamily="34" charset="-120"/>
               </a:rPr>
-              <a:t>person who is liked</a:t>
+              <a:t>person one likes and trusts</a:t>
             </a:r>
             <a:endParaRPr lang="en-US" sz="850" dirty="0"/>
           </a:p>
@@ -28600,7 +29983,7 @@
         </p:nvSpPr>
         <p:spPr>
           <a:xfrm>
-            <a:off x="4370832" y="2258568"/>
+            <a:off x="5803392" y="2258568"/>
             <a:ext cx="1828800" cy="292608"/>
           </a:xfrm>
           <a:prstGeom prst="rect">
@@ -28634,7 +30017,7 @@
         </p:nvSpPr>
         <p:spPr>
           <a:xfrm>
-            <a:off x="4370832" y="2258568"/>
+            <a:off x="5803392" y="2258568"/>
             <a:ext cx="1828800" cy="292608"/>
           </a:xfrm>
           <a:prstGeom prst="rect">
@@ -28659,7 +30042,7 @@
                 <a:ea typeface="Trebuchet MS" pitchFamily="34" charset="-122"/>
                 <a:cs typeface="Trebuchet MS" pitchFamily="34" charset="-120"/>
               </a:rPr>
-              <a:t>li</a:t>
+              <a:t>s</a:t>
             </a:r>
             <a:endParaRPr lang="en-US" sz="1300" dirty="0"/>
           </a:p>
@@ -28673,7 +30056,7 @@
         </p:nvSpPr>
         <p:spPr>
           <a:xfrm>
-            <a:off x="4370832" y="2569464"/>
+            <a:off x="5803392" y="2569464"/>
             <a:ext cx="1828800" cy="201168"/>
           </a:xfrm>
           <a:prstGeom prst="rect">
@@ -28698,7 +30081,7 @@
                 <a:ea typeface="Calibri" pitchFamily="34" charset="-122"/>
                 <a:cs typeface="Calibri" pitchFamily="34" charset="-120"/>
               </a:rPr>
-              <a:t>in a certain way</a:t>
+              <a:t>more than one</a:t>
             </a:r>
             <a:endParaRPr lang="en-US" sz="850" dirty="0"/>
           </a:p>
@@ -28706,87 +30089,173 @@
       </p:sp>
       <p:sp>
         <p:nvSpPr>
-          <p:cNvPr id="22" name="Text 20"/>
-          <p:cNvSpPr/>
-          <p:nvPr/>
-        </p:nvSpPr>
-        <p:spPr>
-          <a:xfrm>
-            <a:off x="4370832" y="2752344"/>
-            <a:ext cx="1828800" cy="182880"/>
-          </a:xfrm>
-          <a:prstGeom prst="rect">
-            <a:avLst/>
-          </a:prstGeom>
-          <a:noFill/>
-          <a:ln/>
-        </p:spPr>
-        <p:txBody>
-          <a:bodyPr wrap="square" lIns="0" tIns="0" rIns="0" bIns="0" rtlCol="0" anchor="t"/>
-          <a:lstStyle/>
-          <a:p>
-            <a:pPr algn="ctr" indent="0" marL="0">
-              <a:buNone/>
-            </a:pPr>
-            <a:r>
-              <a:rPr lang="en-US" sz="700" i="1" dirty="0">
-                <a:solidFill>
-                  <a:srgbClr val="94A3B8"/>
+          <p:cNvPr id="22" name="Shape 20"/>
+          <p:cNvSpPr/>
+          <p:nvPr/>
+        </p:nvSpPr>
+        <p:spPr>
+          <a:xfrm>
+            <a:off x="365760" y="3273552"/>
+            <a:ext cx="1371600" cy="658368"/>
+          </a:xfrm>
+          <a:prstGeom prst="rect">
+            <a:avLst>
+              <a:gd name="adj" fmla="val 8333"/>
+            </a:avLst>
+          </a:prstGeom>
+          <a:solidFill>
+            <a:srgbClr val="E2E8F0"/>
+          </a:solidFill>
+          <a:ln w="12700">
+            <a:solidFill>
+              <a:srgbClr val="E2E8F0"/>
+            </a:solidFill>
+            <a:prstDash val="solid"/>
+          </a:ln>
+        </p:spPr>
+      </p:sp>
+      <p:sp>
+        <p:nvSpPr>
+          <p:cNvPr id="23" name="Text 21"/>
+          <p:cNvSpPr/>
+          <p:nvPr/>
+        </p:nvSpPr>
+        <p:spPr>
+          <a:xfrm>
+            <a:off x="365760" y="3273552"/>
+            <a:ext cx="1371600" cy="658368"/>
+          </a:xfrm>
+          <a:prstGeom prst="rect">
+            <a:avLst/>
+          </a:prstGeom>
+          <a:noFill/>
+          <a:ln/>
+        </p:spPr>
+        <p:txBody>
+          <a:bodyPr wrap="square" lIns="0" tIns="0" rIns="0" bIns="0" rtlCol="0" anchor="ctr"/>
+          <a:lstStyle/>
+          <a:p>
+            <a:pPr algn="ctr" indent="0" marL="0">
+              <a:buNone/>
+            </a:pPr>
+            <a:r>
+              <a:rPr lang="en-US" sz="1100" b="1" dirty="0">
+                <a:solidFill>
+                  <a:srgbClr val="475569"/>
+                </a:solidFill>
+                <a:latin typeface="Trebuchet MS" pitchFamily="34" charset="0"/>
+                <a:ea typeface="Trebuchet MS" pitchFamily="34" charset="-122"/>
+                <a:cs typeface="Trebuchet MS" pitchFamily="34" charset="-120"/>
+              </a:rPr>
+              <a:t>Syllables</a:t>
+            </a:r>
+            <a:endParaRPr lang="en-US" sz="1100" dirty="0"/>
+          </a:p>
+        </p:txBody>
+      </p:sp>
+      <p:sp>
+        <p:nvSpPr>
+          <p:cNvPr id="24" name="Shape 22"/>
+          <p:cNvSpPr/>
+          <p:nvPr/>
+        </p:nvSpPr>
+        <p:spPr>
+          <a:xfrm>
+            <a:off x="1874520" y="3273552"/>
+            <a:ext cx="6903720" cy="658368"/>
+          </a:xfrm>
+          <a:prstGeom prst="rect">
+            <a:avLst>
+              <a:gd name="adj" fmla="val 8333"/>
+            </a:avLst>
+          </a:prstGeom>
+          <a:solidFill>
+            <a:srgbClr val="F8FAFC"/>
+          </a:solidFill>
+          <a:ln w="12700">
+            <a:solidFill>
+              <a:srgbClr val="E2E8F0"/>
+            </a:solidFill>
+            <a:prstDash val="dash"/>
+          </a:ln>
+        </p:spPr>
+      </p:sp>
+      <p:sp>
+        <p:nvSpPr>
+          <p:cNvPr id="25" name="Text 23"/>
+          <p:cNvSpPr/>
+          <p:nvPr/>
+        </p:nvSpPr>
+        <p:spPr>
+          <a:xfrm>
+            <a:off x="1874520" y="3273552"/>
+            <a:ext cx="6903720" cy="658368"/>
+          </a:xfrm>
+          <a:prstGeom prst="rect">
+            <a:avLst/>
+          </a:prstGeom>
+          <a:noFill/>
+          <a:ln/>
+        </p:spPr>
+        <p:txBody>
+          <a:bodyPr wrap="square" rtlCol="0" anchor="ctr"/>
+          <a:lstStyle/>
+          <a:p>
+            <a:pPr algn="ctr" indent="0" marL="0">
+              <a:buNone/>
+            </a:pPr>
+            <a:r>
+              <a:rPr lang="en-US" sz="1100" i="1" dirty="0">
+                <a:solidFill>
+                  <a:srgbClr val="CBD5E1"/>
                 </a:solidFill>
                 <a:latin typeface="Calibri" pitchFamily="34" charset="0"/>
                 <a:ea typeface="Calibri" pitchFamily="34" charset="-122"/>
                 <a:cs typeface="Calibri" pitchFamily="34" charset="-120"/>
               </a:rPr>
-              <a:t>'y' changes to 'i' before adding '-ness'</a:t>
-            </a:r>
-            <a:endParaRPr lang="en-US" sz="700" dirty="0"/>
-          </a:p>
-        </p:txBody>
-      </p:sp>
-      <p:sp>
-        <p:nvSpPr>
-          <p:cNvPr id="23" name="Shape 21"/>
-          <p:cNvSpPr/>
-          <p:nvPr/>
-        </p:nvSpPr>
-        <p:spPr>
-          <a:xfrm>
-            <a:off x="6519672" y="2258568"/>
-            <a:ext cx="1828800" cy="292608"/>
+              <a:t>Write here...</a:t>
+            </a:r>
+            <a:endParaRPr lang="en-US" sz="1100" dirty="0"/>
+          </a:p>
+        </p:txBody>
+      </p:sp>
+      <p:sp>
+        <p:nvSpPr>
+          <p:cNvPr id="26" name="Shape 24"/>
+          <p:cNvSpPr/>
+          <p:nvPr/>
+        </p:nvSpPr>
+        <p:spPr>
+          <a:xfrm>
+            <a:off x="365760" y="4096512"/>
+            <a:ext cx="1371600" cy="804672"/>
           </a:xfrm>
           <a:prstGeom prst="rect">
             <a:avLst>
-              <a:gd name="adj" fmla="val 25000"/>
+              <a:gd name="adj" fmla="val 6818"/>
             </a:avLst>
           </a:prstGeom>
           <a:solidFill>
-            <a:srgbClr val="FCE7F3"/>
-          </a:solidFill>
-          <a:ln w="19050">
-            <a:solidFill>
-              <a:srgbClr val="DB2777"/>
-            </a:solidFill>
-            <a:prstDash val="solid"/>
-          </a:ln>
-          <a:effectLst>
-            <a:outerShdw sx="100000" sy="100000" kx="0" ky="0" algn="bl" rotWithShape="0" blurRad="101600" dist="38100" dir="8100000">
-              <a:srgbClr val="000000">
-                <a:alpha val="12000"/>
-              </a:srgbClr>
-            </a:outerShdw>
-          </a:effectLst>
-        </p:spPr>
-      </p:sp>
-      <p:sp>
-        <p:nvSpPr>
-          <p:cNvPr id="24" name="Text 22"/>
-          <p:cNvSpPr/>
-          <p:nvPr/>
-        </p:nvSpPr>
-        <p:spPr>
-          <a:xfrm>
-            <a:off x="6519672" y="2258568"/>
-            <a:ext cx="1828800" cy="292608"/>
+            <a:srgbClr val="E2E8F0"/>
+          </a:solidFill>
+          <a:ln w="12700">
+            <a:solidFill>
+              <a:srgbClr val="E2E8F0"/>
+            </a:solidFill>
+            <a:prstDash val="solid"/>
+          </a:ln>
+        </p:spPr>
+      </p:sp>
+      <p:sp>
+        <p:nvSpPr>
+          <p:cNvPr id="27" name="Text 25"/>
+          <p:cNvSpPr/>
+          <p:nvPr/>
+        </p:nvSpPr>
+        <p:spPr>
+          <a:xfrm>
+            <a:off x="365760" y="4096512"/>
+            <a:ext cx="1371600" cy="804672"/>
           </a:xfrm>
           <a:prstGeom prst="rect">
             <a:avLst/>
@@ -28802,120 +30271,15 @@
               <a:buNone/>
             </a:pPr>
             <a:r>
-              <a:rPr lang="en-US" sz="1300" b="1" dirty="0">
-                <a:solidFill>
-                  <a:srgbClr val="9D174D"/>
+              <a:rPr lang="en-US" sz="1100" b="1" dirty="0">
+                <a:solidFill>
+                  <a:srgbClr val="475569"/>
                 </a:solidFill>
                 <a:latin typeface="Trebuchet MS" pitchFamily="34" charset="0"/>
                 <a:ea typeface="Trebuchet MS" pitchFamily="34" charset="-122"/>
                 <a:cs typeface="Trebuchet MS" pitchFamily="34" charset="-120"/>
               </a:rPr>
-              <a:t>ness</a:t>
-            </a:r>
-            <a:endParaRPr lang="en-US" sz="1300" dirty="0"/>
-          </a:p>
-        </p:txBody>
-      </p:sp>
-      <p:sp>
-        <p:nvSpPr>
-          <p:cNvPr id="25" name="Text 23"/>
-          <p:cNvSpPr/>
-          <p:nvPr/>
-        </p:nvSpPr>
-        <p:spPr>
-          <a:xfrm>
-            <a:off x="6519672" y="2569464"/>
-            <a:ext cx="1828800" cy="201168"/>
-          </a:xfrm>
-          <a:prstGeom prst="rect">
-            <a:avLst/>
-          </a:prstGeom>
-          <a:noFill/>
-          <a:ln/>
-        </p:spPr>
-        <p:txBody>
-          <a:bodyPr wrap="square" lIns="0" tIns="0" rIns="0" bIns="0" rtlCol="0" anchor="t"/>
-          <a:lstStyle/>
-          <a:p>
-            <a:pPr algn="ctr" indent="0" marL="0">
-              <a:buNone/>
-            </a:pPr>
-            <a:r>
-              <a:rPr lang="en-US" sz="850" dirty="0">
-                <a:solidFill>
-                  <a:srgbClr val="475569"/>
-                </a:solidFill>
-                <a:latin typeface="Calibri" pitchFamily="34" charset="0"/>
-                <a:ea typeface="Calibri" pitchFamily="34" charset="-122"/>
-                <a:cs typeface="Calibri" pitchFamily="34" charset="-120"/>
-              </a:rPr>
-              <a:t>quality or state of</a:t>
-            </a:r>
-            <a:endParaRPr lang="en-US" sz="850" dirty="0"/>
-          </a:p>
-        </p:txBody>
-      </p:sp>
-      <p:sp>
-        <p:nvSpPr>
-          <p:cNvPr id="26" name="Shape 24"/>
-          <p:cNvSpPr/>
-          <p:nvPr/>
-        </p:nvSpPr>
-        <p:spPr>
-          <a:xfrm>
-            <a:off x="365760" y="3273552"/>
-            <a:ext cx="1371600" cy="658368"/>
-          </a:xfrm>
-          <a:prstGeom prst="rect">
-            <a:avLst>
-              <a:gd name="adj" fmla="val 8333"/>
-            </a:avLst>
-          </a:prstGeom>
-          <a:solidFill>
-            <a:srgbClr val="E2E8F0"/>
-          </a:solidFill>
-          <a:ln w="12700">
-            <a:solidFill>
-              <a:srgbClr val="E2E8F0"/>
-            </a:solidFill>
-            <a:prstDash val="solid"/>
-          </a:ln>
-        </p:spPr>
-      </p:sp>
-      <p:sp>
-        <p:nvSpPr>
-          <p:cNvPr id="27" name="Text 25"/>
-          <p:cNvSpPr/>
-          <p:nvPr/>
-        </p:nvSpPr>
-        <p:spPr>
-          <a:xfrm>
-            <a:off x="365760" y="3273552"/>
-            <a:ext cx="1371600" cy="658368"/>
-          </a:xfrm>
-          <a:prstGeom prst="rect">
-            <a:avLst/>
-          </a:prstGeom>
-          <a:noFill/>
-          <a:ln/>
-        </p:spPr>
-        <p:txBody>
-          <a:bodyPr wrap="square" lIns="0" tIns="0" rIns="0" bIns="0" rtlCol="0" anchor="ctr"/>
-          <a:lstStyle/>
-          <a:p>
-            <a:pPr algn="ctr" indent="0" marL="0">
-              <a:buNone/>
-            </a:pPr>
-            <a:r>
-              <a:rPr lang="en-US" sz="1100" b="1" dirty="0">
-                <a:solidFill>
-                  <a:srgbClr val="475569"/>
-                </a:solidFill>
-                <a:latin typeface="Trebuchet MS" pitchFamily="34" charset="0"/>
-                <a:ea typeface="Trebuchet MS" pitchFamily="34" charset="-122"/>
-                <a:cs typeface="Trebuchet MS" pitchFamily="34" charset="-120"/>
-              </a:rPr>
-              <a:t>Syllables</a:t>
+              <a:t>Phonemes</a:t>
             </a:r>
             <a:endParaRPr lang="en-US" sz="1100" dirty="0"/>
           </a:p>
@@ -28929,74 +30293,8 @@
         </p:nvSpPr>
         <p:spPr>
           <a:xfrm>
-            <a:off x="1874520" y="3273552"/>
-            <a:ext cx="6903720" cy="658368"/>
-          </a:xfrm>
-          <a:prstGeom prst="rect">
-            <a:avLst>
-              <a:gd name="adj" fmla="val 8333"/>
-            </a:avLst>
-          </a:prstGeom>
-          <a:solidFill>
-            <a:srgbClr val="F8FAFC"/>
-          </a:solidFill>
-          <a:ln w="12700">
-            <a:solidFill>
-              <a:srgbClr val="E2E8F0"/>
-            </a:solidFill>
-            <a:prstDash val="dash"/>
-          </a:ln>
-        </p:spPr>
-      </p:sp>
-      <p:sp>
-        <p:nvSpPr>
-          <p:cNvPr id="29" name="Text 27"/>
-          <p:cNvSpPr/>
-          <p:nvPr/>
-        </p:nvSpPr>
-        <p:spPr>
-          <a:xfrm>
-            <a:off x="1874520" y="3273552"/>
-            <a:ext cx="6903720" cy="658368"/>
-          </a:xfrm>
-          <a:prstGeom prst="rect">
-            <a:avLst/>
-          </a:prstGeom>
-          <a:noFill/>
-          <a:ln/>
-        </p:spPr>
-        <p:txBody>
-          <a:bodyPr wrap="square" rtlCol="0" anchor="ctr"/>
-          <a:lstStyle/>
-          <a:p>
-            <a:pPr algn="ctr" indent="0" marL="0">
-              <a:buNone/>
-            </a:pPr>
-            <a:r>
-              <a:rPr lang="en-US" sz="1100" i="1" dirty="0">
-                <a:solidFill>
-                  <a:srgbClr val="CBD5E1"/>
-                </a:solidFill>
-                <a:latin typeface="Calibri" pitchFamily="34" charset="0"/>
-                <a:ea typeface="Calibri" pitchFamily="34" charset="-122"/>
-                <a:cs typeface="Calibri" pitchFamily="34" charset="-120"/>
-              </a:rPr>
-              <a:t>Write here...</a:t>
-            </a:r>
-            <a:endParaRPr lang="en-US" sz="1100" dirty="0"/>
-          </a:p>
-        </p:txBody>
-      </p:sp>
-      <p:sp>
-        <p:nvSpPr>
-          <p:cNvPr id="30" name="Shape 28"/>
-          <p:cNvSpPr/>
-          <p:nvPr/>
-        </p:nvSpPr>
-        <p:spPr>
-          <a:xfrm>
-            <a:off x="365760" y="4096512"/>
-            <a:ext cx="1371600" cy="804672"/>
+            <a:off x="1874520" y="4096512"/>
+            <a:ext cx="6903720" cy="804672"/>
           </a:xfrm>
           <a:prstGeom prst="rect">
             <a:avLst>
@@ -29004,85 +30302,19 @@
             </a:avLst>
           </a:prstGeom>
           <a:solidFill>
-            <a:srgbClr val="E2E8F0"/>
+            <a:srgbClr val="F8FAFC"/>
           </a:solidFill>
           <a:ln w="12700">
             <a:solidFill>
               <a:srgbClr val="E2E8F0"/>
             </a:solidFill>
-            <a:prstDash val="solid"/>
-          </a:ln>
-        </p:spPr>
-      </p:sp>
-      <p:sp>
-        <p:nvSpPr>
-          <p:cNvPr id="31" name="Text 29"/>
-          <p:cNvSpPr/>
-          <p:nvPr/>
-        </p:nvSpPr>
-        <p:spPr>
-          <a:xfrm>
-            <a:off x="365760" y="4096512"/>
-            <a:ext cx="1371600" cy="804672"/>
-          </a:xfrm>
-          <a:prstGeom prst="rect">
-            <a:avLst/>
-          </a:prstGeom>
-          <a:noFill/>
-          <a:ln/>
-        </p:spPr>
-        <p:txBody>
-          <a:bodyPr wrap="square" lIns="0" tIns="0" rIns="0" bIns="0" rtlCol="0" anchor="ctr"/>
-          <a:lstStyle/>
-          <a:p>
-            <a:pPr algn="ctr" indent="0" marL="0">
-              <a:buNone/>
-            </a:pPr>
-            <a:r>
-              <a:rPr lang="en-US" sz="1100" b="1" dirty="0">
-                <a:solidFill>
-                  <a:srgbClr val="475569"/>
-                </a:solidFill>
-                <a:latin typeface="Trebuchet MS" pitchFamily="34" charset="0"/>
-                <a:ea typeface="Trebuchet MS" pitchFamily="34" charset="-122"/>
-                <a:cs typeface="Trebuchet MS" pitchFamily="34" charset="-120"/>
-              </a:rPr>
-              <a:t>Phonemes</a:t>
-            </a:r>
-            <a:endParaRPr lang="en-US" sz="1100" dirty="0"/>
-          </a:p>
-        </p:txBody>
-      </p:sp>
-      <p:sp>
-        <p:nvSpPr>
-          <p:cNvPr id="32" name="Shape 30"/>
-          <p:cNvSpPr/>
-          <p:nvPr/>
-        </p:nvSpPr>
-        <p:spPr>
-          <a:xfrm>
-            <a:off x="1874520" y="4096512"/>
-            <a:ext cx="6903720" cy="804672"/>
-          </a:xfrm>
-          <a:prstGeom prst="rect">
-            <a:avLst>
-              <a:gd name="adj" fmla="val 6818"/>
-            </a:avLst>
-          </a:prstGeom>
-          <a:solidFill>
-            <a:srgbClr val="F8FAFC"/>
-          </a:solidFill>
-          <a:ln w="12700">
-            <a:solidFill>
-              <a:srgbClr val="E2E8F0"/>
-            </a:solidFill>
             <a:prstDash val="dash"/>
           </a:ln>
         </p:spPr>
       </p:sp>
       <p:sp>
         <p:nvSpPr>
-          <p:cNvPr id="33" name="Text 31"/>
+          <p:cNvPr id="29" name="Text 27"/>
           <p:cNvSpPr/>
           <p:nvPr/>
         </p:nvSpPr>
@@ -29405,7 +30637,7 @@
                 <a:ea typeface="Calibri" pitchFamily="34" charset="-122"/>
                 <a:cs typeface="Calibri" pitchFamily="34" charset="-120"/>
               </a:rPr>
-              <a:t>Word Labs  •  wordlabs.app  •  Root: 'friend' = person who is liked</a:t>
+              <a:t>Word Labs  •  wordlabs.app  •  Root: 'friend' = person one likes and trusts</a:t>
             </a:r>
             <a:endParaRPr lang="en-US" sz="800" dirty="0"/>
           </a:p>
@@ -29544,7 +30776,7 @@
                 <a:ea typeface="Trebuchet MS" pitchFamily="34" charset="-122"/>
                 <a:cs typeface="Trebuchet MS" pitchFamily="34" charset="-120"/>
               </a:rPr>
-              <a:t>friendliness</a:t>
+              <a:t>friends</a:t>
             </a:r>
             <a:endParaRPr lang="en-US" sz="2800" dirty="0"/>
           </a:p>
@@ -29624,7 +30856,7 @@
         </p:nvSpPr>
         <p:spPr>
           <a:xfrm>
-            <a:off x="2221992" y="2258568"/>
+            <a:off x="2938272" y="2258568"/>
             <a:ext cx="1828800" cy="292608"/>
           </a:xfrm>
           <a:prstGeom prst="rect">
@@ -29658,7 +30890,7 @@
         </p:nvSpPr>
         <p:spPr>
           <a:xfrm>
-            <a:off x="2221992" y="2258568"/>
+            <a:off x="2938272" y="2258568"/>
             <a:ext cx="1828800" cy="292608"/>
           </a:xfrm>
           <a:prstGeom prst="rect">
@@ -29697,7 +30929,7 @@
         </p:nvSpPr>
         <p:spPr>
           <a:xfrm>
-            <a:off x="2221992" y="2569464"/>
+            <a:off x="2938272" y="2569464"/>
             <a:ext cx="1828800" cy="201168"/>
           </a:xfrm>
           <a:prstGeom prst="rect">
@@ -29722,7 +30954,7 @@
                 <a:ea typeface="Calibri" pitchFamily="34" charset="-122"/>
                 <a:cs typeface="Calibri" pitchFamily="34" charset="-120"/>
               </a:rPr>
-              <a:t>person who is liked</a:t>
+              <a:t>person one likes and trusts</a:t>
             </a:r>
             <a:endParaRPr lang="en-US" sz="850" dirty="0"/>
           </a:p>
@@ -29736,7 +30968,7 @@
         </p:nvSpPr>
         <p:spPr>
           <a:xfrm>
-            <a:off x="4370832" y="2258568"/>
+            <a:off x="5803392" y="2258568"/>
             <a:ext cx="1828800" cy="292608"/>
           </a:xfrm>
           <a:prstGeom prst="rect">
@@ -29770,7 +31002,7 @@
         </p:nvSpPr>
         <p:spPr>
           <a:xfrm>
-            <a:off x="4370832" y="2258568"/>
+            <a:off x="5803392" y="2258568"/>
             <a:ext cx="1828800" cy="292608"/>
           </a:xfrm>
           <a:prstGeom prst="rect">
@@ -29795,7 +31027,7 @@
                 <a:ea typeface="Trebuchet MS" pitchFamily="34" charset="-122"/>
                 <a:cs typeface="Trebuchet MS" pitchFamily="34" charset="-120"/>
               </a:rPr>
-              <a:t>li</a:t>
+              <a:t>s</a:t>
             </a:r>
             <a:endParaRPr lang="en-US" sz="1300" dirty="0"/>
           </a:p>
@@ -29809,7 +31041,7 @@
         </p:nvSpPr>
         <p:spPr>
           <a:xfrm>
-            <a:off x="4370832" y="2569464"/>
+            <a:off x="5803392" y="2569464"/>
             <a:ext cx="1828800" cy="201168"/>
           </a:xfrm>
           <a:prstGeom prst="rect">
@@ -29834,7 +31066,7 @@
                 <a:ea typeface="Calibri" pitchFamily="34" charset="-122"/>
                 <a:cs typeface="Calibri" pitchFamily="34" charset="-120"/>
               </a:rPr>
-              <a:t>in a certain way</a:t>
+              <a:t>more than one</a:t>
             </a:r>
             <a:endParaRPr lang="en-US" sz="850" dirty="0"/>
           </a:p>
@@ -29842,87 +31074,41 @@
       </p:sp>
       <p:sp>
         <p:nvSpPr>
-          <p:cNvPr id="22" name="Text 20"/>
-          <p:cNvSpPr/>
-          <p:nvPr/>
-        </p:nvSpPr>
-        <p:spPr>
-          <a:xfrm>
-            <a:off x="4370832" y="2752344"/>
-            <a:ext cx="1828800" cy="182880"/>
-          </a:xfrm>
-          <a:prstGeom prst="rect">
-            <a:avLst/>
-          </a:prstGeom>
-          <a:noFill/>
-          <a:ln/>
-        </p:spPr>
-        <p:txBody>
-          <a:bodyPr wrap="square" lIns="0" tIns="0" rIns="0" bIns="0" rtlCol="0" anchor="t"/>
-          <a:lstStyle/>
-          <a:p>
-            <a:pPr algn="ctr" indent="0" marL="0">
-              <a:buNone/>
-            </a:pPr>
-            <a:r>
-              <a:rPr lang="en-US" sz="700" i="1" dirty="0">
-                <a:solidFill>
-                  <a:srgbClr val="94A3B8"/>
-                </a:solidFill>
-                <a:latin typeface="Calibri" pitchFamily="34" charset="0"/>
-                <a:ea typeface="Calibri" pitchFamily="34" charset="-122"/>
-                <a:cs typeface="Calibri" pitchFamily="34" charset="-120"/>
-              </a:rPr>
-              <a:t>'y' changes to 'i' before adding '-ness'</a:t>
-            </a:r>
-            <a:endParaRPr lang="en-US" sz="700" dirty="0"/>
-          </a:p>
-        </p:txBody>
-      </p:sp>
-      <p:sp>
-        <p:nvSpPr>
-          <p:cNvPr id="23" name="Shape 21"/>
-          <p:cNvSpPr/>
-          <p:nvPr/>
-        </p:nvSpPr>
-        <p:spPr>
-          <a:xfrm>
-            <a:off x="6519672" y="2258568"/>
-            <a:ext cx="1828800" cy="292608"/>
+          <p:cNvPr id="22" name="Shape 20"/>
+          <p:cNvSpPr/>
+          <p:nvPr/>
+        </p:nvSpPr>
+        <p:spPr>
+          <a:xfrm>
+            <a:off x="365760" y="3273552"/>
+            <a:ext cx="1371600" cy="658368"/>
           </a:xfrm>
           <a:prstGeom prst="rect">
             <a:avLst>
-              <a:gd name="adj" fmla="val 25000"/>
+              <a:gd name="adj" fmla="val 8333"/>
             </a:avLst>
           </a:prstGeom>
           <a:solidFill>
-            <a:srgbClr val="FCE7F3"/>
-          </a:solidFill>
-          <a:ln w="19050">
-            <a:solidFill>
-              <a:srgbClr val="DB2777"/>
-            </a:solidFill>
-            <a:prstDash val="solid"/>
-          </a:ln>
-          <a:effectLst>
-            <a:outerShdw sx="100000" sy="100000" kx="0" ky="0" algn="bl" rotWithShape="0" blurRad="101600" dist="38100" dir="8100000">
-              <a:srgbClr val="000000">
-                <a:alpha val="12000"/>
-              </a:srgbClr>
-            </a:outerShdw>
-          </a:effectLst>
-        </p:spPr>
-      </p:sp>
-      <p:sp>
-        <p:nvSpPr>
-          <p:cNvPr id="24" name="Text 22"/>
-          <p:cNvSpPr/>
-          <p:nvPr/>
-        </p:nvSpPr>
-        <p:spPr>
-          <a:xfrm>
-            <a:off x="6519672" y="2258568"/>
-            <a:ext cx="1828800" cy="292608"/>
+            <a:srgbClr val="E2E8F0"/>
+          </a:solidFill>
+          <a:ln w="12700">
+            <a:solidFill>
+              <a:srgbClr val="E2E8F0"/>
+            </a:solidFill>
+            <a:prstDash val="solid"/>
+          </a:ln>
+        </p:spPr>
+      </p:sp>
+      <p:sp>
+        <p:nvSpPr>
+          <p:cNvPr id="23" name="Text 21"/>
+          <p:cNvSpPr/>
+          <p:nvPr/>
+        </p:nvSpPr>
+        <p:spPr>
+          <a:xfrm>
+            <a:off x="365760" y="3273552"/>
+            <a:ext cx="1371600" cy="658368"/>
           </a:xfrm>
           <a:prstGeom prst="rect">
             <a:avLst/>
@@ -29938,69 +31124,30 @@
               <a:buNone/>
             </a:pPr>
             <a:r>
-              <a:rPr lang="en-US" sz="1300" b="1" dirty="0">
-                <a:solidFill>
-                  <a:srgbClr val="9D174D"/>
+              <a:rPr lang="en-US" sz="1100" b="1" dirty="0">
+                <a:solidFill>
+                  <a:srgbClr val="475569"/>
                 </a:solidFill>
                 <a:latin typeface="Trebuchet MS" pitchFamily="34" charset="0"/>
                 <a:ea typeface="Trebuchet MS" pitchFamily="34" charset="-122"/>
                 <a:cs typeface="Trebuchet MS" pitchFamily="34" charset="-120"/>
               </a:rPr>
-              <a:t>ness</a:t>
-            </a:r>
-            <a:endParaRPr lang="en-US" sz="1300" dirty="0"/>
-          </a:p>
-        </p:txBody>
-      </p:sp>
-      <p:sp>
-        <p:nvSpPr>
-          <p:cNvPr id="25" name="Text 23"/>
-          <p:cNvSpPr/>
-          <p:nvPr/>
-        </p:nvSpPr>
-        <p:spPr>
-          <a:xfrm>
-            <a:off x="6519672" y="2569464"/>
-            <a:ext cx="1828800" cy="201168"/>
-          </a:xfrm>
-          <a:prstGeom prst="rect">
-            <a:avLst/>
-          </a:prstGeom>
-          <a:noFill/>
-          <a:ln/>
-        </p:spPr>
-        <p:txBody>
-          <a:bodyPr wrap="square" lIns="0" tIns="0" rIns="0" bIns="0" rtlCol="0" anchor="t"/>
-          <a:lstStyle/>
-          <a:p>
-            <a:pPr algn="ctr" indent="0" marL="0">
-              <a:buNone/>
-            </a:pPr>
-            <a:r>
-              <a:rPr lang="en-US" sz="850" dirty="0">
-                <a:solidFill>
-                  <a:srgbClr val="475569"/>
-                </a:solidFill>
-                <a:latin typeface="Calibri" pitchFamily="34" charset="0"/>
-                <a:ea typeface="Calibri" pitchFamily="34" charset="-122"/>
-                <a:cs typeface="Calibri" pitchFamily="34" charset="-120"/>
-              </a:rPr>
-              <a:t>quality or state of</a:t>
-            </a:r>
-            <a:endParaRPr lang="en-US" sz="850" dirty="0"/>
-          </a:p>
-        </p:txBody>
-      </p:sp>
-      <p:sp>
-        <p:nvSpPr>
-          <p:cNvPr id="26" name="Shape 24"/>
-          <p:cNvSpPr/>
-          <p:nvPr/>
-        </p:nvSpPr>
-        <p:spPr>
-          <a:xfrm>
-            <a:off x="365760" y="3273552"/>
-            <a:ext cx="1371600" cy="658368"/>
+              <a:t>Syllables</a:t>
+            </a:r>
+            <a:endParaRPr lang="en-US" sz="1100" dirty="0"/>
+          </a:p>
+        </p:txBody>
+      </p:sp>
+      <p:sp>
+        <p:nvSpPr>
+          <p:cNvPr id="24" name="Shape 22"/>
+          <p:cNvSpPr/>
+          <p:nvPr/>
+        </p:nvSpPr>
+        <p:spPr>
+          <a:xfrm>
+            <a:off x="1874520" y="3273552"/>
+            <a:ext cx="6903720" cy="658368"/>
           </a:xfrm>
           <a:prstGeom prst="rect">
             <a:avLst>
@@ -30008,26 +31155,53 @@
             </a:avLst>
           </a:prstGeom>
           <a:solidFill>
-            <a:srgbClr val="E2E8F0"/>
-          </a:solidFill>
-          <a:ln w="12700">
-            <a:solidFill>
-              <a:srgbClr val="E2E8F0"/>
-            </a:solidFill>
-            <a:prstDash val="solid"/>
-          </a:ln>
-        </p:spPr>
-      </p:sp>
-      <p:sp>
-        <p:nvSpPr>
-          <p:cNvPr id="27" name="Text 25"/>
-          <p:cNvSpPr/>
-          <p:nvPr/>
-        </p:nvSpPr>
-        <p:spPr>
-          <a:xfrm>
-            <a:off x="365760" y="3273552"/>
-            <a:ext cx="1371600" cy="658368"/>
+            <a:srgbClr val="CCFBF1"/>
+          </a:solidFill>
+          <a:ln w="12700">
+            <a:solidFill>
+              <a:srgbClr val="0D9488"/>
+            </a:solidFill>
+            <a:prstDash val="solid"/>
+          </a:ln>
+        </p:spPr>
+      </p:sp>
+      <p:sp>
+        <p:nvSpPr>
+          <p:cNvPr id="25" name="Shape 23"/>
+          <p:cNvSpPr/>
+          <p:nvPr/>
+        </p:nvSpPr>
+        <p:spPr>
+          <a:xfrm>
+            <a:off x="4370832" y="3364992"/>
+            <a:ext cx="1645920" cy="475488"/>
+          </a:xfrm>
+          <a:prstGeom prst="rect">
+            <a:avLst>
+              <a:gd name="adj" fmla="val 9615"/>
+            </a:avLst>
+          </a:prstGeom>
+          <a:solidFill>
+            <a:srgbClr val="FFFFFF"/>
+          </a:solidFill>
+          <a:ln w="12700">
+            <a:solidFill>
+              <a:srgbClr val="0D9488"/>
+            </a:solidFill>
+            <a:prstDash val="solid"/>
+          </a:ln>
+        </p:spPr>
+      </p:sp>
+      <p:sp>
+        <p:nvSpPr>
+          <p:cNvPr id="26" name="Text 24"/>
+          <p:cNvSpPr/>
+          <p:nvPr/>
+        </p:nvSpPr>
+        <p:spPr>
+          <a:xfrm>
+            <a:off x="4370832" y="3364992"/>
+            <a:ext cx="1645920" cy="475488"/>
           </a:xfrm>
           <a:prstGeom prst="rect">
             <a:avLst/>
@@ -30043,84 +31217,57 @@
               <a:buNone/>
             </a:pPr>
             <a:r>
-              <a:rPr lang="en-US" sz="1100" b="1" dirty="0">
-                <a:solidFill>
-                  <a:srgbClr val="475569"/>
+              <a:rPr lang="en-US" sz="1400" b="1" dirty="0">
+                <a:solidFill>
+                  <a:srgbClr val="0D9488"/>
                 </a:solidFill>
                 <a:latin typeface="Trebuchet MS" pitchFamily="34" charset="0"/>
                 <a:ea typeface="Trebuchet MS" pitchFamily="34" charset="-122"/>
                 <a:cs typeface="Trebuchet MS" pitchFamily="34" charset="-120"/>
               </a:rPr>
-              <a:t>Syllables</a:t>
-            </a:r>
-            <a:endParaRPr lang="en-US" sz="1100" dirty="0"/>
-          </a:p>
-        </p:txBody>
-      </p:sp>
-      <p:sp>
-        <p:nvSpPr>
-          <p:cNvPr id="28" name="Shape 26"/>
-          <p:cNvSpPr/>
-          <p:nvPr/>
-        </p:nvSpPr>
-        <p:spPr>
-          <a:xfrm>
-            <a:off x="1874520" y="3273552"/>
-            <a:ext cx="6903720" cy="658368"/>
+              <a:t>friends</a:t>
+            </a:r>
+            <a:endParaRPr lang="en-US" sz="1400" dirty="0"/>
+          </a:p>
+        </p:txBody>
+      </p:sp>
+      <p:sp>
+        <p:nvSpPr>
+          <p:cNvPr id="27" name="Shape 25"/>
+          <p:cNvSpPr/>
+          <p:nvPr/>
+        </p:nvSpPr>
+        <p:spPr>
+          <a:xfrm>
+            <a:off x="365760" y="4096512"/>
+            <a:ext cx="1371600" cy="804672"/>
           </a:xfrm>
           <a:prstGeom prst="rect">
             <a:avLst>
-              <a:gd name="adj" fmla="val 8333"/>
+              <a:gd name="adj" fmla="val 6818"/>
             </a:avLst>
           </a:prstGeom>
           <a:solidFill>
-            <a:srgbClr val="CCFBF1"/>
-          </a:solidFill>
-          <a:ln w="12700">
-            <a:solidFill>
-              <a:srgbClr val="0D9488"/>
-            </a:solidFill>
-            <a:prstDash val="solid"/>
-          </a:ln>
-        </p:spPr>
-      </p:sp>
-      <p:sp>
-        <p:nvSpPr>
-          <p:cNvPr id="29" name="Shape 27"/>
-          <p:cNvSpPr/>
-          <p:nvPr/>
-        </p:nvSpPr>
-        <p:spPr>
-          <a:xfrm>
-            <a:off x="2313432" y="3364992"/>
-            <a:ext cx="1645920" cy="475488"/>
-          </a:xfrm>
-          <a:prstGeom prst="rect">
-            <a:avLst>
-              <a:gd name="adj" fmla="val 9615"/>
-            </a:avLst>
-          </a:prstGeom>
-          <a:solidFill>
-            <a:srgbClr val="FFFFFF"/>
-          </a:solidFill>
-          <a:ln w="12700">
-            <a:solidFill>
-              <a:srgbClr val="0D9488"/>
-            </a:solidFill>
-            <a:prstDash val="solid"/>
-          </a:ln>
-        </p:spPr>
-      </p:sp>
-      <p:sp>
-        <p:nvSpPr>
-          <p:cNvPr id="30" name="Text 28"/>
-          <p:cNvSpPr/>
-          <p:nvPr/>
-        </p:nvSpPr>
-        <p:spPr>
-          <a:xfrm>
-            <a:off x="2313432" y="3364992"/>
-            <a:ext cx="1645920" cy="475488"/>
+            <a:srgbClr val="E2E8F0"/>
+          </a:solidFill>
+          <a:ln w="12700">
+            <a:solidFill>
+              <a:srgbClr val="E2E8F0"/>
+            </a:solidFill>
+            <a:prstDash val="solid"/>
+          </a:ln>
+        </p:spPr>
+      </p:sp>
+      <p:sp>
+        <p:nvSpPr>
+          <p:cNvPr id="28" name="Text 26"/>
+          <p:cNvSpPr/>
+          <p:nvPr/>
+        </p:nvSpPr>
+        <p:spPr>
+          <a:xfrm>
+            <a:off x="365760" y="4096512"/>
+            <a:ext cx="1371600" cy="804672"/>
           </a:xfrm>
           <a:prstGeom prst="rect">
             <a:avLst/>
@@ -30136,240 +31283,30 @@
               <a:buNone/>
             </a:pPr>
             <a:r>
-              <a:rPr lang="en-US" sz="1400" b="1" dirty="0">
-                <a:solidFill>
-                  <a:srgbClr val="0D9488"/>
+              <a:rPr lang="en-US" sz="1100" b="1" dirty="0">
+                <a:solidFill>
+                  <a:srgbClr val="475569"/>
                 </a:solidFill>
                 <a:latin typeface="Trebuchet MS" pitchFamily="34" charset="0"/>
                 <a:ea typeface="Trebuchet MS" pitchFamily="34" charset="-122"/>
                 <a:cs typeface="Trebuchet MS" pitchFamily="34" charset="-120"/>
               </a:rPr>
-              <a:t>friend</a:t>
-            </a:r>
-            <a:endParaRPr lang="en-US" sz="1400" dirty="0"/>
-          </a:p>
-        </p:txBody>
-      </p:sp>
-      <p:sp>
-        <p:nvSpPr>
-          <p:cNvPr id="31" name="Text 29"/>
-          <p:cNvSpPr/>
-          <p:nvPr/>
-        </p:nvSpPr>
-        <p:spPr>
-          <a:xfrm>
-            <a:off x="3959352" y="3364992"/>
-            <a:ext cx="411480" cy="475488"/>
-          </a:xfrm>
-          <a:prstGeom prst="rect">
-            <a:avLst/>
-          </a:prstGeom>
-          <a:noFill/>
-          <a:ln/>
-        </p:spPr>
-        <p:txBody>
-          <a:bodyPr wrap="square" lIns="0" tIns="0" rIns="0" bIns="0" rtlCol="0" anchor="ctr"/>
-          <a:lstStyle/>
-          <a:p>
-            <a:pPr algn="ctr" indent="0" marL="0">
-              <a:buNone/>
-            </a:pPr>
-            <a:r>
-              <a:rPr lang="en-US" sz="1600" b="1" dirty="0">
-                <a:solidFill>
-                  <a:srgbClr val="0D9488"/>
-                </a:solidFill>
-                <a:latin typeface="Trebuchet MS" pitchFamily="34" charset="0"/>
-                <a:ea typeface="Trebuchet MS" pitchFamily="34" charset="-122"/>
-                <a:cs typeface="Trebuchet MS" pitchFamily="34" charset="-120"/>
-              </a:rPr>
-              <a:t>·</a:t>
-            </a:r>
-            <a:endParaRPr lang="en-US" sz="1600" dirty="0"/>
-          </a:p>
-        </p:txBody>
-      </p:sp>
-      <p:sp>
-        <p:nvSpPr>
-          <p:cNvPr id="32" name="Shape 30"/>
-          <p:cNvSpPr/>
-          <p:nvPr/>
-        </p:nvSpPr>
-        <p:spPr>
-          <a:xfrm>
-            <a:off x="4370832" y="3364992"/>
-            <a:ext cx="1645920" cy="475488"/>
-          </a:xfrm>
-          <a:prstGeom prst="rect">
-            <a:avLst>
-              <a:gd name="adj" fmla="val 9615"/>
-            </a:avLst>
-          </a:prstGeom>
-          <a:solidFill>
-            <a:srgbClr val="FFFFFF"/>
-          </a:solidFill>
-          <a:ln w="12700">
-            <a:solidFill>
-              <a:srgbClr val="0D9488"/>
-            </a:solidFill>
-            <a:prstDash val="solid"/>
-          </a:ln>
-        </p:spPr>
-      </p:sp>
-      <p:sp>
-        <p:nvSpPr>
-          <p:cNvPr id="33" name="Text 31"/>
-          <p:cNvSpPr/>
-          <p:nvPr/>
-        </p:nvSpPr>
-        <p:spPr>
-          <a:xfrm>
-            <a:off x="4370832" y="3364992"/>
-            <a:ext cx="1645920" cy="475488"/>
-          </a:xfrm>
-          <a:prstGeom prst="rect">
-            <a:avLst/>
-          </a:prstGeom>
-          <a:noFill/>
-          <a:ln/>
-        </p:spPr>
-        <p:txBody>
-          <a:bodyPr wrap="square" lIns="0" tIns="0" rIns="0" bIns="0" rtlCol="0" anchor="ctr"/>
-          <a:lstStyle/>
-          <a:p>
-            <a:pPr algn="ctr" indent="0" marL="0">
-              <a:buNone/>
-            </a:pPr>
-            <a:r>
-              <a:rPr lang="en-US" sz="1400" b="1" dirty="0">
-                <a:solidFill>
-                  <a:srgbClr val="0D9488"/>
-                </a:solidFill>
-                <a:latin typeface="Trebuchet MS" pitchFamily="34" charset="0"/>
-                <a:ea typeface="Trebuchet MS" pitchFamily="34" charset="-122"/>
-                <a:cs typeface="Trebuchet MS" pitchFamily="34" charset="-120"/>
-              </a:rPr>
-              <a:t>li</a:t>
-            </a:r>
-            <a:endParaRPr lang="en-US" sz="1400" dirty="0"/>
-          </a:p>
-        </p:txBody>
-      </p:sp>
-      <p:sp>
-        <p:nvSpPr>
-          <p:cNvPr id="34" name="Text 32"/>
-          <p:cNvSpPr/>
-          <p:nvPr/>
-        </p:nvSpPr>
-        <p:spPr>
-          <a:xfrm>
-            <a:off x="6016752" y="3364992"/>
-            <a:ext cx="411480" cy="475488"/>
-          </a:xfrm>
-          <a:prstGeom prst="rect">
-            <a:avLst/>
-          </a:prstGeom>
-          <a:noFill/>
-          <a:ln/>
-        </p:spPr>
-        <p:txBody>
-          <a:bodyPr wrap="square" lIns="0" tIns="0" rIns="0" bIns="0" rtlCol="0" anchor="ctr"/>
-          <a:lstStyle/>
-          <a:p>
-            <a:pPr algn="ctr" indent="0" marL="0">
-              <a:buNone/>
-            </a:pPr>
-            <a:r>
-              <a:rPr lang="en-US" sz="1600" b="1" dirty="0">
-                <a:solidFill>
-                  <a:srgbClr val="0D9488"/>
-                </a:solidFill>
-                <a:latin typeface="Trebuchet MS" pitchFamily="34" charset="0"/>
-                <a:ea typeface="Trebuchet MS" pitchFamily="34" charset="-122"/>
-                <a:cs typeface="Trebuchet MS" pitchFamily="34" charset="-120"/>
-              </a:rPr>
-              <a:t>·</a:t>
-            </a:r>
-            <a:endParaRPr lang="en-US" sz="1600" dirty="0"/>
-          </a:p>
-        </p:txBody>
-      </p:sp>
-      <p:sp>
-        <p:nvSpPr>
-          <p:cNvPr id="35" name="Shape 33"/>
-          <p:cNvSpPr/>
-          <p:nvPr/>
-        </p:nvSpPr>
-        <p:spPr>
-          <a:xfrm>
-            <a:off x="6428232" y="3364992"/>
-            <a:ext cx="1645920" cy="475488"/>
-          </a:xfrm>
-          <a:prstGeom prst="rect">
-            <a:avLst>
-              <a:gd name="adj" fmla="val 9615"/>
-            </a:avLst>
-          </a:prstGeom>
-          <a:solidFill>
-            <a:srgbClr val="FFFFFF"/>
-          </a:solidFill>
-          <a:ln w="12700">
-            <a:solidFill>
-              <a:srgbClr val="0D9488"/>
-            </a:solidFill>
-            <a:prstDash val="solid"/>
-          </a:ln>
-        </p:spPr>
-      </p:sp>
-      <p:sp>
-        <p:nvSpPr>
-          <p:cNvPr id="36" name="Text 34"/>
-          <p:cNvSpPr/>
-          <p:nvPr/>
-        </p:nvSpPr>
-        <p:spPr>
-          <a:xfrm>
-            <a:off x="6428232" y="3364992"/>
-            <a:ext cx="1645920" cy="475488"/>
-          </a:xfrm>
-          <a:prstGeom prst="rect">
-            <a:avLst/>
-          </a:prstGeom>
-          <a:noFill/>
-          <a:ln/>
-        </p:spPr>
-        <p:txBody>
-          <a:bodyPr wrap="square" lIns="0" tIns="0" rIns="0" bIns="0" rtlCol="0" anchor="ctr"/>
-          <a:lstStyle/>
-          <a:p>
-            <a:pPr algn="ctr" indent="0" marL="0">
-              <a:buNone/>
-            </a:pPr>
-            <a:r>
-              <a:rPr lang="en-US" sz="1400" b="1" dirty="0">
-                <a:solidFill>
-                  <a:srgbClr val="0D9488"/>
-                </a:solidFill>
-                <a:latin typeface="Trebuchet MS" pitchFamily="34" charset="0"/>
-                <a:ea typeface="Trebuchet MS" pitchFamily="34" charset="-122"/>
-                <a:cs typeface="Trebuchet MS" pitchFamily="34" charset="-120"/>
-              </a:rPr>
-              <a:t>ness</a:t>
-            </a:r>
-            <a:endParaRPr lang="en-US" sz="1400" dirty="0"/>
-          </a:p>
-        </p:txBody>
-      </p:sp>
-      <p:sp>
-        <p:nvSpPr>
-          <p:cNvPr id="37" name="Shape 35"/>
-          <p:cNvSpPr/>
-          <p:nvPr/>
-        </p:nvSpPr>
-        <p:spPr>
-          <a:xfrm>
-            <a:off x="365760" y="4096512"/>
-            <a:ext cx="1371600" cy="804672"/>
+              <a:t>Phonemes</a:t>
+            </a:r>
+            <a:endParaRPr lang="en-US" sz="1100" dirty="0"/>
+          </a:p>
+        </p:txBody>
+      </p:sp>
+      <p:sp>
+        <p:nvSpPr>
+          <p:cNvPr id="29" name="Shape 27"/>
+          <p:cNvSpPr/>
+          <p:nvPr/>
+        </p:nvSpPr>
+        <p:spPr>
+          <a:xfrm>
+            <a:off x="1874520" y="4096512"/>
+            <a:ext cx="6903720" cy="804672"/>
           </a:xfrm>
           <a:prstGeom prst="rect">
             <a:avLst>
@@ -30377,85 +31314,19 @@
             </a:avLst>
           </a:prstGeom>
           <a:solidFill>
-            <a:srgbClr val="E2E8F0"/>
+            <a:srgbClr val="F8FAFC"/>
           </a:solidFill>
           <a:ln w="12700">
             <a:solidFill>
               <a:srgbClr val="E2E8F0"/>
             </a:solidFill>
-            <a:prstDash val="solid"/>
-          </a:ln>
-        </p:spPr>
-      </p:sp>
-      <p:sp>
-        <p:nvSpPr>
-          <p:cNvPr id="38" name="Text 36"/>
-          <p:cNvSpPr/>
-          <p:nvPr/>
-        </p:nvSpPr>
-        <p:spPr>
-          <a:xfrm>
-            <a:off x="365760" y="4096512"/>
-            <a:ext cx="1371600" cy="804672"/>
-          </a:xfrm>
-          <a:prstGeom prst="rect">
-            <a:avLst/>
-          </a:prstGeom>
-          <a:noFill/>
-          <a:ln/>
-        </p:spPr>
-        <p:txBody>
-          <a:bodyPr wrap="square" lIns="0" tIns="0" rIns="0" bIns="0" rtlCol="0" anchor="ctr"/>
-          <a:lstStyle/>
-          <a:p>
-            <a:pPr algn="ctr" indent="0" marL="0">
-              <a:buNone/>
-            </a:pPr>
-            <a:r>
-              <a:rPr lang="en-US" sz="1100" b="1" dirty="0">
-                <a:solidFill>
-                  <a:srgbClr val="475569"/>
-                </a:solidFill>
-                <a:latin typeface="Trebuchet MS" pitchFamily="34" charset="0"/>
-                <a:ea typeface="Trebuchet MS" pitchFamily="34" charset="-122"/>
-                <a:cs typeface="Trebuchet MS" pitchFamily="34" charset="-120"/>
-              </a:rPr>
-              <a:t>Phonemes</a:t>
-            </a:r>
-            <a:endParaRPr lang="en-US" sz="1100" dirty="0"/>
-          </a:p>
-        </p:txBody>
-      </p:sp>
-      <p:sp>
-        <p:nvSpPr>
-          <p:cNvPr id="39" name="Shape 37"/>
-          <p:cNvSpPr/>
-          <p:nvPr/>
-        </p:nvSpPr>
-        <p:spPr>
-          <a:xfrm>
-            <a:off x="1874520" y="4096512"/>
-            <a:ext cx="6903720" cy="804672"/>
-          </a:xfrm>
-          <a:prstGeom prst="rect">
-            <a:avLst>
-              <a:gd name="adj" fmla="val 6818"/>
-            </a:avLst>
-          </a:prstGeom>
-          <a:solidFill>
-            <a:srgbClr val="F8FAFC"/>
-          </a:solidFill>
-          <a:ln w="12700">
-            <a:solidFill>
-              <a:srgbClr val="E2E8F0"/>
-            </a:solidFill>
             <a:prstDash val="dash"/>
           </a:ln>
         </p:spPr>
       </p:sp>
       <p:sp>
         <p:nvSpPr>
-          <p:cNvPr id="40" name="Text 38"/>
+          <p:cNvPr id="30" name="Text 28"/>
           <p:cNvSpPr/>
           <p:nvPr/>
         </p:nvSpPr>
@@ -30778,7 +31649,7 @@
                 <a:ea typeface="Calibri" pitchFamily="34" charset="-122"/>
                 <a:cs typeface="Calibri" pitchFamily="34" charset="-120"/>
               </a:rPr>
-              <a:t>Word Labs  •  wordlabs.app  •  Root: 'friend' = person who is liked</a:t>
+              <a:t>Word Labs  •  wordlabs.app  •  Root: 'friend' = person one likes and trusts</a:t>
             </a:r>
             <a:endParaRPr lang="en-US" sz="800" dirty="0"/>
           </a:p>
@@ -30917,7 +31788,7 @@
                 <a:ea typeface="Trebuchet MS" pitchFamily="34" charset="-122"/>
                 <a:cs typeface="Trebuchet MS" pitchFamily="34" charset="-120"/>
               </a:rPr>
-              <a:t>friendliness</a:t>
+              <a:t>friends</a:t>
             </a:r>
             <a:endParaRPr lang="en-US" sz="2800" dirty="0"/>
           </a:p>
@@ -30997,7 +31868,7 @@
         </p:nvSpPr>
         <p:spPr>
           <a:xfrm>
-            <a:off x="2221992" y="2258568"/>
+            <a:off x="2938272" y="2258568"/>
             <a:ext cx="1828800" cy="292608"/>
           </a:xfrm>
           <a:prstGeom prst="rect">
@@ -31031,7 +31902,7 @@
         </p:nvSpPr>
         <p:spPr>
           <a:xfrm>
-            <a:off x="2221992" y="2258568"/>
+            <a:off x="2938272" y="2258568"/>
             <a:ext cx="1828800" cy="292608"/>
           </a:xfrm>
           <a:prstGeom prst="rect">
@@ -31070,7 +31941,7 @@
         </p:nvSpPr>
         <p:spPr>
           <a:xfrm>
-            <a:off x="2221992" y="2569464"/>
+            <a:off x="2938272" y="2569464"/>
             <a:ext cx="1828800" cy="201168"/>
           </a:xfrm>
           <a:prstGeom prst="rect">
@@ -31095,7 +31966,7 @@
                 <a:ea typeface="Calibri" pitchFamily="34" charset="-122"/>
                 <a:cs typeface="Calibri" pitchFamily="34" charset="-120"/>
               </a:rPr>
-              <a:t>person who is liked</a:t>
+              <a:t>person one likes and trusts</a:t>
             </a:r>
             <a:endParaRPr lang="en-US" sz="850" dirty="0"/>
           </a:p>
@@ -31109,7 +31980,7 @@
         </p:nvSpPr>
         <p:spPr>
           <a:xfrm>
-            <a:off x="4370832" y="2258568"/>
+            <a:off x="5803392" y="2258568"/>
             <a:ext cx="1828800" cy="292608"/>
           </a:xfrm>
           <a:prstGeom prst="rect">
@@ -31143,7 +32014,7 @@
         </p:nvSpPr>
         <p:spPr>
           <a:xfrm>
-            <a:off x="4370832" y="2258568"/>
+            <a:off x="5803392" y="2258568"/>
             <a:ext cx="1828800" cy="292608"/>
           </a:xfrm>
           <a:prstGeom prst="rect">
@@ -31168,7 +32039,7 @@
                 <a:ea typeface="Trebuchet MS" pitchFamily="34" charset="-122"/>
                 <a:cs typeface="Trebuchet MS" pitchFamily="34" charset="-120"/>
               </a:rPr>
-              <a:t>li</a:t>
+              <a:t>s</a:t>
             </a:r>
             <a:endParaRPr lang="en-US" sz="1300" dirty="0"/>
           </a:p>
@@ -31182,7 +32053,7 @@
         </p:nvSpPr>
         <p:spPr>
           <a:xfrm>
-            <a:off x="4370832" y="2569464"/>
+            <a:off x="5803392" y="2569464"/>
             <a:ext cx="1828800" cy="201168"/>
           </a:xfrm>
           <a:prstGeom prst="rect">
@@ -31207,7 +32078,7 @@
                 <a:ea typeface="Calibri" pitchFamily="34" charset="-122"/>
                 <a:cs typeface="Calibri" pitchFamily="34" charset="-120"/>
               </a:rPr>
-              <a:t>in a certain way</a:t>
+              <a:t>more than one</a:t>
             </a:r>
             <a:endParaRPr lang="en-US" sz="850" dirty="0"/>
           </a:p>
@@ -31215,14 +32086,596 @@
       </p:sp>
       <p:sp>
         <p:nvSpPr>
-          <p:cNvPr id="22" name="Text 20"/>
-          <p:cNvSpPr/>
-          <p:nvPr/>
-        </p:nvSpPr>
-        <p:spPr>
-          <a:xfrm>
-            <a:off x="4370832" y="2752344"/>
-            <a:ext cx="1828800" cy="182880"/>
+          <p:cNvPr id="22" name="Shape 20"/>
+          <p:cNvSpPr/>
+          <p:nvPr/>
+        </p:nvSpPr>
+        <p:spPr>
+          <a:xfrm>
+            <a:off x="365760" y="3273552"/>
+            <a:ext cx="1371600" cy="658368"/>
+          </a:xfrm>
+          <a:prstGeom prst="rect">
+            <a:avLst>
+              <a:gd name="adj" fmla="val 8333"/>
+            </a:avLst>
+          </a:prstGeom>
+          <a:solidFill>
+            <a:srgbClr val="E2E8F0"/>
+          </a:solidFill>
+          <a:ln w="12700">
+            <a:solidFill>
+              <a:srgbClr val="E2E8F0"/>
+            </a:solidFill>
+            <a:prstDash val="solid"/>
+          </a:ln>
+        </p:spPr>
+      </p:sp>
+      <p:sp>
+        <p:nvSpPr>
+          <p:cNvPr id="23" name="Text 21"/>
+          <p:cNvSpPr/>
+          <p:nvPr/>
+        </p:nvSpPr>
+        <p:spPr>
+          <a:xfrm>
+            <a:off x="365760" y="3273552"/>
+            <a:ext cx="1371600" cy="658368"/>
+          </a:xfrm>
+          <a:prstGeom prst="rect">
+            <a:avLst/>
+          </a:prstGeom>
+          <a:noFill/>
+          <a:ln/>
+        </p:spPr>
+        <p:txBody>
+          <a:bodyPr wrap="square" lIns="0" tIns="0" rIns="0" bIns="0" rtlCol="0" anchor="ctr"/>
+          <a:lstStyle/>
+          <a:p>
+            <a:pPr algn="ctr" indent="0" marL="0">
+              <a:buNone/>
+            </a:pPr>
+            <a:r>
+              <a:rPr lang="en-US" sz="1100" b="1" dirty="0">
+                <a:solidFill>
+                  <a:srgbClr val="475569"/>
+                </a:solidFill>
+                <a:latin typeface="Trebuchet MS" pitchFamily="34" charset="0"/>
+                <a:ea typeface="Trebuchet MS" pitchFamily="34" charset="-122"/>
+                <a:cs typeface="Trebuchet MS" pitchFamily="34" charset="-120"/>
+              </a:rPr>
+              <a:t>Syllables</a:t>
+            </a:r>
+            <a:endParaRPr lang="en-US" sz="1100" dirty="0"/>
+          </a:p>
+        </p:txBody>
+      </p:sp>
+      <p:sp>
+        <p:nvSpPr>
+          <p:cNvPr id="24" name="Shape 22"/>
+          <p:cNvSpPr/>
+          <p:nvPr/>
+        </p:nvSpPr>
+        <p:spPr>
+          <a:xfrm>
+            <a:off x="1874520" y="3273552"/>
+            <a:ext cx="6903720" cy="658368"/>
+          </a:xfrm>
+          <a:prstGeom prst="rect">
+            <a:avLst>
+              <a:gd name="adj" fmla="val 8333"/>
+            </a:avLst>
+          </a:prstGeom>
+          <a:solidFill>
+            <a:srgbClr val="CCFBF1"/>
+          </a:solidFill>
+          <a:ln w="12700">
+            <a:solidFill>
+              <a:srgbClr val="0D9488"/>
+            </a:solidFill>
+            <a:prstDash val="solid"/>
+          </a:ln>
+        </p:spPr>
+      </p:sp>
+      <p:sp>
+        <p:nvSpPr>
+          <p:cNvPr id="25" name="Shape 23"/>
+          <p:cNvSpPr/>
+          <p:nvPr/>
+        </p:nvSpPr>
+        <p:spPr>
+          <a:xfrm>
+            <a:off x="4370832" y="3364992"/>
+            <a:ext cx="1645920" cy="475488"/>
+          </a:xfrm>
+          <a:prstGeom prst="rect">
+            <a:avLst>
+              <a:gd name="adj" fmla="val 9615"/>
+            </a:avLst>
+          </a:prstGeom>
+          <a:solidFill>
+            <a:srgbClr val="FFFFFF"/>
+          </a:solidFill>
+          <a:ln w="12700">
+            <a:solidFill>
+              <a:srgbClr val="0D9488"/>
+            </a:solidFill>
+            <a:prstDash val="solid"/>
+          </a:ln>
+        </p:spPr>
+      </p:sp>
+      <p:sp>
+        <p:nvSpPr>
+          <p:cNvPr id="26" name="Text 24"/>
+          <p:cNvSpPr/>
+          <p:nvPr/>
+        </p:nvSpPr>
+        <p:spPr>
+          <a:xfrm>
+            <a:off x="4370832" y="3364992"/>
+            <a:ext cx="1645920" cy="475488"/>
+          </a:xfrm>
+          <a:prstGeom prst="rect">
+            <a:avLst/>
+          </a:prstGeom>
+          <a:noFill/>
+          <a:ln/>
+        </p:spPr>
+        <p:txBody>
+          <a:bodyPr wrap="square" lIns="0" tIns="0" rIns="0" bIns="0" rtlCol="0" anchor="ctr"/>
+          <a:lstStyle/>
+          <a:p>
+            <a:pPr algn="ctr" indent="0" marL="0">
+              <a:buNone/>
+            </a:pPr>
+            <a:r>
+              <a:rPr lang="en-US" sz="1400" b="1" dirty="0">
+                <a:solidFill>
+                  <a:srgbClr val="0D9488"/>
+                </a:solidFill>
+                <a:latin typeface="Trebuchet MS" pitchFamily="34" charset="0"/>
+                <a:ea typeface="Trebuchet MS" pitchFamily="34" charset="-122"/>
+                <a:cs typeface="Trebuchet MS" pitchFamily="34" charset="-120"/>
+              </a:rPr>
+              <a:t>friends</a:t>
+            </a:r>
+            <a:endParaRPr lang="en-US" sz="1400" dirty="0"/>
+          </a:p>
+        </p:txBody>
+      </p:sp>
+      <p:sp>
+        <p:nvSpPr>
+          <p:cNvPr id="27" name="Shape 25"/>
+          <p:cNvSpPr/>
+          <p:nvPr/>
+        </p:nvSpPr>
+        <p:spPr>
+          <a:xfrm>
+            <a:off x="365760" y="4096512"/>
+            <a:ext cx="1371600" cy="804672"/>
+          </a:xfrm>
+          <a:prstGeom prst="rect">
+            <a:avLst>
+              <a:gd name="adj" fmla="val 6818"/>
+            </a:avLst>
+          </a:prstGeom>
+          <a:solidFill>
+            <a:srgbClr val="E2E8F0"/>
+          </a:solidFill>
+          <a:ln w="12700">
+            <a:solidFill>
+              <a:srgbClr val="E2E8F0"/>
+            </a:solidFill>
+            <a:prstDash val="solid"/>
+          </a:ln>
+        </p:spPr>
+      </p:sp>
+      <p:sp>
+        <p:nvSpPr>
+          <p:cNvPr id="28" name="Text 26"/>
+          <p:cNvSpPr/>
+          <p:nvPr/>
+        </p:nvSpPr>
+        <p:spPr>
+          <a:xfrm>
+            <a:off x="365760" y="4096512"/>
+            <a:ext cx="1371600" cy="804672"/>
+          </a:xfrm>
+          <a:prstGeom prst="rect">
+            <a:avLst/>
+          </a:prstGeom>
+          <a:noFill/>
+          <a:ln/>
+        </p:spPr>
+        <p:txBody>
+          <a:bodyPr wrap="square" lIns="0" tIns="0" rIns="0" bIns="0" rtlCol="0" anchor="ctr"/>
+          <a:lstStyle/>
+          <a:p>
+            <a:pPr algn="ctr" indent="0" marL="0">
+              <a:buNone/>
+            </a:pPr>
+            <a:r>
+              <a:rPr lang="en-US" sz="1100" b="1" dirty="0">
+                <a:solidFill>
+                  <a:srgbClr val="475569"/>
+                </a:solidFill>
+                <a:latin typeface="Trebuchet MS" pitchFamily="34" charset="0"/>
+                <a:ea typeface="Trebuchet MS" pitchFamily="34" charset="-122"/>
+                <a:cs typeface="Trebuchet MS" pitchFamily="34" charset="-120"/>
+              </a:rPr>
+              <a:t>Phonemes</a:t>
+            </a:r>
+            <a:endParaRPr lang="en-US" sz="1100" dirty="0"/>
+          </a:p>
+        </p:txBody>
+      </p:sp>
+      <p:sp>
+        <p:nvSpPr>
+          <p:cNvPr id="29" name="Shape 27"/>
+          <p:cNvSpPr/>
+          <p:nvPr/>
+        </p:nvSpPr>
+        <p:spPr>
+          <a:xfrm>
+            <a:off x="1874520" y="4096512"/>
+            <a:ext cx="6903720" cy="804672"/>
+          </a:xfrm>
+          <a:prstGeom prst="rect">
+            <a:avLst>
+              <a:gd name="adj" fmla="val 6818"/>
+            </a:avLst>
+          </a:prstGeom>
+          <a:solidFill>
+            <a:srgbClr val="FCE7F3"/>
+          </a:solidFill>
+          <a:ln w="12700">
+            <a:solidFill>
+              <a:srgbClr val="DB2777"/>
+            </a:solidFill>
+            <a:prstDash val="solid"/>
+          </a:ln>
+        </p:spPr>
+      </p:sp>
+      <p:sp>
+        <p:nvSpPr>
+          <p:cNvPr id="30" name="Shape 28"/>
+          <p:cNvSpPr/>
+          <p:nvPr/>
+        </p:nvSpPr>
+        <p:spPr>
+          <a:xfrm>
+            <a:off x="2427732" y="4169664"/>
+            <a:ext cx="685800" cy="384048"/>
+          </a:xfrm>
+          <a:prstGeom prst="rect">
+            <a:avLst>
+              <a:gd name="adj" fmla="val 9524"/>
+            </a:avLst>
+          </a:prstGeom>
+          <a:solidFill>
+            <a:srgbClr val="FFFFFF"/>
+          </a:solidFill>
+          <a:ln w="12700">
+            <a:solidFill>
+              <a:srgbClr val="DB2777"/>
+            </a:solidFill>
+            <a:prstDash val="solid"/>
+          </a:ln>
+        </p:spPr>
+      </p:sp>
+      <p:sp>
+        <p:nvSpPr>
+          <p:cNvPr id="31" name="Text 29"/>
+          <p:cNvSpPr/>
+          <p:nvPr/>
+        </p:nvSpPr>
+        <p:spPr>
+          <a:xfrm>
+            <a:off x="2427732" y="4169664"/>
+            <a:ext cx="685800" cy="384048"/>
+          </a:xfrm>
+          <a:prstGeom prst="rect">
+            <a:avLst/>
+          </a:prstGeom>
+          <a:noFill/>
+          <a:ln/>
+        </p:spPr>
+        <p:txBody>
+          <a:bodyPr wrap="square" lIns="0" tIns="0" rIns="0" bIns="0" rtlCol="0" anchor="ctr"/>
+          <a:lstStyle/>
+          <a:p>
+            <a:pPr algn="ctr" indent="0" marL="0">
+              <a:buNone/>
+            </a:pPr>
+            <a:r>
+              <a:rPr lang="en-US" sz="900" b="1" dirty="0">
+                <a:solidFill>
+                  <a:srgbClr val="9D174D"/>
+                </a:solidFill>
+                <a:latin typeface="Trebuchet MS" pitchFamily="34" charset="0"/>
+                <a:ea typeface="Trebuchet MS" pitchFamily="34" charset="-122"/>
+                <a:cs typeface="Trebuchet MS" pitchFamily="34" charset="-120"/>
+              </a:rPr>
+              <a:t>fr</a:t>
+            </a:r>
+            <a:endParaRPr lang="en-US" sz="900" dirty="0"/>
+          </a:p>
+        </p:txBody>
+      </p:sp>
+      <p:sp>
+        <p:nvSpPr>
+          <p:cNvPr id="32" name="Shape 30"/>
+          <p:cNvSpPr/>
+          <p:nvPr/>
+        </p:nvSpPr>
+        <p:spPr>
+          <a:xfrm>
+            <a:off x="3639312" y="4169664"/>
+            <a:ext cx="685800" cy="384048"/>
+          </a:xfrm>
+          <a:prstGeom prst="rect">
+            <a:avLst>
+              <a:gd name="adj" fmla="val 9524"/>
+            </a:avLst>
+          </a:prstGeom>
+          <a:solidFill>
+            <a:srgbClr val="FFFFFF"/>
+          </a:solidFill>
+          <a:ln w="12700">
+            <a:solidFill>
+              <a:srgbClr val="DB2777"/>
+            </a:solidFill>
+            <a:prstDash val="solid"/>
+          </a:ln>
+        </p:spPr>
+      </p:sp>
+      <p:sp>
+        <p:nvSpPr>
+          <p:cNvPr id="33" name="Text 31"/>
+          <p:cNvSpPr/>
+          <p:nvPr/>
+        </p:nvSpPr>
+        <p:spPr>
+          <a:xfrm>
+            <a:off x="3639312" y="4169664"/>
+            <a:ext cx="685800" cy="384048"/>
+          </a:xfrm>
+          <a:prstGeom prst="rect">
+            <a:avLst/>
+          </a:prstGeom>
+          <a:noFill/>
+          <a:ln/>
+        </p:spPr>
+        <p:txBody>
+          <a:bodyPr wrap="square" lIns="0" tIns="0" rIns="0" bIns="0" rtlCol="0" anchor="ctr"/>
+          <a:lstStyle/>
+          <a:p>
+            <a:pPr algn="ctr" indent="0" marL="0">
+              <a:buNone/>
+            </a:pPr>
+            <a:r>
+              <a:rPr lang="en-US" sz="900" b="1" dirty="0">
+                <a:solidFill>
+                  <a:srgbClr val="9D174D"/>
+                </a:solidFill>
+                <a:latin typeface="Trebuchet MS" pitchFamily="34" charset="0"/>
+                <a:ea typeface="Trebuchet MS" pitchFamily="34" charset="-122"/>
+                <a:cs typeface="Trebuchet MS" pitchFamily="34" charset="-120"/>
+              </a:rPr>
+              <a:t>ie</a:t>
+            </a:r>
+            <a:endParaRPr lang="en-US" sz="900" dirty="0"/>
+          </a:p>
+        </p:txBody>
+      </p:sp>
+      <p:sp>
+        <p:nvSpPr>
+          <p:cNvPr id="34" name="Shape 32"/>
+          <p:cNvSpPr/>
+          <p:nvPr/>
+        </p:nvSpPr>
+        <p:spPr>
+          <a:xfrm>
+            <a:off x="4850892" y="4169664"/>
+            <a:ext cx="685800" cy="384048"/>
+          </a:xfrm>
+          <a:prstGeom prst="rect">
+            <a:avLst>
+              <a:gd name="adj" fmla="val 9524"/>
+            </a:avLst>
+          </a:prstGeom>
+          <a:solidFill>
+            <a:srgbClr val="FFFFFF"/>
+          </a:solidFill>
+          <a:ln w="12700">
+            <a:solidFill>
+              <a:srgbClr val="DB2777"/>
+            </a:solidFill>
+            <a:prstDash val="solid"/>
+          </a:ln>
+        </p:spPr>
+      </p:sp>
+      <p:sp>
+        <p:nvSpPr>
+          <p:cNvPr id="35" name="Text 33"/>
+          <p:cNvSpPr/>
+          <p:nvPr/>
+        </p:nvSpPr>
+        <p:spPr>
+          <a:xfrm>
+            <a:off x="4850892" y="4169664"/>
+            <a:ext cx="685800" cy="384048"/>
+          </a:xfrm>
+          <a:prstGeom prst="rect">
+            <a:avLst/>
+          </a:prstGeom>
+          <a:noFill/>
+          <a:ln/>
+        </p:spPr>
+        <p:txBody>
+          <a:bodyPr wrap="square" lIns="0" tIns="0" rIns="0" bIns="0" rtlCol="0" anchor="ctr"/>
+          <a:lstStyle/>
+          <a:p>
+            <a:pPr algn="ctr" indent="0" marL="0">
+              <a:buNone/>
+            </a:pPr>
+            <a:r>
+              <a:rPr lang="en-US" sz="900" b="1" dirty="0">
+                <a:solidFill>
+                  <a:srgbClr val="9D174D"/>
+                </a:solidFill>
+                <a:latin typeface="Trebuchet MS" pitchFamily="34" charset="0"/>
+                <a:ea typeface="Trebuchet MS" pitchFamily="34" charset="-122"/>
+                <a:cs typeface="Trebuchet MS" pitchFamily="34" charset="-120"/>
+              </a:rPr>
+              <a:t>n</a:t>
+            </a:r>
+            <a:endParaRPr lang="en-US" sz="900" dirty="0"/>
+          </a:p>
+        </p:txBody>
+      </p:sp>
+      <p:sp>
+        <p:nvSpPr>
+          <p:cNvPr id="36" name="Shape 34"/>
+          <p:cNvSpPr/>
+          <p:nvPr/>
+        </p:nvSpPr>
+        <p:spPr>
+          <a:xfrm>
+            <a:off x="6062472" y="4169664"/>
+            <a:ext cx="685800" cy="384048"/>
+          </a:xfrm>
+          <a:prstGeom prst="rect">
+            <a:avLst>
+              <a:gd name="adj" fmla="val 9524"/>
+            </a:avLst>
+          </a:prstGeom>
+          <a:solidFill>
+            <a:srgbClr val="FFFFFF"/>
+          </a:solidFill>
+          <a:ln w="12700">
+            <a:solidFill>
+              <a:srgbClr val="DB2777"/>
+            </a:solidFill>
+            <a:prstDash val="solid"/>
+          </a:ln>
+        </p:spPr>
+      </p:sp>
+      <p:sp>
+        <p:nvSpPr>
+          <p:cNvPr id="37" name="Text 35"/>
+          <p:cNvSpPr/>
+          <p:nvPr/>
+        </p:nvSpPr>
+        <p:spPr>
+          <a:xfrm>
+            <a:off x="6062472" y="4169664"/>
+            <a:ext cx="685800" cy="384048"/>
+          </a:xfrm>
+          <a:prstGeom prst="rect">
+            <a:avLst/>
+          </a:prstGeom>
+          <a:noFill/>
+          <a:ln/>
+        </p:spPr>
+        <p:txBody>
+          <a:bodyPr wrap="square" lIns="0" tIns="0" rIns="0" bIns="0" rtlCol="0" anchor="ctr"/>
+          <a:lstStyle/>
+          <a:p>
+            <a:pPr algn="ctr" indent="0" marL="0">
+              <a:buNone/>
+            </a:pPr>
+            <a:r>
+              <a:rPr lang="en-US" sz="900" b="1" dirty="0">
+                <a:solidFill>
+                  <a:srgbClr val="9D174D"/>
+                </a:solidFill>
+                <a:latin typeface="Trebuchet MS" pitchFamily="34" charset="0"/>
+                <a:ea typeface="Trebuchet MS" pitchFamily="34" charset="-122"/>
+                <a:cs typeface="Trebuchet MS" pitchFamily="34" charset="-120"/>
+              </a:rPr>
+              <a:t>d</a:t>
+            </a:r>
+            <a:endParaRPr lang="en-US" sz="900" dirty="0"/>
+          </a:p>
+        </p:txBody>
+      </p:sp>
+      <p:sp>
+        <p:nvSpPr>
+          <p:cNvPr id="38" name="Shape 36"/>
+          <p:cNvSpPr/>
+          <p:nvPr/>
+        </p:nvSpPr>
+        <p:spPr>
+          <a:xfrm>
+            <a:off x="7274052" y="4169664"/>
+            <a:ext cx="685800" cy="384048"/>
+          </a:xfrm>
+          <a:prstGeom prst="rect">
+            <a:avLst>
+              <a:gd name="adj" fmla="val 9524"/>
+            </a:avLst>
+          </a:prstGeom>
+          <a:solidFill>
+            <a:srgbClr val="FFFFFF"/>
+          </a:solidFill>
+          <a:ln w="12700">
+            <a:solidFill>
+              <a:srgbClr val="DB2777"/>
+            </a:solidFill>
+            <a:prstDash val="solid"/>
+          </a:ln>
+        </p:spPr>
+      </p:sp>
+      <p:sp>
+        <p:nvSpPr>
+          <p:cNvPr id="39" name="Text 37"/>
+          <p:cNvSpPr/>
+          <p:nvPr/>
+        </p:nvSpPr>
+        <p:spPr>
+          <a:xfrm>
+            <a:off x="7274052" y="4169664"/>
+            <a:ext cx="685800" cy="384048"/>
+          </a:xfrm>
+          <a:prstGeom prst="rect">
+            <a:avLst/>
+          </a:prstGeom>
+          <a:noFill/>
+          <a:ln/>
+        </p:spPr>
+        <p:txBody>
+          <a:bodyPr wrap="square" lIns="0" tIns="0" rIns="0" bIns="0" rtlCol="0" anchor="ctr"/>
+          <a:lstStyle/>
+          <a:p>
+            <a:pPr algn="ctr" indent="0" marL="0">
+              <a:buNone/>
+            </a:pPr>
+            <a:r>
+              <a:rPr lang="en-US" sz="900" b="1" dirty="0">
+                <a:solidFill>
+                  <a:srgbClr val="9D174D"/>
+                </a:solidFill>
+                <a:latin typeface="Trebuchet MS" pitchFamily="34" charset="0"/>
+                <a:ea typeface="Trebuchet MS" pitchFamily="34" charset="-122"/>
+                <a:cs typeface="Trebuchet MS" pitchFamily="34" charset="-120"/>
+              </a:rPr>
+              <a:t>z</a:t>
+            </a:r>
+            <a:endParaRPr lang="en-US" sz="900" dirty="0"/>
+          </a:p>
+        </p:txBody>
+      </p:sp>
+      <p:sp>
+        <p:nvSpPr>
+          <p:cNvPr id="40" name="Text 38"/>
+          <p:cNvSpPr/>
+          <p:nvPr/>
+        </p:nvSpPr>
+        <p:spPr>
+          <a:xfrm>
+            <a:off x="7274052" y="4572000"/>
+            <a:ext cx="685800" cy="219456"/>
           </a:xfrm>
           <a:prstGeom prst="rect">
             <a:avLst/>
@@ -31238,7 +32691,7 @@
               <a:buNone/>
             </a:pPr>
             <a:r>
-              <a:rPr lang="en-US" sz="700" i="1" dirty="0">
+              <a:rPr lang="en-US" sz="750" i="1" dirty="0">
                 <a:solidFill>
                   <a:srgbClr val="94A3B8"/>
                 </a:solidFill>
@@ -31246,1216 +32699,9 @@
                 <a:ea typeface="Calibri" pitchFamily="34" charset="-122"/>
                 <a:cs typeface="Calibri" pitchFamily="34" charset="-120"/>
               </a:rPr>
-              <a:t>'y' changes to 'i' before adding '-ness'</a:t>
-            </a:r>
-            <a:endParaRPr lang="en-US" sz="700" dirty="0"/>
-          </a:p>
-        </p:txBody>
-      </p:sp>
-      <p:sp>
-        <p:nvSpPr>
-          <p:cNvPr id="23" name="Shape 21"/>
-          <p:cNvSpPr/>
-          <p:nvPr/>
-        </p:nvSpPr>
-        <p:spPr>
-          <a:xfrm>
-            <a:off x="6519672" y="2258568"/>
-            <a:ext cx="1828800" cy="292608"/>
-          </a:xfrm>
-          <a:prstGeom prst="rect">
-            <a:avLst>
-              <a:gd name="adj" fmla="val 25000"/>
-            </a:avLst>
-          </a:prstGeom>
-          <a:solidFill>
-            <a:srgbClr val="FCE7F3"/>
-          </a:solidFill>
-          <a:ln w="19050">
-            <a:solidFill>
-              <a:srgbClr val="DB2777"/>
-            </a:solidFill>
-            <a:prstDash val="solid"/>
-          </a:ln>
-          <a:effectLst>
-            <a:outerShdw sx="100000" sy="100000" kx="0" ky="0" algn="bl" rotWithShape="0" blurRad="101600" dist="38100" dir="8100000">
-              <a:srgbClr val="000000">
-                <a:alpha val="12000"/>
-              </a:srgbClr>
-            </a:outerShdw>
-          </a:effectLst>
-        </p:spPr>
-      </p:sp>
-      <p:sp>
-        <p:nvSpPr>
-          <p:cNvPr id="24" name="Text 22"/>
-          <p:cNvSpPr/>
-          <p:nvPr/>
-        </p:nvSpPr>
-        <p:spPr>
-          <a:xfrm>
-            <a:off x="6519672" y="2258568"/>
-            <a:ext cx="1828800" cy="292608"/>
-          </a:xfrm>
-          <a:prstGeom prst="rect">
-            <a:avLst/>
-          </a:prstGeom>
-          <a:noFill/>
-          <a:ln/>
-        </p:spPr>
-        <p:txBody>
-          <a:bodyPr wrap="square" lIns="0" tIns="0" rIns="0" bIns="0" rtlCol="0" anchor="ctr"/>
-          <a:lstStyle/>
-          <a:p>
-            <a:pPr algn="ctr" indent="0" marL="0">
-              <a:buNone/>
-            </a:pPr>
-            <a:r>
-              <a:rPr lang="en-US" sz="1300" b="1" dirty="0">
-                <a:solidFill>
-                  <a:srgbClr val="9D174D"/>
-                </a:solidFill>
-                <a:latin typeface="Trebuchet MS" pitchFamily="34" charset="0"/>
-                <a:ea typeface="Trebuchet MS" pitchFamily="34" charset="-122"/>
-                <a:cs typeface="Trebuchet MS" pitchFamily="34" charset="-120"/>
-              </a:rPr>
-              <a:t>ness</a:t>
-            </a:r>
-            <a:endParaRPr lang="en-US" sz="1300" dirty="0"/>
-          </a:p>
-        </p:txBody>
-      </p:sp>
-      <p:sp>
-        <p:nvSpPr>
-          <p:cNvPr id="25" name="Text 23"/>
-          <p:cNvSpPr/>
-          <p:nvPr/>
-        </p:nvSpPr>
-        <p:spPr>
-          <a:xfrm>
-            <a:off x="6519672" y="2569464"/>
-            <a:ext cx="1828800" cy="201168"/>
-          </a:xfrm>
-          <a:prstGeom prst="rect">
-            <a:avLst/>
-          </a:prstGeom>
-          <a:noFill/>
-          <a:ln/>
-        </p:spPr>
-        <p:txBody>
-          <a:bodyPr wrap="square" lIns="0" tIns="0" rIns="0" bIns="0" rtlCol="0" anchor="t"/>
-          <a:lstStyle/>
-          <a:p>
-            <a:pPr algn="ctr" indent="0" marL="0">
-              <a:buNone/>
-            </a:pPr>
-            <a:r>
-              <a:rPr lang="en-US" sz="850" dirty="0">
-                <a:solidFill>
-                  <a:srgbClr val="475569"/>
-                </a:solidFill>
-                <a:latin typeface="Calibri" pitchFamily="34" charset="0"/>
-                <a:ea typeface="Calibri" pitchFamily="34" charset="-122"/>
-                <a:cs typeface="Calibri" pitchFamily="34" charset="-120"/>
-              </a:rPr>
-              <a:t>quality or state of</a:t>
-            </a:r>
-            <a:endParaRPr lang="en-US" sz="850" dirty="0"/>
-          </a:p>
-        </p:txBody>
-      </p:sp>
-      <p:sp>
-        <p:nvSpPr>
-          <p:cNvPr id="26" name="Shape 24"/>
-          <p:cNvSpPr/>
-          <p:nvPr/>
-        </p:nvSpPr>
-        <p:spPr>
-          <a:xfrm>
-            <a:off x="365760" y="3273552"/>
-            <a:ext cx="1371600" cy="658368"/>
-          </a:xfrm>
-          <a:prstGeom prst="rect">
-            <a:avLst>
-              <a:gd name="adj" fmla="val 8333"/>
-            </a:avLst>
-          </a:prstGeom>
-          <a:solidFill>
-            <a:srgbClr val="E2E8F0"/>
-          </a:solidFill>
-          <a:ln w="12700">
-            <a:solidFill>
-              <a:srgbClr val="E2E8F0"/>
-            </a:solidFill>
-            <a:prstDash val="solid"/>
-          </a:ln>
-        </p:spPr>
-      </p:sp>
-      <p:sp>
-        <p:nvSpPr>
-          <p:cNvPr id="27" name="Text 25"/>
-          <p:cNvSpPr/>
-          <p:nvPr/>
-        </p:nvSpPr>
-        <p:spPr>
-          <a:xfrm>
-            <a:off x="365760" y="3273552"/>
-            <a:ext cx="1371600" cy="658368"/>
-          </a:xfrm>
-          <a:prstGeom prst="rect">
-            <a:avLst/>
-          </a:prstGeom>
-          <a:noFill/>
-          <a:ln/>
-        </p:spPr>
-        <p:txBody>
-          <a:bodyPr wrap="square" lIns="0" tIns="0" rIns="0" bIns="0" rtlCol="0" anchor="ctr"/>
-          <a:lstStyle/>
-          <a:p>
-            <a:pPr algn="ctr" indent="0" marL="0">
-              <a:buNone/>
-            </a:pPr>
-            <a:r>
-              <a:rPr lang="en-US" sz="1100" b="1" dirty="0">
-                <a:solidFill>
-                  <a:srgbClr val="475569"/>
-                </a:solidFill>
-                <a:latin typeface="Trebuchet MS" pitchFamily="34" charset="0"/>
-                <a:ea typeface="Trebuchet MS" pitchFamily="34" charset="-122"/>
-                <a:cs typeface="Trebuchet MS" pitchFamily="34" charset="-120"/>
-              </a:rPr>
-              <a:t>Syllables</a:t>
-            </a:r>
-            <a:endParaRPr lang="en-US" sz="1100" dirty="0"/>
-          </a:p>
-        </p:txBody>
-      </p:sp>
-      <p:sp>
-        <p:nvSpPr>
-          <p:cNvPr id="28" name="Shape 26"/>
-          <p:cNvSpPr/>
-          <p:nvPr/>
-        </p:nvSpPr>
-        <p:spPr>
-          <a:xfrm>
-            <a:off x="1874520" y="3273552"/>
-            <a:ext cx="6903720" cy="658368"/>
-          </a:xfrm>
-          <a:prstGeom prst="rect">
-            <a:avLst>
-              <a:gd name="adj" fmla="val 8333"/>
-            </a:avLst>
-          </a:prstGeom>
-          <a:solidFill>
-            <a:srgbClr val="CCFBF1"/>
-          </a:solidFill>
-          <a:ln w="12700">
-            <a:solidFill>
-              <a:srgbClr val="0D9488"/>
-            </a:solidFill>
-            <a:prstDash val="solid"/>
-          </a:ln>
-        </p:spPr>
-      </p:sp>
-      <p:sp>
-        <p:nvSpPr>
-          <p:cNvPr id="29" name="Shape 27"/>
-          <p:cNvSpPr/>
-          <p:nvPr/>
-        </p:nvSpPr>
-        <p:spPr>
-          <a:xfrm>
-            <a:off x="2313432" y="3364992"/>
-            <a:ext cx="1645920" cy="475488"/>
-          </a:xfrm>
-          <a:prstGeom prst="rect">
-            <a:avLst>
-              <a:gd name="adj" fmla="val 9615"/>
-            </a:avLst>
-          </a:prstGeom>
-          <a:solidFill>
-            <a:srgbClr val="FFFFFF"/>
-          </a:solidFill>
-          <a:ln w="12700">
-            <a:solidFill>
-              <a:srgbClr val="0D9488"/>
-            </a:solidFill>
-            <a:prstDash val="solid"/>
-          </a:ln>
-        </p:spPr>
-      </p:sp>
-      <p:sp>
-        <p:nvSpPr>
-          <p:cNvPr id="30" name="Text 28"/>
-          <p:cNvSpPr/>
-          <p:nvPr/>
-        </p:nvSpPr>
-        <p:spPr>
-          <a:xfrm>
-            <a:off x="2313432" y="3364992"/>
-            <a:ext cx="1645920" cy="475488"/>
-          </a:xfrm>
-          <a:prstGeom prst="rect">
-            <a:avLst/>
-          </a:prstGeom>
-          <a:noFill/>
-          <a:ln/>
-        </p:spPr>
-        <p:txBody>
-          <a:bodyPr wrap="square" lIns="0" tIns="0" rIns="0" bIns="0" rtlCol="0" anchor="ctr"/>
-          <a:lstStyle/>
-          <a:p>
-            <a:pPr algn="ctr" indent="0" marL="0">
-              <a:buNone/>
-            </a:pPr>
-            <a:r>
-              <a:rPr lang="en-US" sz="1400" b="1" dirty="0">
-                <a:solidFill>
-                  <a:srgbClr val="0D9488"/>
-                </a:solidFill>
-                <a:latin typeface="Trebuchet MS" pitchFamily="34" charset="0"/>
-                <a:ea typeface="Trebuchet MS" pitchFamily="34" charset="-122"/>
-                <a:cs typeface="Trebuchet MS" pitchFamily="34" charset="-120"/>
-              </a:rPr>
-              <a:t>friend</a:t>
-            </a:r>
-            <a:endParaRPr lang="en-US" sz="1400" dirty="0"/>
-          </a:p>
-        </p:txBody>
-      </p:sp>
-      <p:sp>
-        <p:nvSpPr>
-          <p:cNvPr id="31" name="Text 29"/>
-          <p:cNvSpPr/>
-          <p:nvPr/>
-        </p:nvSpPr>
-        <p:spPr>
-          <a:xfrm>
-            <a:off x="3959352" y="3364992"/>
-            <a:ext cx="411480" cy="475488"/>
-          </a:xfrm>
-          <a:prstGeom prst="rect">
-            <a:avLst/>
-          </a:prstGeom>
-          <a:noFill/>
-          <a:ln/>
-        </p:spPr>
-        <p:txBody>
-          <a:bodyPr wrap="square" lIns="0" tIns="0" rIns="0" bIns="0" rtlCol="0" anchor="ctr"/>
-          <a:lstStyle/>
-          <a:p>
-            <a:pPr algn="ctr" indent="0" marL="0">
-              <a:buNone/>
-            </a:pPr>
-            <a:r>
-              <a:rPr lang="en-US" sz="1600" b="1" dirty="0">
-                <a:solidFill>
-                  <a:srgbClr val="0D9488"/>
-                </a:solidFill>
-                <a:latin typeface="Trebuchet MS" pitchFamily="34" charset="0"/>
-                <a:ea typeface="Trebuchet MS" pitchFamily="34" charset="-122"/>
-                <a:cs typeface="Trebuchet MS" pitchFamily="34" charset="-120"/>
-              </a:rPr>
-              <a:t>·</a:t>
-            </a:r>
-            <a:endParaRPr lang="en-US" sz="1600" dirty="0"/>
-          </a:p>
-        </p:txBody>
-      </p:sp>
-      <p:sp>
-        <p:nvSpPr>
-          <p:cNvPr id="32" name="Shape 30"/>
-          <p:cNvSpPr/>
-          <p:nvPr/>
-        </p:nvSpPr>
-        <p:spPr>
-          <a:xfrm>
-            <a:off x="4370832" y="3364992"/>
-            <a:ext cx="1645920" cy="475488"/>
-          </a:xfrm>
-          <a:prstGeom prst="rect">
-            <a:avLst>
-              <a:gd name="adj" fmla="val 9615"/>
-            </a:avLst>
-          </a:prstGeom>
-          <a:solidFill>
-            <a:srgbClr val="FFFFFF"/>
-          </a:solidFill>
-          <a:ln w="12700">
-            <a:solidFill>
-              <a:srgbClr val="0D9488"/>
-            </a:solidFill>
-            <a:prstDash val="solid"/>
-          </a:ln>
-        </p:spPr>
-      </p:sp>
-      <p:sp>
-        <p:nvSpPr>
-          <p:cNvPr id="33" name="Text 31"/>
-          <p:cNvSpPr/>
-          <p:nvPr/>
-        </p:nvSpPr>
-        <p:spPr>
-          <a:xfrm>
-            <a:off x="4370832" y="3364992"/>
-            <a:ext cx="1645920" cy="475488"/>
-          </a:xfrm>
-          <a:prstGeom prst="rect">
-            <a:avLst/>
-          </a:prstGeom>
-          <a:noFill/>
-          <a:ln/>
-        </p:spPr>
-        <p:txBody>
-          <a:bodyPr wrap="square" lIns="0" tIns="0" rIns="0" bIns="0" rtlCol="0" anchor="ctr"/>
-          <a:lstStyle/>
-          <a:p>
-            <a:pPr algn="ctr" indent="0" marL="0">
-              <a:buNone/>
-            </a:pPr>
-            <a:r>
-              <a:rPr lang="en-US" sz="1400" b="1" dirty="0">
-                <a:solidFill>
-                  <a:srgbClr val="0D9488"/>
-                </a:solidFill>
-                <a:latin typeface="Trebuchet MS" pitchFamily="34" charset="0"/>
-                <a:ea typeface="Trebuchet MS" pitchFamily="34" charset="-122"/>
-                <a:cs typeface="Trebuchet MS" pitchFamily="34" charset="-120"/>
-              </a:rPr>
-              <a:t>li</a:t>
-            </a:r>
-            <a:endParaRPr lang="en-US" sz="1400" dirty="0"/>
-          </a:p>
-        </p:txBody>
-      </p:sp>
-      <p:sp>
-        <p:nvSpPr>
-          <p:cNvPr id="34" name="Text 32"/>
-          <p:cNvSpPr/>
-          <p:nvPr/>
-        </p:nvSpPr>
-        <p:spPr>
-          <a:xfrm>
-            <a:off x="6016752" y="3364992"/>
-            <a:ext cx="411480" cy="475488"/>
-          </a:xfrm>
-          <a:prstGeom prst="rect">
-            <a:avLst/>
-          </a:prstGeom>
-          <a:noFill/>
-          <a:ln/>
-        </p:spPr>
-        <p:txBody>
-          <a:bodyPr wrap="square" lIns="0" tIns="0" rIns="0" bIns="0" rtlCol="0" anchor="ctr"/>
-          <a:lstStyle/>
-          <a:p>
-            <a:pPr algn="ctr" indent="0" marL="0">
-              <a:buNone/>
-            </a:pPr>
-            <a:r>
-              <a:rPr lang="en-US" sz="1600" b="1" dirty="0">
-                <a:solidFill>
-                  <a:srgbClr val="0D9488"/>
-                </a:solidFill>
-                <a:latin typeface="Trebuchet MS" pitchFamily="34" charset="0"/>
-                <a:ea typeface="Trebuchet MS" pitchFamily="34" charset="-122"/>
-                <a:cs typeface="Trebuchet MS" pitchFamily="34" charset="-120"/>
-              </a:rPr>
-              <a:t>·</a:t>
-            </a:r>
-            <a:endParaRPr lang="en-US" sz="1600" dirty="0"/>
-          </a:p>
-        </p:txBody>
-      </p:sp>
-      <p:sp>
-        <p:nvSpPr>
-          <p:cNvPr id="35" name="Shape 33"/>
-          <p:cNvSpPr/>
-          <p:nvPr/>
-        </p:nvSpPr>
-        <p:spPr>
-          <a:xfrm>
-            <a:off x="6428232" y="3364992"/>
-            <a:ext cx="1645920" cy="475488"/>
-          </a:xfrm>
-          <a:prstGeom prst="rect">
-            <a:avLst>
-              <a:gd name="adj" fmla="val 9615"/>
-            </a:avLst>
-          </a:prstGeom>
-          <a:solidFill>
-            <a:srgbClr val="FFFFFF"/>
-          </a:solidFill>
-          <a:ln w="12700">
-            <a:solidFill>
-              <a:srgbClr val="0D9488"/>
-            </a:solidFill>
-            <a:prstDash val="solid"/>
-          </a:ln>
-        </p:spPr>
-      </p:sp>
-      <p:sp>
-        <p:nvSpPr>
-          <p:cNvPr id="36" name="Text 34"/>
-          <p:cNvSpPr/>
-          <p:nvPr/>
-        </p:nvSpPr>
-        <p:spPr>
-          <a:xfrm>
-            <a:off x="6428232" y="3364992"/>
-            <a:ext cx="1645920" cy="475488"/>
-          </a:xfrm>
-          <a:prstGeom prst="rect">
-            <a:avLst/>
-          </a:prstGeom>
-          <a:noFill/>
-          <a:ln/>
-        </p:spPr>
-        <p:txBody>
-          <a:bodyPr wrap="square" lIns="0" tIns="0" rIns="0" bIns="0" rtlCol="0" anchor="ctr"/>
-          <a:lstStyle/>
-          <a:p>
-            <a:pPr algn="ctr" indent="0" marL="0">
-              <a:buNone/>
-            </a:pPr>
-            <a:r>
-              <a:rPr lang="en-US" sz="1400" b="1" dirty="0">
-                <a:solidFill>
-                  <a:srgbClr val="0D9488"/>
-                </a:solidFill>
-                <a:latin typeface="Trebuchet MS" pitchFamily="34" charset="0"/>
-                <a:ea typeface="Trebuchet MS" pitchFamily="34" charset="-122"/>
-                <a:cs typeface="Trebuchet MS" pitchFamily="34" charset="-120"/>
-              </a:rPr>
-              <a:t>ness</a:t>
-            </a:r>
-            <a:endParaRPr lang="en-US" sz="1400" dirty="0"/>
-          </a:p>
-        </p:txBody>
-      </p:sp>
-      <p:sp>
-        <p:nvSpPr>
-          <p:cNvPr id="37" name="Shape 35"/>
-          <p:cNvSpPr/>
-          <p:nvPr/>
-        </p:nvSpPr>
-        <p:spPr>
-          <a:xfrm>
-            <a:off x="365760" y="4096512"/>
-            <a:ext cx="1371600" cy="804672"/>
-          </a:xfrm>
-          <a:prstGeom prst="rect">
-            <a:avLst>
-              <a:gd name="adj" fmla="val 6818"/>
-            </a:avLst>
-          </a:prstGeom>
-          <a:solidFill>
-            <a:srgbClr val="E2E8F0"/>
-          </a:solidFill>
-          <a:ln w="12700">
-            <a:solidFill>
-              <a:srgbClr val="E2E8F0"/>
-            </a:solidFill>
-            <a:prstDash val="solid"/>
-          </a:ln>
-        </p:spPr>
-      </p:sp>
-      <p:sp>
-        <p:nvSpPr>
-          <p:cNvPr id="38" name="Text 36"/>
-          <p:cNvSpPr/>
-          <p:nvPr/>
-        </p:nvSpPr>
-        <p:spPr>
-          <a:xfrm>
-            <a:off x="365760" y="4096512"/>
-            <a:ext cx="1371600" cy="804672"/>
-          </a:xfrm>
-          <a:prstGeom prst="rect">
-            <a:avLst/>
-          </a:prstGeom>
-          <a:noFill/>
-          <a:ln/>
-        </p:spPr>
-        <p:txBody>
-          <a:bodyPr wrap="square" lIns="0" tIns="0" rIns="0" bIns="0" rtlCol="0" anchor="ctr"/>
-          <a:lstStyle/>
-          <a:p>
-            <a:pPr algn="ctr" indent="0" marL="0">
-              <a:buNone/>
-            </a:pPr>
-            <a:r>
-              <a:rPr lang="en-US" sz="1100" b="1" dirty="0">
-                <a:solidFill>
-                  <a:srgbClr val="475569"/>
-                </a:solidFill>
-                <a:latin typeface="Trebuchet MS" pitchFamily="34" charset="0"/>
-                <a:ea typeface="Trebuchet MS" pitchFamily="34" charset="-122"/>
-                <a:cs typeface="Trebuchet MS" pitchFamily="34" charset="-120"/>
-              </a:rPr>
-              <a:t>Phonemes</a:t>
-            </a:r>
-            <a:endParaRPr lang="en-US" sz="1100" dirty="0"/>
-          </a:p>
-        </p:txBody>
-      </p:sp>
-      <p:sp>
-        <p:nvSpPr>
-          <p:cNvPr id="39" name="Shape 37"/>
-          <p:cNvSpPr/>
-          <p:nvPr/>
-        </p:nvSpPr>
-        <p:spPr>
-          <a:xfrm>
-            <a:off x="1874520" y="4096512"/>
-            <a:ext cx="6903720" cy="804672"/>
-          </a:xfrm>
-          <a:prstGeom prst="rect">
-            <a:avLst>
-              <a:gd name="adj" fmla="val 6818"/>
-            </a:avLst>
-          </a:prstGeom>
-          <a:solidFill>
-            <a:srgbClr val="FCE7F3"/>
-          </a:solidFill>
-          <a:ln w="12700">
-            <a:solidFill>
-              <a:srgbClr val="DB2777"/>
-            </a:solidFill>
-            <a:prstDash val="solid"/>
-          </a:ln>
-        </p:spPr>
-      </p:sp>
-      <p:sp>
-        <p:nvSpPr>
-          <p:cNvPr id="40" name="Shape 38"/>
-          <p:cNvSpPr/>
-          <p:nvPr/>
-        </p:nvSpPr>
-        <p:spPr>
-          <a:xfrm>
-            <a:off x="1951330" y="4169664"/>
-            <a:ext cx="676656" cy="384048"/>
-          </a:xfrm>
-          <a:prstGeom prst="rect">
-            <a:avLst>
-              <a:gd name="adj" fmla="val 9524"/>
-            </a:avLst>
-          </a:prstGeom>
-          <a:solidFill>
-            <a:srgbClr val="FFFFFF"/>
-          </a:solidFill>
-          <a:ln w="12700">
-            <a:solidFill>
-              <a:srgbClr val="DB2777"/>
-            </a:solidFill>
-            <a:prstDash val="solid"/>
-          </a:ln>
-        </p:spPr>
-      </p:sp>
-      <p:sp>
-        <p:nvSpPr>
-          <p:cNvPr id="41" name="Text 39"/>
-          <p:cNvSpPr/>
-          <p:nvPr/>
-        </p:nvSpPr>
-        <p:spPr>
-          <a:xfrm>
-            <a:off x="1951330" y="4169664"/>
-            <a:ext cx="676656" cy="384048"/>
-          </a:xfrm>
-          <a:prstGeom prst="rect">
-            <a:avLst/>
-          </a:prstGeom>
-          <a:noFill/>
-          <a:ln/>
-        </p:spPr>
-        <p:txBody>
-          <a:bodyPr wrap="square" lIns="0" tIns="0" rIns="0" bIns="0" rtlCol="0" anchor="ctr"/>
-          <a:lstStyle/>
-          <a:p>
-            <a:pPr algn="ctr" indent="0" marL="0">
-              <a:buNone/>
-            </a:pPr>
-            <a:r>
-              <a:rPr lang="en-US" sz="900" b="1" dirty="0">
-                <a:solidFill>
-                  <a:srgbClr val="9D174D"/>
-                </a:solidFill>
-                <a:latin typeface="Trebuchet MS" pitchFamily="34" charset="0"/>
-                <a:ea typeface="Trebuchet MS" pitchFamily="34" charset="-122"/>
-                <a:cs typeface="Trebuchet MS" pitchFamily="34" charset="-120"/>
-              </a:rPr>
-              <a:t>fr</a:t>
-            </a:r>
-            <a:endParaRPr lang="en-US" sz="900" dirty="0"/>
-          </a:p>
-        </p:txBody>
-      </p:sp>
-      <p:sp>
-        <p:nvSpPr>
-          <p:cNvPr id="42" name="Shape 40"/>
-          <p:cNvSpPr/>
-          <p:nvPr/>
-        </p:nvSpPr>
-        <p:spPr>
-          <a:xfrm>
-            <a:off x="2677363" y="4169664"/>
-            <a:ext cx="676656" cy="384048"/>
-          </a:xfrm>
-          <a:prstGeom prst="rect">
-            <a:avLst>
-              <a:gd name="adj" fmla="val 9524"/>
-            </a:avLst>
-          </a:prstGeom>
-          <a:solidFill>
-            <a:srgbClr val="FFFFFF"/>
-          </a:solidFill>
-          <a:ln w="12700">
-            <a:solidFill>
-              <a:srgbClr val="DB2777"/>
-            </a:solidFill>
-            <a:prstDash val="solid"/>
-          </a:ln>
-        </p:spPr>
-      </p:sp>
-      <p:sp>
-        <p:nvSpPr>
-          <p:cNvPr id="43" name="Text 41"/>
-          <p:cNvSpPr/>
-          <p:nvPr/>
-        </p:nvSpPr>
-        <p:spPr>
-          <a:xfrm>
-            <a:off x="2677363" y="4169664"/>
-            <a:ext cx="676656" cy="384048"/>
-          </a:xfrm>
-          <a:prstGeom prst="rect">
-            <a:avLst/>
-          </a:prstGeom>
-          <a:noFill/>
-          <a:ln/>
-        </p:spPr>
-        <p:txBody>
-          <a:bodyPr wrap="square" lIns="0" tIns="0" rIns="0" bIns="0" rtlCol="0" anchor="ctr"/>
-          <a:lstStyle/>
-          <a:p>
-            <a:pPr algn="ctr" indent="0" marL="0">
-              <a:buNone/>
-            </a:pPr>
-            <a:r>
-              <a:rPr lang="en-US" sz="900" b="1" dirty="0">
-                <a:solidFill>
-                  <a:srgbClr val="9D174D"/>
-                </a:solidFill>
-                <a:latin typeface="Trebuchet MS" pitchFamily="34" charset="0"/>
-                <a:ea typeface="Trebuchet MS" pitchFamily="34" charset="-122"/>
-                <a:cs typeface="Trebuchet MS" pitchFamily="34" charset="-120"/>
-              </a:rPr>
-              <a:t>ie</a:t>
-            </a:r>
-            <a:endParaRPr lang="en-US" sz="900" dirty="0"/>
-          </a:p>
-        </p:txBody>
-      </p:sp>
-      <p:sp>
-        <p:nvSpPr>
-          <p:cNvPr id="44" name="Text 42"/>
-          <p:cNvSpPr/>
-          <p:nvPr/>
-        </p:nvSpPr>
-        <p:spPr>
-          <a:xfrm>
-            <a:off x="2677363" y="4572000"/>
-            <a:ext cx="676656" cy="219456"/>
-          </a:xfrm>
-          <a:prstGeom prst="rect">
-            <a:avLst/>
-          </a:prstGeom>
-          <a:noFill/>
-          <a:ln/>
-        </p:spPr>
-        <p:txBody>
-          <a:bodyPr wrap="square" lIns="0" tIns="0" rIns="0" bIns="0" rtlCol="0" anchor="t"/>
-          <a:lstStyle/>
-          <a:p>
-            <a:pPr algn="ctr" indent="0" marL="0">
-              <a:buNone/>
-            </a:pPr>
-            <a:r>
-              <a:rPr lang="en-US" sz="750" i="1" dirty="0">
-                <a:solidFill>
-                  <a:srgbClr val="94A3B8"/>
-                </a:solidFill>
-                <a:latin typeface="Calibri" pitchFamily="34" charset="0"/>
-                <a:ea typeface="Calibri" pitchFamily="34" charset="-122"/>
-                <a:cs typeface="Calibri" pitchFamily="34" charset="-120"/>
-              </a:rPr>
-              <a:t>/e/</a:t>
+              <a:t>/z/</a:t>
             </a:r>
             <a:endParaRPr lang="en-US" sz="750" dirty="0"/>
-          </a:p>
-        </p:txBody>
-      </p:sp>
-      <p:sp>
-        <p:nvSpPr>
-          <p:cNvPr id="45" name="Shape 43"/>
-          <p:cNvSpPr/>
-          <p:nvPr/>
-        </p:nvSpPr>
-        <p:spPr>
-          <a:xfrm>
-            <a:off x="3403397" y="4169664"/>
-            <a:ext cx="676656" cy="384048"/>
-          </a:xfrm>
-          <a:prstGeom prst="rect">
-            <a:avLst>
-              <a:gd name="adj" fmla="val 9524"/>
-            </a:avLst>
-          </a:prstGeom>
-          <a:solidFill>
-            <a:srgbClr val="FFFFFF"/>
-          </a:solidFill>
-          <a:ln w="12700">
-            <a:solidFill>
-              <a:srgbClr val="DB2777"/>
-            </a:solidFill>
-            <a:prstDash val="solid"/>
-          </a:ln>
-        </p:spPr>
-      </p:sp>
-      <p:sp>
-        <p:nvSpPr>
-          <p:cNvPr id="46" name="Text 44"/>
-          <p:cNvSpPr/>
-          <p:nvPr/>
-        </p:nvSpPr>
-        <p:spPr>
-          <a:xfrm>
-            <a:off x="3403397" y="4169664"/>
-            <a:ext cx="676656" cy="384048"/>
-          </a:xfrm>
-          <a:prstGeom prst="rect">
-            <a:avLst/>
-          </a:prstGeom>
-          <a:noFill/>
-          <a:ln/>
-        </p:spPr>
-        <p:txBody>
-          <a:bodyPr wrap="square" lIns="0" tIns="0" rIns="0" bIns="0" rtlCol="0" anchor="ctr"/>
-          <a:lstStyle/>
-          <a:p>
-            <a:pPr algn="ctr" indent="0" marL="0">
-              <a:buNone/>
-            </a:pPr>
-            <a:r>
-              <a:rPr lang="en-US" sz="900" b="1" dirty="0">
-                <a:solidFill>
-                  <a:srgbClr val="9D174D"/>
-                </a:solidFill>
-                <a:latin typeface="Trebuchet MS" pitchFamily="34" charset="0"/>
-                <a:ea typeface="Trebuchet MS" pitchFamily="34" charset="-122"/>
-                <a:cs typeface="Trebuchet MS" pitchFamily="34" charset="-120"/>
-              </a:rPr>
-              <a:t>n</a:t>
-            </a:r>
-            <a:endParaRPr lang="en-US" sz="900" dirty="0"/>
-          </a:p>
-        </p:txBody>
-      </p:sp>
-      <p:sp>
-        <p:nvSpPr>
-          <p:cNvPr id="47" name="Shape 45"/>
-          <p:cNvSpPr/>
-          <p:nvPr/>
-        </p:nvSpPr>
-        <p:spPr>
-          <a:xfrm>
-            <a:off x="4129430" y="4169664"/>
-            <a:ext cx="676656" cy="384048"/>
-          </a:xfrm>
-          <a:prstGeom prst="rect">
-            <a:avLst>
-              <a:gd name="adj" fmla="val 9524"/>
-            </a:avLst>
-          </a:prstGeom>
-          <a:solidFill>
-            <a:srgbClr val="FFFFFF"/>
-          </a:solidFill>
-          <a:ln w="12700">
-            <a:solidFill>
-              <a:srgbClr val="DB2777"/>
-            </a:solidFill>
-            <a:prstDash val="solid"/>
-          </a:ln>
-        </p:spPr>
-      </p:sp>
-      <p:sp>
-        <p:nvSpPr>
-          <p:cNvPr id="48" name="Text 46"/>
-          <p:cNvSpPr/>
-          <p:nvPr/>
-        </p:nvSpPr>
-        <p:spPr>
-          <a:xfrm>
-            <a:off x="4129430" y="4169664"/>
-            <a:ext cx="676656" cy="384048"/>
-          </a:xfrm>
-          <a:prstGeom prst="rect">
-            <a:avLst/>
-          </a:prstGeom>
-          <a:noFill/>
-          <a:ln/>
-        </p:spPr>
-        <p:txBody>
-          <a:bodyPr wrap="square" lIns="0" tIns="0" rIns="0" bIns="0" rtlCol="0" anchor="ctr"/>
-          <a:lstStyle/>
-          <a:p>
-            <a:pPr algn="ctr" indent="0" marL="0">
-              <a:buNone/>
-            </a:pPr>
-            <a:r>
-              <a:rPr lang="en-US" sz="900" b="1" dirty="0">
-                <a:solidFill>
-                  <a:srgbClr val="9D174D"/>
-                </a:solidFill>
-                <a:latin typeface="Trebuchet MS" pitchFamily="34" charset="0"/>
-                <a:ea typeface="Trebuchet MS" pitchFamily="34" charset="-122"/>
-                <a:cs typeface="Trebuchet MS" pitchFamily="34" charset="-120"/>
-              </a:rPr>
-              <a:t>d</a:t>
-            </a:r>
-            <a:endParaRPr lang="en-US" sz="900" dirty="0"/>
-          </a:p>
-        </p:txBody>
-      </p:sp>
-      <p:sp>
-        <p:nvSpPr>
-          <p:cNvPr id="49" name="Shape 47"/>
-          <p:cNvSpPr/>
-          <p:nvPr/>
-        </p:nvSpPr>
-        <p:spPr>
-          <a:xfrm>
-            <a:off x="4855464" y="4169664"/>
-            <a:ext cx="676656" cy="384048"/>
-          </a:xfrm>
-          <a:prstGeom prst="rect">
-            <a:avLst>
-              <a:gd name="adj" fmla="val 9524"/>
-            </a:avLst>
-          </a:prstGeom>
-          <a:solidFill>
-            <a:srgbClr val="FFFFFF"/>
-          </a:solidFill>
-          <a:ln w="12700">
-            <a:solidFill>
-              <a:srgbClr val="DB2777"/>
-            </a:solidFill>
-            <a:prstDash val="solid"/>
-          </a:ln>
-        </p:spPr>
-      </p:sp>
-      <p:sp>
-        <p:nvSpPr>
-          <p:cNvPr id="50" name="Text 48"/>
-          <p:cNvSpPr/>
-          <p:nvPr/>
-        </p:nvSpPr>
-        <p:spPr>
-          <a:xfrm>
-            <a:off x="4855464" y="4169664"/>
-            <a:ext cx="676656" cy="384048"/>
-          </a:xfrm>
-          <a:prstGeom prst="rect">
-            <a:avLst/>
-          </a:prstGeom>
-          <a:noFill/>
-          <a:ln/>
-        </p:spPr>
-        <p:txBody>
-          <a:bodyPr wrap="square" lIns="0" tIns="0" rIns="0" bIns="0" rtlCol="0" anchor="ctr"/>
-          <a:lstStyle/>
-          <a:p>
-            <a:pPr algn="ctr" indent="0" marL="0">
-              <a:buNone/>
-            </a:pPr>
-            <a:r>
-              <a:rPr lang="en-US" sz="900" b="1" dirty="0">
-                <a:solidFill>
-                  <a:srgbClr val="9D174D"/>
-                </a:solidFill>
-                <a:latin typeface="Trebuchet MS" pitchFamily="34" charset="0"/>
-                <a:ea typeface="Trebuchet MS" pitchFamily="34" charset="-122"/>
-                <a:cs typeface="Trebuchet MS" pitchFamily="34" charset="-120"/>
-              </a:rPr>
-              <a:t>l</a:t>
-            </a:r>
-            <a:endParaRPr lang="en-US" sz="900" dirty="0"/>
-          </a:p>
-        </p:txBody>
-      </p:sp>
-      <p:sp>
-        <p:nvSpPr>
-          <p:cNvPr id="51" name="Shape 49"/>
-          <p:cNvSpPr/>
-          <p:nvPr/>
-        </p:nvSpPr>
-        <p:spPr>
-          <a:xfrm>
-            <a:off x="5581498" y="4169664"/>
-            <a:ext cx="676656" cy="384048"/>
-          </a:xfrm>
-          <a:prstGeom prst="rect">
-            <a:avLst>
-              <a:gd name="adj" fmla="val 9524"/>
-            </a:avLst>
-          </a:prstGeom>
-          <a:solidFill>
-            <a:srgbClr val="FFFFFF"/>
-          </a:solidFill>
-          <a:ln w="12700">
-            <a:solidFill>
-              <a:srgbClr val="DB2777"/>
-            </a:solidFill>
-            <a:prstDash val="solid"/>
-          </a:ln>
-        </p:spPr>
-      </p:sp>
-      <p:sp>
-        <p:nvSpPr>
-          <p:cNvPr id="52" name="Text 50"/>
-          <p:cNvSpPr/>
-          <p:nvPr/>
-        </p:nvSpPr>
-        <p:spPr>
-          <a:xfrm>
-            <a:off x="5581498" y="4169664"/>
-            <a:ext cx="676656" cy="384048"/>
-          </a:xfrm>
-          <a:prstGeom prst="rect">
-            <a:avLst/>
-          </a:prstGeom>
-          <a:noFill/>
-          <a:ln/>
-        </p:spPr>
-        <p:txBody>
-          <a:bodyPr wrap="square" lIns="0" tIns="0" rIns="0" bIns="0" rtlCol="0" anchor="ctr"/>
-          <a:lstStyle/>
-          <a:p>
-            <a:pPr algn="ctr" indent="0" marL="0">
-              <a:buNone/>
-            </a:pPr>
-            <a:r>
-              <a:rPr lang="en-US" sz="900" b="1" dirty="0">
-                <a:solidFill>
-                  <a:srgbClr val="9D174D"/>
-                </a:solidFill>
-                <a:latin typeface="Trebuchet MS" pitchFamily="34" charset="0"/>
-                <a:ea typeface="Trebuchet MS" pitchFamily="34" charset="-122"/>
-                <a:cs typeface="Trebuchet MS" pitchFamily="34" charset="-120"/>
-              </a:rPr>
-              <a:t>i</a:t>
-            </a:r>
-            <a:endParaRPr lang="en-US" sz="900" dirty="0"/>
-          </a:p>
-        </p:txBody>
-      </p:sp>
-      <p:sp>
-        <p:nvSpPr>
-          <p:cNvPr id="53" name="Shape 51"/>
-          <p:cNvSpPr/>
-          <p:nvPr/>
-        </p:nvSpPr>
-        <p:spPr>
-          <a:xfrm>
-            <a:off x="6307531" y="4169664"/>
-            <a:ext cx="676656" cy="384048"/>
-          </a:xfrm>
-          <a:prstGeom prst="rect">
-            <a:avLst>
-              <a:gd name="adj" fmla="val 9524"/>
-            </a:avLst>
-          </a:prstGeom>
-          <a:solidFill>
-            <a:srgbClr val="FFFFFF"/>
-          </a:solidFill>
-          <a:ln w="12700">
-            <a:solidFill>
-              <a:srgbClr val="DB2777"/>
-            </a:solidFill>
-            <a:prstDash val="solid"/>
-          </a:ln>
-        </p:spPr>
-      </p:sp>
-      <p:sp>
-        <p:nvSpPr>
-          <p:cNvPr id="54" name="Text 52"/>
-          <p:cNvSpPr/>
-          <p:nvPr/>
-        </p:nvSpPr>
-        <p:spPr>
-          <a:xfrm>
-            <a:off x="6307531" y="4169664"/>
-            <a:ext cx="676656" cy="384048"/>
-          </a:xfrm>
-          <a:prstGeom prst="rect">
-            <a:avLst/>
-          </a:prstGeom>
-          <a:noFill/>
-          <a:ln/>
-        </p:spPr>
-        <p:txBody>
-          <a:bodyPr wrap="square" lIns="0" tIns="0" rIns="0" bIns="0" rtlCol="0" anchor="ctr"/>
-          <a:lstStyle/>
-          <a:p>
-            <a:pPr algn="ctr" indent="0" marL="0">
-              <a:buNone/>
-            </a:pPr>
-            <a:r>
-              <a:rPr lang="en-US" sz="900" b="1" dirty="0">
-                <a:solidFill>
-                  <a:srgbClr val="9D174D"/>
-                </a:solidFill>
-                <a:latin typeface="Trebuchet MS" pitchFamily="34" charset="0"/>
-                <a:ea typeface="Trebuchet MS" pitchFamily="34" charset="-122"/>
-                <a:cs typeface="Trebuchet MS" pitchFamily="34" charset="-120"/>
-              </a:rPr>
-              <a:t>n</a:t>
-            </a:r>
-            <a:endParaRPr lang="en-US" sz="900" dirty="0"/>
-          </a:p>
-        </p:txBody>
-      </p:sp>
-      <p:sp>
-        <p:nvSpPr>
-          <p:cNvPr id="55" name="Shape 53"/>
-          <p:cNvSpPr/>
-          <p:nvPr/>
-        </p:nvSpPr>
-        <p:spPr>
-          <a:xfrm>
-            <a:off x="7033565" y="4169664"/>
-            <a:ext cx="676656" cy="384048"/>
-          </a:xfrm>
-          <a:prstGeom prst="rect">
-            <a:avLst>
-              <a:gd name="adj" fmla="val 9524"/>
-            </a:avLst>
-          </a:prstGeom>
-          <a:solidFill>
-            <a:srgbClr val="FFFFFF"/>
-          </a:solidFill>
-          <a:ln w="12700">
-            <a:solidFill>
-              <a:srgbClr val="DB2777"/>
-            </a:solidFill>
-            <a:prstDash val="solid"/>
-          </a:ln>
-        </p:spPr>
-      </p:sp>
-      <p:sp>
-        <p:nvSpPr>
-          <p:cNvPr id="56" name="Text 54"/>
-          <p:cNvSpPr/>
-          <p:nvPr/>
-        </p:nvSpPr>
-        <p:spPr>
-          <a:xfrm>
-            <a:off x="7033565" y="4169664"/>
-            <a:ext cx="676656" cy="384048"/>
-          </a:xfrm>
-          <a:prstGeom prst="rect">
-            <a:avLst/>
-          </a:prstGeom>
-          <a:noFill/>
-          <a:ln/>
-        </p:spPr>
-        <p:txBody>
-          <a:bodyPr wrap="square" lIns="0" tIns="0" rIns="0" bIns="0" rtlCol="0" anchor="ctr"/>
-          <a:lstStyle/>
-          <a:p>
-            <a:pPr algn="ctr" indent="0" marL="0">
-              <a:buNone/>
-            </a:pPr>
-            <a:r>
-              <a:rPr lang="en-US" sz="900" b="1" dirty="0">
-                <a:solidFill>
-                  <a:srgbClr val="9D174D"/>
-                </a:solidFill>
-                <a:latin typeface="Trebuchet MS" pitchFamily="34" charset="0"/>
-                <a:ea typeface="Trebuchet MS" pitchFamily="34" charset="-122"/>
-                <a:cs typeface="Trebuchet MS" pitchFamily="34" charset="-120"/>
-              </a:rPr>
-              <a:t>e</a:t>
-            </a:r>
-            <a:endParaRPr lang="en-US" sz="900" dirty="0"/>
-          </a:p>
-        </p:txBody>
-      </p:sp>
-      <p:sp>
-        <p:nvSpPr>
-          <p:cNvPr id="57" name="Shape 55"/>
-          <p:cNvSpPr/>
-          <p:nvPr/>
-        </p:nvSpPr>
-        <p:spPr>
-          <a:xfrm>
-            <a:off x="7759598" y="4169664"/>
-            <a:ext cx="676656" cy="384048"/>
-          </a:xfrm>
-          <a:prstGeom prst="rect">
-            <a:avLst>
-              <a:gd name="adj" fmla="val 9524"/>
-            </a:avLst>
-          </a:prstGeom>
-          <a:solidFill>
-            <a:srgbClr val="FFFFFF"/>
-          </a:solidFill>
-          <a:ln w="12700">
-            <a:solidFill>
-              <a:srgbClr val="DB2777"/>
-            </a:solidFill>
-            <a:prstDash val="solid"/>
-          </a:ln>
-        </p:spPr>
-      </p:sp>
-      <p:sp>
-        <p:nvSpPr>
-          <p:cNvPr id="58" name="Text 56"/>
-          <p:cNvSpPr/>
-          <p:nvPr/>
-        </p:nvSpPr>
-        <p:spPr>
-          <a:xfrm>
-            <a:off x="7759598" y="4169664"/>
-            <a:ext cx="676656" cy="384048"/>
-          </a:xfrm>
-          <a:prstGeom prst="rect">
-            <a:avLst/>
-          </a:prstGeom>
-          <a:noFill/>
-          <a:ln/>
-        </p:spPr>
-        <p:txBody>
-          <a:bodyPr wrap="square" lIns="0" tIns="0" rIns="0" bIns="0" rtlCol="0" anchor="ctr"/>
-          <a:lstStyle/>
-          <a:p>
-            <a:pPr algn="ctr" indent="0" marL="0">
-              <a:buNone/>
-            </a:pPr>
-            <a:r>
-              <a:rPr lang="en-US" sz="900" b="1" dirty="0">
-                <a:solidFill>
-                  <a:srgbClr val="9D174D"/>
-                </a:solidFill>
-                <a:latin typeface="Trebuchet MS" pitchFamily="34" charset="0"/>
-                <a:ea typeface="Trebuchet MS" pitchFamily="34" charset="-122"/>
-                <a:cs typeface="Trebuchet MS" pitchFamily="34" charset="-120"/>
-              </a:rPr>
-              <a:t>ss</a:t>
-            </a:r>
-            <a:endParaRPr lang="en-US" sz="900" dirty="0"/>
           </a:p>
         </p:txBody>
       </p:sp>
@@ -32745,7 +32991,7 @@
                 <a:ea typeface="Calibri" pitchFamily="34" charset="-122"/>
                 <a:cs typeface="Calibri" pitchFamily="34" charset="-120"/>
               </a:rPr>
-              <a:t>Word Labs  •  wordlabs.app  •  Root: 'friend' = person who is liked</a:t>
+              <a:t>Word Labs  •  wordlabs.app  •  Root: 'friend' = person one likes and trusts</a:t>
             </a:r>
             <a:endParaRPr lang="en-US" sz="800" dirty="0"/>
           </a:p>
@@ -33914,7 +34160,7 @@
                 <a:ea typeface="Calibri" pitchFamily="34" charset="-122"/>
                 <a:cs typeface="Calibri" pitchFamily="34" charset="-120"/>
               </a:rPr>
-              <a:t>Word Labs  •  wordlabs.app  •  Root: 'friend' = person who is liked</a:t>
+              <a:t>Word Labs  •  wordlabs.app  •  Root: 'friend' = person one likes and trusts</a:t>
             </a:r>
             <a:endParaRPr lang="en-US" sz="800" dirty="0"/>
           </a:p>
@@ -34866,7 +35112,7 @@
                 <a:ea typeface="Trebuchet MS" pitchFamily="34" charset="-122"/>
                 <a:cs typeface="Trebuchet MS" pitchFamily="34" charset="-120"/>
               </a:rPr>
-              <a:t>pen-</a:t>
+              <a:t>eco-</a:t>
             </a:r>
             <a:endParaRPr lang="en-US" sz="1300" dirty="0"/>
           </a:p>
@@ -35390,7 +35636,7 @@
                 <a:ea typeface="Trebuchet MS" pitchFamily="34" charset="-122"/>
                 <a:cs typeface="Trebuchet MS" pitchFamily="34" charset="-120"/>
               </a:rPr>
-              <a:t>befriended</a:t>
+              <a:t>friends</a:t>
             </a:r>
             <a:endParaRPr lang="en-US" sz="1200" dirty="0"/>
           </a:p>
@@ -35456,7 +35702,7 @@
                 <a:ea typeface="Trebuchet MS" pitchFamily="34" charset="-122"/>
                 <a:cs typeface="Trebuchet MS" pitchFamily="34" charset="-120"/>
               </a:rPr>
-              <a:t>friends</a:t>
+              <a:t>friendliness</a:t>
             </a:r>
             <a:endParaRPr lang="en-US" sz="1200" dirty="0"/>
           </a:p>
@@ -35522,7 +35768,7 @@
                 <a:ea typeface="Trebuchet MS" pitchFamily="34" charset="-122"/>
                 <a:cs typeface="Trebuchet MS" pitchFamily="34" charset="-120"/>
               </a:rPr>
-              <a:t>friendliness</a:t>
+              <a:t>friendlier</a:t>
             </a:r>
             <a:endParaRPr lang="en-US" sz="1200" dirty="0"/>
           </a:p>
@@ -35814,7 +36060,7 @@
                 <a:ea typeface="Calibri" pitchFamily="34" charset="-122"/>
                 <a:cs typeface="Calibri" pitchFamily="34" charset="-120"/>
               </a:rPr>
-              <a:t>Word Labs  •  wordlabs.app  •  Root: 'friend' = person who is liked</a:t>
+              <a:t>Word Labs  •  wordlabs.app  •  Root: 'friend' = person one likes and trusts</a:t>
             </a:r>
             <a:endParaRPr lang="en-US" sz="800" dirty="0"/>
           </a:p>
@@ -35978,7 +36224,7 @@
                 <a:ea typeface="Calibri" pitchFamily="34" charset="-122"/>
                 <a:cs typeface="Calibri" pitchFamily="34" charset="-120"/>
               </a:rPr>
-              <a:t>The core part of a word carrying its basic meaning. For example, 'friend' means 'person who is liked'.</a:t>
+              <a:t>The core part of a word carrying its basic meaning. For example, 'friend' means 'person one likes and trusts'.</a:t>
             </a:r>
             <a:endParaRPr lang="en-US" sz="1350" dirty="0"/>
           </a:p>
@@ -36598,7 +36844,7 @@
                 <a:ea typeface="Calibri" pitchFamily="34" charset="-122"/>
                 <a:cs typeface="Calibri" pitchFamily="34" charset="-120"/>
               </a:rPr>
-              <a:t>Word Labs  •  wordlabs.app  •  Root: 'friend' = person who is liked</a:t>
+              <a:t>Word Labs  •  wordlabs.app  •  Root: 'friend' = person one likes and trusts</a:t>
             </a:r>
             <a:endParaRPr lang="en-US" sz="800" dirty="0"/>
           </a:p>
@@ -36710,7 +36956,7 @@
                 <a:ea typeface="Calibri" pitchFamily="34" charset="-122"/>
                 <a:cs typeface="Calibri" pitchFamily="34" charset="-120"/>
               </a:rPr>
-              <a:t>1.  The word 'friendly' contains the root 'friend' plus the suffix '-ly'.</a:t>
+              <a:t>1.  The root 'friend' comes from the Greek word for love.</a:t>
             </a:r>
             <a:endParaRPr lang="en-US" sz="1300" dirty="0"/>
           </a:p>
@@ -36733,11 +36979,11 @@
             </a:avLst>
           </a:prstGeom>
           <a:solidFill>
-            <a:srgbClr val="DCFCE7"/>
-          </a:solidFill>
-          <a:ln w="12700">
-            <a:solidFill>
-              <a:srgbClr val="16A34A"/>
+            <a:srgbClr val="FEE2E2"/>
+          </a:solidFill>
+          <a:ln w="12700">
+            <a:solidFill>
+              <a:srgbClr val="DC2626"/>
             </a:solidFill>
             <a:prstDash val="solid"/>
           </a:ln>
@@ -36770,13 +37016,13 @@
             <a:r>
               <a:rPr lang="en-US" sz="1100" b="1" dirty="0">
                 <a:solidFill>
-                  <a:srgbClr val="16A34A"/>
+                  <a:srgbClr val="DC2626"/>
                 </a:solidFill>
                 <a:latin typeface="Trebuchet MS" pitchFamily="34" charset="0"/>
                 <a:ea typeface="Trebuchet MS" pitchFamily="34" charset="-122"/>
                 <a:cs typeface="Trebuchet MS" pitchFamily="34" charset="-120"/>
               </a:rPr>
-              <a:t>TRUE</a:t>
+              <a:t>FALSE</a:t>
             </a:r>
             <a:endParaRPr lang="en-US" sz="1100" dirty="0"/>
           </a:p>
@@ -36849,7 +37095,7 @@
                 <a:ea typeface="Calibri" pitchFamily="34" charset="-122"/>
                 <a:cs typeface="Calibri" pitchFamily="34" charset="-120"/>
               </a:rPr>
-              <a:t>2.  The word 'friendship' means having no friends.</a:t>
+              <a:t>2.  The word 'friendly' contains the root 'friend'.</a:t>
             </a:r>
             <a:endParaRPr lang="en-US" sz="1300" dirty="0"/>
           </a:p>
@@ -36872,11 +37118,11 @@
             </a:avLst>
           </a:prstGeom>
           <a:solidFill>
-            <a:srgbClr val="FEE2E2"/>
-          </a:solidFill>
-          <a:ln w="12700">
-            <a:solidFill>
-              <a:srgbClr val="DC2626"/>
+            <a:srgbClr val="DCFCE7"/>
+          </a:solidFill>
+          <a:ln w="12700">
+            <a:solidFill>
+              <a:srgbClr val="16A34A"/>
             </a:solidFill>
             <a:prstDash val="solid"/>
           </a:ln>
@@ -36909,13 +37155,13 @@
             <a:r>
               <a:rPr lang="en-US" sz="1100" b="1" dirty="0">
                 <a:solidFill>
-                  <a:srgbClr val="DC2626"/>
+                  <a:srgbClr val="16A34A"/>
                 </a:solidFill>
                 <a:latin typeface="Trebuchet MS" pitchFamily="34" charset="0"/>
                 <a:ea typeface="Trebuchet MS" pitchFamily="34" charset="-122"/>
                 <a:cs typeface="Trebuchet MS" pitchFamily="34" charset="-120"/>
               </a:rPr>
-              <a:t>FALSE</a:t>
+              <a:t>TRUE</a:t>
             </a:r>
             <a:endParaRPr lang="en-US" sz="1100" dirty="0"/>
           </a:p>
@@ -36988,7 +37234,7 @@
                 <a:ea typeface="Calibri" pitchFamily="34" charset="-122"/>
                 <a:cs typeface="Calibri" pitchFamily="34" charset="-120"/>
               </a:rPr>
-              <a:t>3.  Adding the prefix 'un-' to 'friendly' makes it mean the opposite.</a:t>
+              <a:t>3.  'Friendship' uses the suffix '-ship' to show a state or condition.</a:t>
             </a:r>
             <a:endParaRPr lang="en-US" sz="1300" dirty="0"/>
           </a:p>
@@ -37127,7 +37373,7 @@
                 <a:ea typeface="Calibri" pitchFamily="34" charset="-122"/>
                 <a:cs typeface="Calibri" pitchFamily="34" charset="-120"/>
               </a:rPr>
-              <a:t>4.  The word 'befriend' means to become a friend to someone.</a:t>
+              <a:t>4.  'Friendless' means having too many friends.</a:t>
             </a:r>
             <a:endParaRPr lang="en-US" sz="1300" dirty="0"/>
           </a:p>
@@ -37150,11 +37396,11 @@
             </a:avLst>
           </a:prstGeom>
           <a:solidFill>
-            <a:srgbClr val="DCFCE7"/>
-          </a:solidFill>
-          <a:ln w="12700">
-            <a:solidFill>
-              <a:srgbClr val="16A34A"/>
+            <a:srgbClr val="FEE2E2"/>
+          </a:solidFill>
+          <a:ln w="12700">
+            <a:solidFill>
+              <a:srgbClr val="DC2626"/>
             </a:solidFill>
             <a:prstDash val="solid"/>
           </a:ln>
@@ -37187,13 +37433,13 @@
             <a:r>
               <a:rPr lang="en-US" sz="1100" b="1" dirty="0">
                 <a:solidFill>
-                  <a:srgbClr val="16A34A"/>
+                  <a:srgbClr val="DC2626"/>
                 </a:solidFill>
                 <a:latin typeface="Trebuchet MS" pitchFamily="34" charset="0"/>
                 <a:ea typeface="Trebuchet MS" pitchFamily="34" charset="-122"/>
                 <a:cs typeface="Trebuchet MS" pitchFamily="34" charset="-120"/>
               </a:rPr>
-              <a:t>TRUE</a:t>
+              <a:t>FALSE</a:t>
             </a:r>
             <a:endParaRPr lang="en-US" sz="1100" dirty="0"/>
           </a:p>
@@ -37266,7 +37512,7 @@
                 <a:ea typeface="Calibri" pitchFamily="34" charset="-122"/>
                 <a:cs typeface="Calibri" pitchFamily="34" charset="-120"/>
               </a:rPr>
-              <a:t>5.  The suffix '-less' in 'friendless' means full of friends.</a:t>
+              <a:t>5.  'Unfriendly' uses the prefix 'un' to mean 'not friendly'.</a:t>
             </a:r>
             <a:endParaRPr lang="en-US" sz="1300" dirty="0"/>
           </a:p>
@@ -37289,11 +37535,11 @@
             </a:avLst>
           </a:prstGeom>
           <a:solidFill>
-            <a:srgbClr val="FEE2E2"/>
-          </a:solidFill>
-          <a:ln w="12700">
-            <a:solidFill>
-              <a:srgbClr val="DC2626"/>
+            <a:srgbClr val="DCFCE7"/>
+          </a:solidFill>
+          <a:ln w="12700">
+            <a:solidFill>
+              <a:srgbClr val="16A34A"/>
             </a:solidFill>
             <a:prstDash val="solid"/>
           </a:ln>
@@ -37326,13 +37572,13 @@
             <a:r>
               <a:rPr lang="en-US" sz="1100" b="1" dirty="0">
                 <a:solidFill>
-                  <a:srgbClr val="DC2626"/>
+                  <a:srgbClr val="16A34A"/>
                 </a:solidFill>
                 <a:latin typeface="Trebuchet MS" pitchFamily="34" charset="0"/>
                 <a:ea typeface="Trebuchet MS" pitchFamily="34" charset="-122"/>
                 <a:cs typeface="Trebuchet MS" pitchFamily="34" charset="-120"/>
               </a:rPr>
-              <a:t>FALSE</a:t>
+              <a:t>TRUE</a:t>
             </a:r>
             <a:endParaRPr lang="en-US" sz="1100" dirty="0"/>
           </a:p>
@@ -37624,7 +37870,7 @@
                 <a:ea typeface="Calibri" pitchFamily="34" charset="-122"/>
                 <a:cs typeface="Calibri" pitchFamily="34" charset="-120"/>
               </a:rPr>
-              <a:t>Word Labs  •  wordlabs.app  •  Root: 'friend' = person who is liked</a:t>
+              <a:t>Word Labs  •  wordlabs.app  •  Root: 'friend' = person one likes and trusts</a:t>
             </a:r>
             <a:endParaRPr lang="en-US" sz="800" dirty="0"/>
           </a:p>
@@ -37761,7 +38007,7 @@
                 <a:ea typeface="Trebuchet MS" pitchFamily="34" charset="-122"/>
                 <a:cs typeface="Trebuchet MS" pitchFamily="34" charset="-120"/>
               </a:rPr>
-              <a:t>person who is liked</a:t>
+              <a:t>person one likes and trusts</a:t>
             </a:r>
             <a:endParaRPr lang="en-US" sz="2000" dirty="0"/>
           </a:p>
@@ -38235,7 +38481,7 @@
                 <a:ea typeface="Trebuchet MS" pitchFamily="34" charset="-122"/>
                 <a:cs typeface="Trebuchet MS" pitchFamily="34" charset="-120"/>
               </a:rPr>
-              <a:t>befriended</a:t>
+              <a:t>friends</a:t>
             </a:r>
             <a:endParaRPr lang="en-US" sz="1300" dirty="0"/>
           </a:p>
@@ -38301,7 +38547,7 @@
                 <a:ea typeface="Trebuchet MS" pitchFamily="34" charset="-122"/>
                 <a:cs typeface="Trebuchet MS" pitchFamily="34" charset="-120"/>
               </a:rPr>
-              <a:t>friends</a:t>
+              <a:t>friendliness</a:t>
             </a:r>
             <a:endParaRPr lang="en-US" sz="1300" dirty="0"/>
           </a:p>
@@ -38593,7 +38839,7 @@
                 <a:ea typeface="Calibri" pitchFamily="34" charset="-122"/>
                 <a:cs typeface="Calibri" pitchFamily="34" charset="-120"/>
               </a:rPr>
-              <a:t>Word Labs  •  wordlabs.app  •  Root: 'friend' = person who is liked</a:t>
+              <a:t>Word Labs  •  wordlabs.app  •  Root: 'friend' = person one likes and trusts</a:t>
             </a:r>
             <a:endParaRPr lang="en-US" sz="800" dirty="0"/>
           </a:p>
@@ -39545,7 +39791,7 @@
                 <a:ea typeface="Trebuchet MS" pitchFamily="34" charset="-122"/>
                 <a:cs typeface="Trebuchet MS" pitchFamily="34" charset="-120"/>
               </a:rPr>
-              <a:t>pen-</a:t>
+              <a:t>eco-</a:t>
             </a:r>
             <a:endParaRPr lang="en-US" sz="1300" dirty="0"/>
           </a:p>
@@ -40367,7 +40613,7 @@
                 <a:ea typeface="Calibri" pitchFamily="34" charset="-122"/>
                 <a:cs typeface="Calibri" pitchFamily="34" charset="-120"/>
               </a:rPr>
-              <a:t>Word Labs  •  wordlabs.app  •  Root: 'friend' = person who is liked</a:t>
+              <a:t>Word Labs  •  wordlabs.app  •  Root: 'friend' = person one likes and trusts</a:t>
             </a:r>
             <a:endParaRPr lang="en-US" sz="800" dirty="0"/>
           </a:p>
@@ -40545,7 +40791,7 @@
                 <a:ea typeface="Calibri" pitchFamily="34" charset="-122"/>
                 <a:cs typeface="Calibri" pitchFamily="34" charset="-120"/>
               </a:rPr>
-              <a:t>Being kind and pleasant towards other people.</a:t>
+              <a:t>Acting in a kind and pleasant way toward others.</a:t>
             </a:r>
             <a:endParaRPr lang="en-US" sz="1200" dirty="0"/>
           </a:p>
@@ -40684,7 +40930,7 @@
                 <a:ea typeface="Calibri" pitchFamily="34" charset="-122"/>
                 <a:cs typeface="Calibri" pitchFamily="34" charset="-120"/>
               </a:rPr>
-              <a:t>To become someone's friend and be kind to them.</a:t>
+              <a:t>To act as a friend to someone; to become someone's friend.</a:t>
             </a:r>
             <a:endParaRPr lang="en-US" sz="1200" dirty="0"/>
           </a:p>
@@ -40823,7 +41069,7 @@
                 <a:ea typeface="Calibri" pitchFamily="34" charset="-122"/>
                 <a:cs typeface="Calibri" pitchFamily="34" charset="-120"/>
               </a:rPr>
-              <a:t>Having no friends at all.</a:t>
+              <a:t>Having no friends; being alone without companions.</a:t>
             </a:r>
             <a:endParaRPr lang="en-US" sz="1200" dirty="0"/>
           </a:p>
@@ -40962,7 +41208,7 @@
                 <a:ea typeface="Calibri" pitchFamily="34" charset="-122"/>
                 <a:cs typeface="Calibri" pitchFamily="34" charset="-120"/>
               </a:rPr>
-              <a:t>Not kind or welcoming towards other people.</a:t>
+              <a:t>Not kind or welcoming; cold or rude toward others.</a:t>
             </a:r>
             <a:endParaRPr lang="en-US" sz="1200" dirty="0"/>
           </a:p>
@@ -41101,7 +41347,7 @@
                 <a:ea typeface="Calibri" pitchFamily="34" charset="-122"/>
                 <a:cs typeface="Calibri" pitchFamily="34" charset="-120"/>
               </a:rPr>
-              <a:t>More than one person you like and enjoy spending time with.</a:t>
+              <a:t>The quality of being warm, kind, and easy to get along with.</a:t>
             </a:r>
             <a:endParaRPr lang="en-US" sz="1200" dirty="0"/>
           </a:p>
@@ -41174,7 +41420,7 @@
                 <a:ea typeface="Trebuchet MS" pitchFamily="34" charset="-122"/>
                 <a:cs typeface="Trebuchet MS" pitchFamily="34" charset="-120"/>
               </a:rPr>
-              <a:t>befriended</a:t>
+              <a:t>friends</a:t>
             </a:r>
             <a:endParaRPr lang="en-US" sz="1200" dirty="0"/>
           </a:p>
@@ -41240,7 +41486,7 @@
                 <a:ea typeface="Calibri" pitchFamily="34" charset="-122"/>
                 <a:cs typeface="Calibri" pitchFamily="34" charset="-120"/>
               </a:rPr>
-              <a:t>Became a friend to someone and helped them feel welcome.</a:t>
+              <a:t>More than one person you like and trust.</a:t>
             </a:r>
             <a:endParaRPr lang="en-US" sz="1200" dirty="0"/>
           </a:p>
@@ -41313,7 +41559,7 @@
                 <a:ea typeface="Trebuchet MS" pitchFamily="34" charset="-122"/>
                 <a:cs typeface="Trebuchet MS" pitchFamily="34" charset="-120"/>
               </a:rPr>
-              <a:t>friends</a:t>
+              <a:t>friendliness</a:t>
             </a:r>
             <a:endParaRPr lang="en-US" sz="1200" dirty="0"/>
           </a:p>
@@ -41671,7 +41917,7 @@
                 <a:ea typeface="Calibri" pitchFamily="34" charset="-122"/>
                 <a:cs typeface="Calibri" pitchFamily="34" charset="-120"/>
               </a:rPr>
-              <a:t>Word Labs  •  wordlabs.app  •  Root: 'friend' = person who is liked</a:t>
+              <a:t>Word Labs  •  wordlabs.app  •  Root: 'friend' = person one likes and trusts</a:t>
             </a:r>
             <a:endParaRPr lang="en-US" sz="800" dirty="0"/>
           </a:p>
@@ -41874,7 +42120,7 @@
                 <a:ea typeface="Calibri" pitchFamily="34" charset="-122"/>
                 <a:cs typeface="Calibri" pitchFamily="34" charset="-120"/>
               </a:rPr>
-              <a:t>Our new classmate was so friendly that everyone wanted to sit with her at lunch.</a:t>
+              <a:t>Maya showed great friendliness when she welcomed the new student and showed her around the school.</a:t>
             </a:r>
             <a:endParaRPr lang="en-US" sz="1500" dirty="0"/>
           </a:p>
@@ -42038,7 +42284,7 @@
                 <a:ea typeface="Calibri" pitchFamily="34" charset="-122"/>
                 <a:cs typeface="Calibri" pitchFamily="34" charset="-120"/>
               </a:rPr>
-              <a:t>The friendship between the two boys had lasted since they were in kindergarten.</a:t>
+              <a:t>The two boys had a strong friendship that lasted all the way through primary school.</a:t>
             </a:r>
             <a:endParaRPr lang="en-US" sz="1500" dirty="0"/>
           </a:p>
@@ -42202,7 +42448,7 @@
                 <a:ea typeface="Calibri" pitchFamily="34" charset="-122"/>
                 <a:cs typeface="Calibri" pitchFamily="34" charset="-120"/>
               </a:rPr>
-              <a:t>It can feel lonely and difficult when someone is feeling friendless at a new school.</a:t>
+              <a:t>It is important to befriend someone who looks lonely in the playground.</a:t>
             </a:r>
             <a:endParaRPr lang="en-US" sz="1500" dirty="0"/>
           </a:p>

--- a/output/wordlabs-friend-3day.pptx
+++ b/output/wordlabs-friend-3day.pptx
@@ -21971,11 +21971,11 @@
         <p:spPr>
           <a:xfrm>
             <a:off x="1874520" y="4096512"/>
-            <a:ext cx="6903720" cy="804672"/>
+            <a:ext cx="6903720" cy="658368"/>
           </a:xfrm>
           <a:prstGeom prst="rect">
             <a:avLst>
-              <a:gd name="adj" fmla="val 6818"/>
+              <a:gd name="adj" fmla="val 8333"/>
             </a:avLst>
           </a:prstGeom>
           <a:solidFill>
@@ -21997,12 +21997,12 @@
         </p:nvSpPr>
         <p:spPr>
           <a:xfrm>
-            <a:off x="2023872" y="4169664"/>
-            <a:ext cx="685800" cy="384048"/>
+            <a:off x="1951330" y="4169664"/>
+            <a:ext cx="676656" cy="475488"/>
           </a:xfrm>
           <a:prstGeom prst="rect">
             <a:avLst>
-              <a:gd name="adj" fmla="val 9524"/>
+              <a:gd name="adj" fmla="val 7692"/>
             </a:avLst>
           </a:prstGeom>
           <a:solidFill>
@@ -22024,8 +22024,8 @@
         </p:nvSpPr>
         <p:spPr>
           <a:xfrm>
-            <a:off x="2023872" y="4169664"/>
-            <a:ext cx="685800" cy="384048"/>
+            <a:off x="1951330" y="4169664"/>
+            <a:ext cx="676656" cy="475488"/>
           </a:xfrm>
           <a:prstGeom prst="rect">
             <a:avLst/>
@@ -22063,12 +22063,12 @@
         </p:nvSpPr>
         <p:spPr>
           <a:xfrm>
-            <a:off x="2831592" y="4169664"/>
-            <a:ext cx="685800" cy="384048"/>
+            <a:off x="2677363" y="4169664"/>
+            <a:ext cx="676656" cy="475488"/>
           </a:xfrm>
           <a:prstGeom prst="rect">
             <a:avLst>
-              <a:gd name="adj" fmla="val 9524"/>
+              <a:gd name="adj" fmla="val 7692"/>
             </a:avLst>
           </a:prstGeom>
           <a:solidFill>
@@ -22090,8 +22090,8 @@
         </p:nvSpPr>
         <p:spPr>
           <a:xfrm>
-            <a:off x="2831592" y="4169664"/>
-            <a:ext cx="685800" cy="384048"/>
+            <a:off x="2677363" y="4169664"/>
+            <a:ext cx="676656" cy="475488"/>
           </a:xfrm>
           <a:prstGeom prst="rect">
             <a:avLst/>
@@ -22129,12 +22129,12 @@
         </p:nvSpPr>
         <p:spPr>
           <a:xfrm>
-            <a:off x="3639312" y="4169664"/>
-            <a:ext cx="685800" cy="384048"/>
+            <a:off x="3403397" y="4169664"/>
+            <a:ext cx="676656" cy="475488"/>
           </a:xfrm>
           <a:prstGeom prst="rect">
             <a:avLst>
-              <a:gd name="adj" fmla="val 9524"/>
+              <a:gd name="adj" fmla="val 7692"/>
             </a:avLst>
           </a:prstGeom>
           <a:solidFill>
@@ -22156,8 +22156,8 @@
         </p:nvSpPr>
         <p:spPr>
           <a:xfrm>
-            <a:off x="3639312" y="4169664"/>
-            <a:ext cx="685800" cy="384048"/>
+            <a:off x="3403397" y="4169664"/>
+            <a:ext cx="676656" cy="475488"/>
           </a:xfrm>
           <a:prstGeom prst="rect">
             <a:avLst/>
@@ -22181,7 +22181,7 @@
                 <a:ea typeface="Trebuchet MS" pitchFamily="34" charset="-122"/>
                 <a:cs typeface="Trebuchet MS" pitchFamily="34" charset="-120"/>
               </a:rPr>
-              <a:t>fr</a:t>
+              <a:t>f</a:t>
             </a:r>
             <a:endParaRPr lang="en-US" sz="900" dirty="0"/>
           </a:p>
@@ -22195,12 +22195,12 @@
         </p:nvSpPr>
         <p:spPr>
           <a:xfrm>
-            <a:off x="4447032" y="4169664"/>
-            <a:ext cx="685800" cy="384048"/>
+            <a:off x="4129430" y="4169664"/>
+            <a:ext cx="676656" cy="475488"/>
           </a:xfrm>
           <a:prstGeom prst="rect">
             <a:avLst>
-              <a:gd name="adj" fmla="val 9524"/>
+              <a:gd name="adj" fmla="val 7692"/>
             </a:avLst>
           </a:prstGeom>
           <a:solidFill>
@@ -22222,8 +22222,8 @@
         </p:nvSpPr>
         <p:spPr>
           <a:xfrm>
-            <a:off x="4447032" y="4169664"/>
-            <a:ext cx="685800" cy="384048"/>
+            <a:off x="4129430" y="4169664"/>
+            <a:ext cx="676656" cy="475488"/>
           </a:xfrm>
           <a:prstGeom prst="rect">
             <a:avLst/>
@@ -22247,7 +22247,7 @@
                 <a:ea typeface="Trebuchet MS" pitchFamily="34" charset="-122"/>
                 <a:cs typeface="Trebuchet MS" pitchFamily="34" charset="-120"/>
               </a:rPr>
-              <a:t>ie</a:t>
+              <a:t>r</a:t>
             </a:r>
             <a:endParaRPr lang="en-US" sz="900" dirty="0"/>
           </a:p>
@@ -22261,12 +22261,12 @@
         </p:nvSpPr>
         <p:spPr>
           <a:xfrm>
-            <a:off x="5254752" y="4169664"/>
-            <a:ext cx="685800" cy="384048"/>
+            <a:off x="4855464" y="4169664"/>
+            <a:ext cx="676656" cy="475488"/>
           </a:xfrm>
           <a:prstGeom prst="rect">
             <a:avLst>
-              <a:gd name="adj" fmla="val 9524"/>
+              <a:gd name="adj" fmla="val 7692"/>
             </a:avLst>
           </a:prstGeom>
           <a:solidFill>
@@ -22288,8 +22288,8 @@
         </p:nvSpPr>
         <p:spPr>
           <a:xfrm>
-            <a:off x="5254752" y="4169664"/>
-            <a:ext cx="685800" cy="384048"/>
+            <a:off x="4855464" y="4169664"/>
+            <a:ext cx="676656" cy="475488"/>
           </a:xfrm>
           <a:prstGeom prst="rect">
             <a:avLst/>
@@ -22313,7 +22313,7 @@
                 <a:ea typeface="Trebuchet MS" pitchFamily="34" charset="-122"/>
                 <a:cs typeface="Trebuchet MS" pitchFamily="34" charset="-120"/>
               </a:rPr>
-              <a:t>n</a:t>
+              <a:t>ie</a:t>
             </a:r>
             <a:endParaRPr lang="en-US" sz="900" dirty="0"/>
           </a:p>
@@ -22327,12 +22327,12 @@
         </p:nvSpPr>
         <p:spPr>
           <a:xfrm>
-            <a:off x="6062472" y="4169664"/>
-            <a:ext cx="685800" cy="384048"/>
+            <a:off x="5581498" y="4169664"/>
+            <a:ext cx="676656" cy="475488"/>
           </a:xfrm>
           <a:prstGeom prst="rect">
             <a:avLst>
-              <a:gd name="adj" fmla="val 9524"/>
+              <a:gd name="adj" fmla="val 7692"/>
             </a:avLst>
           </a:prstGeom>
           <a:solidFill>
@@ -22354,8 +22354,8 @@
         </p:nvSpPr>
         <p:spPr>
           <a:xfrm>
-            <a:off x="6062472" y="4169664"/>
-            <a:ext cx="685800" cy="384048"/>
+            <a:off x="5581498" y="4169664"/>
+            <a:ext cx="676656" cy="475488"/>
           </a:xfrm>
           <a:prstGeom prst="rect">
             <a:avLst/>
@@ -22379,7 +22379,7 @@
                 <a:ea typeface="Trebuchet MS" pitchFamily="34" charset="-122"/>
                 <a:cs typeface="Trebuchet MS" pitchFamily="34" charset="-120"/>
               </a:rPr>
-              <a:t>d</a:t>
+              <a:t>n</a:t>
             </a:r>
             <a:endParaRPr lang="en-US" sz="900" dirty="0"/>
           </a:p>
@@ -22393,12 +22393,12 @@
         </p:nvSpPr>
         <p:spPr>
           <a:xfrm>
-            <a:off x="6870192" y="4169664"/>
-            <a:ext cx="685800" cy="384048"/>
+            <a:off x="6307531" y="4169664"/>
+            <a:ext cx="676656" cy="475488"/>
           </a:xfrm>
           <a:prstGeom prst="rect">
             <a:avLst>
-              <a:gd name="adj" fmla="val 9524"/>
+              <a:gd name="adj" fmla="val 7692"/>
             </a:avLst>
           </a:prstGeom>
           <a:solidFill>
@@ -22420,8 +22420,8 @@
         </p:nvSpPr>
         <p:spPr>
           <a:xfrm>
-            <a:off x="6870192" y="4169664"/>
-            <a:ext cx="685800" cy="384048"/>
+            <a:off x="6307531" y="4169664"/>
+            <a:ext cx="676656" cy="475488"/>
           </a:xfrm>
           <a:prstGeom prst="rect">
             <a:avLst/>
@@ -22445,7 +22445,7 @@
                 <a:ea typeface="Trebuchet MS" pitchFamily="34" charset="-122"/>
                 <a:cs typeface="Trebuchet MS" pitchFamily="34" charset="-120"/>
               </a:rPr>
-              <a:t>l</a:t>
+              <a:t>d</a:t>
             </a:r>
             <a:endParaRPr lang="en-US" sz="900" dirty="0"/>
           </a:p>
@@ -22459,12 +22459,12 @@
         </p:nvSpPr>
         <p:spPr>
           <a:xfrm>
-            <a:off x="7677912" y="4169664"/>
-            <a:ext cx="685800" cy="384048"/>
+            <a:off x="7033565" y="4169664"/>
+            <a:ext cx="676656" cy="475488"/>
           </a:xfrm>
           <a:prstGeom prst="rect">
             <a:avLst>
-              <a:gd name="adj" fmla="val 9524"/>
+              <a:gd name="adj" fmla="val 7692"/>
             </a:avLst>
           </a:prstGeom>
           <a:solidFill>
@@ -22486,8 +22486,8 @@
         </p:nvSpPr>
         <p:spPr>
           <a:xfrm>
-            <a:off x="7677912" y="4169664"/>
-            <a:ext cx="685800" cy="384048"/>
+            <a:off x="7033565" y="4169664"/>
+            <a:ext cx="676656" cy="475488"/>
           </a:xfrm>
           <a:prstGeom prst="rect">
             <a:avLst/>
@@ -22511,7 +22511,7 @@
                 <a:ea typeface="Trebuchet MS" pitchFamily="34" charset="-122"/>
                 <a:cs typeface="Trebuchet MS" pitchFamily="34" charset="-120"/>
               </a:rPr>
-              <a:t>ee</a:t>
+              <a:t>l</a:t>
             </a:r>
             <a:endParaRPr lang="en-US" sz="900" dirty="0"/>
           </a:p>
@@ -22519,40 +22519,67 @@
       </p:sp>
       <p:sp>
         <p:nvSpPr>
-          <p:cNvPr id="55" name="Text 53"/>
-          <p:cNvSpPr/>
-          <p:nvPr/>
-        </p:nvSpPr>
-        <p:spPr>
-          <a:xfrm>
-            <a:off x="7677912" y="4572000"/>
-            <a:ext cx="685800" cy="219456"/>
-          </a:xfrm>
-          <a:prstGeom prst="rect">
-            <a:avLst/>
-          </a:prstGeom>
-          <a:noFill/>
-          <a:ln/>
-        </p:spPr>
-        <p:txBody>
-          <a:bodyPr wrap="square" lIns="0" tIns="0" rIns="0" bIns="0" rtlCol="0" anchor="t"/>
-          <a:lstStyle/>
-          <a:p>
-            <a:pPr algn="ctr" indent="0" marL="0">
-              <a:buNone/>
-            </a:pPr>
-            <a:r>
-              <a:rPr lang="en-US" sz="750" i="1" dirty="0">
-                <a:solidFill>
-                  <a:srgbClr val="94A3B8"/>
-                </a:solidFill>
-                <a:latin typeface="Calibri" pitchFamily="34" charset="0"/>
-                <a:ea typeface="Calibri" pitchFamily="34" charset="-122"/>
-                <a:cs typeface="Calibri" pitchFamily="34" charset="-120"/>
-              </a:rPr>
-              <a:t>/ee/</a:t>
-            </a:r>
-            <a:endParaRPr lang="en-US" sz="750" dirty="0"/>
+          <p:cNvPr id="55" name="Shape 53"/>
+          <p:cNvSpPr/>
+          <p:nvPr/>
+        </p:nvSpPr>
+        <p:spPr>
+          <a:xfrm>
+            <a:off x="7759598" y="4169664"/>
+            <a:ext cx="676656" cy="475488"/>
+          </a:xfrm>
+          <a:prstGeom prst="rect">
+            <a:avLst>
+              <a:gd name="adj" fmla="val 7692"/>
+            </a:avLst>
+          </a:prstGeom>
+          <a:solidFill>
+            <a:srgbClr val="FFFFFF"/>
+          </a:solidFill>
+          <a:ln w="12700">
+            <a:solidFill>
+              <a:srgbClr val="DB2777"/>
+            </a:solidFill>
+            <a:prstDash val="solid"/>
+          </a:ln>
+        </p:spPr>
+      </p:sp>
+      <p:sp>
+        <p:nvSpPr>
+          <p:cNvPr id="56" name="Text 54"/>
+          <p:cNvSpPr/>
+          <p:nvPr/>
+        </p:nvSpPr>
+        <p:spPr>
+          <a:xfrm>
+            <a:off x="7759598" y="4169664"/>
+            <a:ext cx="676656" cy="475488"/>
+          </a:xfrm>
+          <a:prstGeom prst="rect">
+            <a:avLst/>
+          </a:prstGeom>
+          <a:noFill/>
+          <a:ln/>
+        </p:spPr>
+        <p:txBody>
+          <a:bodyPr wrap="square" lIns="0" tIns="0" rIns="0" bIns="0" rtlCol="0" anchor="ctr"/>
+          <a:lstStyle/>
+          <a:p>
+            <a:pPr algn="ctr" indent="0" marL="0">
+              <a:buNone/>
+            </a:pPr>
+            <a:r>
+              <a:rPr lang="en-US" sz="900" b="1" dirty="0">
+                <a:solidFill>
+                  <a:srgbClr val="9D174D"/>
+                </a:solidFill>
+                <a:latin typeface="Trebuchet MS" pitchFamily="34" charset="0"/>
+                <a:ea typeface="Trebuchet MS" pitchFamily="34" charset="-122"/>
+                <a:cs typeface="Trebuchet MS" pitchFamily="34" charset="-120"/>
+              </a:rPr>
+              <a:t>y</a:t>
+            </a:r>
+            <a:endParaRPr lang="en-US" sz="900" dirty="0"/>
           </a:p>
         </p:txBody>
       </p:sp>
@@ -32318,11 +32345,11 @@
         <p:spPr>
           <a:xfrm>
             <a:off x="1874520" y="4096512"/>
-            <a:ext cx="6903720" cy="804672"/>
+            <a:ext cx="6903720" cy="658368"/>
           </a:xfrm>
           <a:prstGeom prst="rect">
             <a:avLst>
-              <a:gd name="adj" fmla="val 6818"/>
+              <a:gd name="adj" fmla="val 8333"/>
             </a:avLst>
           </a:prstGeom>
           <a:solidFill>
@@ -32344,12 +32371,12 @@
         </p:nvSpPr>
         <p:spPr>
           <a:xfrm>
-            <a:off x="2427732" y="4169664"/>
-            <a:ext cx="685800" cy="384048"/>
+            <a:off x="2254649" y="4169664"/>
+            <a:ext cx="685800" cy="475488"/>
           </a:xfrm>
           <a:prstGeom prst="rect">
             <a:avLst>
-              <a:gd name="adj" fmla="val 9524"/>
+              <a:gd name="adj" fmla="val 7692"/>
             </a:avLst>
           </a:prstGeom>
           <a:solidFill>
@@ -32371,8 +32398,8 @@
         </p:nvSpPr>
         <p:spPr>
           <a:xfrm>
-            <a:off x="2427732" y="4169664"/>
-            <a:ext cx="685800" cy="384048"/>
+            <a:off x="2254649" y="4169664"/>
+            <a:ext cx="685800" cy="475488"/>
           </a:xfrm>
           <a:prstGeom prst="rect">
             <a:avLst/>
@@ -32396,7 +32423,7 @@
                 <a:ea typeface="Trebuchet MS" pitchFamily="34" charset="-122"/>
                 <a:cs typeface="Trebuchet MS" pitchFamily="34" charset="-120"/>
               </a:rPr>
-              <a:t>fr</a:t>
+              <a:t>f</a:t>
             </a:r>
             <a:endParaRPr lang="en-US" sz="900" dirty="0"/>
           </a:p>
@@ -32410,12 +32437,12 @@
         </p:nvSpPr>
         <p:spPr>
           <a:xfrm>
-            <a:off x="3639312" y="4169664"/>
-            <a:ext cx="685800" cy="384048"/>
+            <a:off x="3293146" y="4169664"/>
+            <a:ext cx="685800" cy="475488"/>
           </a:xfrm>
           <a:prstGeom prst="rect">
             <a:avLst>
-              <a:gd name="adj" fmla="val 9524"/>
+              <a:gd name="adj" fmla="val 7692"/>
             </a:avLst>
           </a:prstGeom>
           <a:solidFill>
@@ -32437,8 +32464,8 @@
         </p:nvSpPr>
         <p:spPr>
           <a:xfrm>
-            <a:off x="3639312" y="4169664"/>
-            <a:ext cx="685800" cy="384048"/>
+            <a:off x="3293146" y="4169664"/>
+            <a:ext cx="685800" cy="475488"/>
           </a:xfrm>
           <a:prstGeom prst="rect">
             <a:avLst/>
@@ -32462,7 +32489,7 @@
                 <a:ea typeface="Trebuchet MS" pitchFamily="34" charset="-122"/>
                 <a:cs typeface="Trebuchet MS" pitchFamily="34" charset="-120"/>
               </a:rPr>
-              <a:t>ie</a:t>
+              <a:t>r</a:t>
             </a:r>
             <a:endParaRPr lang="en-US" sz="900" dirty="0"/>
           </a:p>
@@ -32476,12 +32503,12 @@
         </p:nvSpPr>
         <p:spPr>
           <a:xfrm>
-            <a:off x="4850892" y="4169664"/>
-            <a:ext cx="685800" cy="384048"/>
+            <a:off x="4331643" y="4169664"/>
+            <a:ext cx="685800" cy="475488"/>
           </a:xfrm>
           <a:prstGeom prst="rect">
             <a:avLst>
-              <a:gd name="adj" fmla="val 9524"/>
+              <a:gd name="adj" fmla="val 7692"/>
             </a:avLst>
           </a:prstGeom>
           <a:solidFill>
@@ -32503,8 +32530,8 @@
         </p:nvSpPr>
         <p:spPr>
           <a:xfrm>
-            <a:off x="4850892" y="4169664"/>
-            <a:ext cx="685800" cy="384048"/>
+            <a:off x="4331643" y="4169664"/>
+            <a:ext cx="685800" cy="475488"/>
           </a:xfrm>
           <a:prstGeom prst="rect">
             <a:avLst/>
@@ -32528,7 +32555,7 @@
                 <a:ea typeface="Trebuchet MS" pitchFamily="34" charset="-122"/>
                 <a:cs typeface="Trebuchet MS" pitchFamily="34" charset="-120"/>
               </a:rPr>
-              <a:t>n</a:t>
+              <a:t>ie</a:t>
             </a:r>
             <a:endParaRPr lang="en-US" sz="900" dirty="0"/>
           </a:p>
@@ -32542,12 +32569,12 @@
         </p:nvSpPr>
         <p:spPr>
           <a:xfrm>
-            <a:off x="6062472" y="4169664"/>
-            <a:ext cx="685800" cy="384048"/>
+            <a:off x="5370141" y="4169664"/>
+            <a:ext cx="685800" cy="475488"/>
           </a:xfrm>
           <a:prstGeom prst="rect">
             <a:avLst>
-              <a:gd name="adj" fmla="val 9524"/>
+              <a:gd name="adj" fmla="val 7692"/>
             </a:avLst>
           </a:prstGeom>
           <a:solidFill>
@@ -32569,8 +32596,8 @@
         </p:nvSpPr>
         <p:spPr>
           <a:xfrm>
-            <a:off x="6062472" y="4169664"/>
-            <a:ext cx="685800" cy="384048"/>
+            <a:off x="5370141" y="4169664"/>
+            <a:ext cx="685800" cy="475488"/>
           </a:xfrm>
           <a:prstGeom prst="rect">
             <a:avLst/>
@@ -32594,7 +32621,7 @@
                 <a:ea typeface="Trebuchet MS" pitchFamily="34" charset="-122"/>
                 <a:cs typeface="Trebuchet MS" pitchFamily="34" charset="-120"/>
               </a:rPr>
-              <a:t>d</a:t>
+              <a:t>n</a:t>
             </a:r>
             <a:endParaRPr lang="en-US" sz="900" dirty="0"/>
           </a:p>
@@ -32608,12 +32635,12 @@
         </p:nvSpPr>
         <p:spPr>
           <a:xfrm>
-            <a:off x="7274052" y="4169664"/>
-            <a:ext cx="685800" cy="384048"/>
+            <a:off x="6408638" y="4169664"/>
+            <a:ext cx="685800" cy="475488"/>
           </a:xfrm>
           <a:prstGeom prst="rect">
             <a:avLst>
-              <a:gd name="adj" fmla="val 9524"/>
+              <a:gd name="adj" fmla="val 7692"/>
             </a:avLst>
           </a:prstGeom>
           <a:solidFill>
@@ -32635,8 +32662,8 @@
         </p:nvSpPr>
         <p:spPr>
           <a:xfrm>
-            <a:off x="7274052" y="4169664"/>
-            <a:ext cx="685800" cy="384048"/>
+            <a:off x="6408638" y="4169664"/>
+            <a:ext cx="685800" cy="475488"/>
           </a:xfrm>
           <a:prstGeom prst="rect">
             <a:avLst/>
@@ -32660,7 +32687,7 @@
                 <a:ea typeface="Trebuchet MS" pitchFamily="34" charset="-122"/>
                 <a:cs typeface="Trebuchet MS" pitchFamily="34" charset="-120"/>
               </a:rPr>
-              <a:t>z</a:t>
+              <a:t>d</a:t>
             </a:r>
             <a:endParaRPr lang="en-US" sz="900" dirty="0"/>
           </a:p>
@@ -32668,40 +32695,67 @@
       </p:sp>
       <p:sp>
         <p:nvSpPr>
-          <p:cNvPr id="40" name="Text 38"/>
-          <p:cNvSpPr/>
-          <p:nvPr/>
-        </p:nvSpPr>
-        <p:spPr>
-          <a:xfrm>
-            <a:off x="7274052" y="4572000"/>
-            <a:ext cx="685800" cy="219456"/>
-          </a:xfrm>
-          <a:prstGeom prst="rect">
-            <a:avLst/>
-          </a:prstGeom>
-          <a:noFill/>
-          <a:ln/>
-        </p:spPr>
-        <p:txBody>
-          <a:bodyPr wrap="square" lIns="0" tIns="0" rIns="0" bIns="0" rtlCol="0" anchor="t"/>
-          <a:lstStyle/>
-          <a:p>
-            <a:pPr algn="ctr" indent="0" marL="0">
-              <a:buNone/>
-            </a:pPr>
-            <a:r>
-              <a:rPr lang="en-US" sz="750" i="1" dirty="0">
-                <a:solidFill>
-                  <a:srgbClr val="94A3B8"/>
-                </a:solidFill>
-                <a:latin typeface="Calibri" pitchFamily="34" charset="0"/>
-                <a:ea typeface="Calibri" pitchFamily="34" charset="-122"/>
-                <a:cs typeface="Calibri" pitchFamily="34" charset="-120"/>
-              </a:rPr>
-              <a:t>/z/</a:t>
-            </a:r>
-            <a:endParaRPr lang="en-US" sz="750" dirty="0"/>
+          <p:cNvPr id="40" name="Shape 38"/>
+          <p:cNvSpPr/>
+          <p:nvPr/>
+        </p:nvSpPr>
+        <p:spPr>
+          <a:xfrm>
+            <a:off x="7447135" y="4169664"/>
+            <a:ext cx="685800" cy="475488"/>
+          </a:xfrm>
+          <a:prstGeom prst="rect">
+            <a:avLst>
+              <a:gd name="adj" fmla="val 7692"/>
+            </a:avLst>
+          </a:prstGeom>
+          <a:solidFill>
+            <a:srgbClr val="FFFFFF"/>
+          </a:solidFill>
+          <a:ln w="12700">
+            <a:solidFill>
+              <a:srgbClr val="DB2777"/>
+            </a:solidFill>
+            <a:prstDash val="solid"/>
+          </a:ln>
+        </p:spPr>
+      </p:sp>
+      <p:sp>
+        <p:nvSpPr>
+          <p:cNvPr id="41" name="Text 39"/>
+          <p:cNvSpPr/>
+          <p:nvPr/>
+        </p:nvSpPr>
+        <p:spPr>
+          <a:xfrm>
+            <a:off x="7447135" y="4169664"/>
+            <a:ext cx="685800" cy="475488"/>
+          </a:xfrm>
+          <a:prstGeom prst="rect">
+            <a:avLst/>
+          </a:prstGeom>
+          <a:noFill/>
+          <a:ln/>
+        </p:spPr>
+        <p:txBody>
+          <a:bodyPr wrap="square" lIns="0" tIns="0" rIns="0" bIns="0" rtlCol="0" anchor="ctr"/>
+          <a:lstStyle/>
+          <a:p>
+            <a:pPr algn="ctr" indent="0" marL="0">
+              <a:buNone/>
+            </a:pPr>
+            <a:r>
+              <a:rPr lang="en-US" sz="900" b="1" dirty="0">
+                <a:solidFill>
+                  <a:srgbClr val="9D174D"/>
+                </a:solidFill>
+                <a:latin typeface="Trebuchet MS" pitchFamily="34" charset="0"/>
+                <a:ea typeface="Trebuchet MS" pitchFamily="34" charset="-122"/>
+                <a:cs typeface="Trebuchet MS" pitchFamily="34" charset="-120"/>
+              </a:rPr>
+              <a:t>s</a:t>
+            </a:r>
+            <a:endParaRPr lang="en-US" sz="900" dirty="0"/>
           </a:p>
         </p:txBody>
       </p:sp>
@@ -36956,7 +37010,7 @@
                 <a:ea typeface="Calibri" pitchFamily="34" charset="-122"/>
                 <a:cs typeface="Calibri" pitchFamily="34" charset="-120"/>
               </a:rPr>
-              <a:t>1.  The root 'friend' comes from the Greek word for love.</a:t>
+              <a:t>1.  'Friendship' uses the suffix '-ship' to show a state or condition.</a:t>
             </a:r>
             <a:endParaRPr lang="en-US" sz="1300" dirty="0"/>
           </a:p>
@@ -36979,11 +37033,11 @@
             </a:avLst>
           </a:prstGeom>
           <a:solidFill>
-            <a:srgbClr val="FEE2E2"/>
-          </a:solidFill>
-          <a:ln w="12700">
-            <a:solidFill>
-              <a:srgbClr val="DC2626"/>
+            <a:srgbClr val="DCFCE7"/>
+          </a:solidFill>
+          <a:ln w="12700">
+            <a:solidFill>
+              <a:srgbClr val="16A34A"/>
             </a:solidFill>
             <a:prstDash val="solid"/>
           </a:ln>
@@ -37016,13 +37070,13 @@
             <a:r>
               <a:rPr lang="en-US" sz="1100" b="1" dirty="0">
                 <a:solidFill>
-                  <a:srgbClr val="DC2626"/>
+                  <a:srgbClr val="16A34A"/>
                 </a:solidFill>
                 <a:latin typeface="Trebuchet MS" pitchFamily="34" charset="0"/>
                 <a:ea typeface="Trebuchet MS" pitchFamily="34" charset="-122"/>
                 <a:cs typeface="Trebuchet MS" pitchFamily="34" charset="-120"/>
               </a:rPr>
-              <a:t>FALSE</a:t>
+              <a:t>TRUE</a:t>
             </a:r>
             <a:endParaRPr lang="en-US" sz="1100" dirty="0"/>
           </a:p>
@@ -37234,7 +37288,7 @@
                 <a:ea typeface="Calibri" pitchFamily="34" charset="-122"/>
                 <a:cs typeface="Calibri" pitchFamily="34" charset="-120"/>
               </a:rPr>
-              <a:t>3.  'Friendship' uses the suffix '-ship' to show a state or condition.</a:t>
+              <a:t>3.  'Friendless' means having too many friends.</a:t>
             </a:r>
             <a:endParaRPr lang="en-US" sz="1300" dirty="0"/>
           </a:p>
@@ -37257,11 +37311,11 @@
             </a:avLst>
           </a:prstGeom>
           <a:solidFill>
-            <a:srgbClr val="DCFCE7"/>
-          </a:solidFill>
-          <a:ln w="12700">
-            <a:solidFill>
-              <a:srgbClr val="16A34A"/>
+            <a:srgbClr val="FEE2E2"/>
+          </a:solidFill>
+          <a:ln w="12700">
+            <a:solidFill>
+              <a:srgbClr val="DC2626"/>
             </a:solidFill>
             <a:prstDash val="solid"/>
           </a:ln>
@@ -37294,13 +37348,13 @@
             <a:r>
               <a:rPr lang="en-US" sz="1100" b="1" dirty="0">
                 <a:solidFill>
-                  <a:srgbClr val="16A34A"/>
+                  <a:srgbClr val="DC2626"/>
                 </a:solidFill>
                 <a:latin typeface="Trebuchet MS" pitchFamily="34" charset="0"/>
                 <a:ea typeface="Trebuchet MS" pitchFamily="34" charset="-122"/>
                 <a:cs typeface="Trebuchet MS" pitchFamily="34" charset="-120"/>
               </a:rPr>
-              <a:t>TRUE</a:t>
+              <a:t>FALSE</a:t>
             </a:r>
             <a:endParaRPr lang="en-US" sz="1100" dirty="0"/>
           </a:p>
@@ -37373,7 +37427,7 @@
                 <a:ea typeface="Calibri" pitchFamily="34" charset="-122"/>
                 <a:cs typeface="Calibri" pitchFamily="34" charset="-120"/>
               </a:rPr>
-              <a:t>4.  'Friendless' means having too many friends.</a:t>
+              <a:t>4.  The root 'friend' comes from the Greek word for love.</a:t>
             </a:r>
             <a:endParaRPr lang="en-US" sz="1300" dirty="0"/>
           </a:p>
